--- a/07_presentations/Pathfinder_Workshop_Einfuehrung.pptx
+++ b/07_presentations/Pathfinder_Workshop_Einfuehrung.pptx
@@ -5,30 +5,33 @@
     <p:sldMasterId id="2147483648" r:id="rId1"/>
   </p:sldMasterIdLst>
   <p:notesMasterIdLst>
-    <p:notesMasterId r:id="rId36"/>
+    <p:notesMasterId r:id="rId23"/>
   </p:notesMasterIdLst>
   <p:handoutMasterIdLst>
-    <p:handoutMasterId r:id="rId37"/>
+    <p:handoutMasterId r:id="rId24"/>
   </p:handoutMasterIdLst>
   <p:sldIdLst>
-    <p:sldId id="258" r:id="rId4"/>
-    <p:sldId id="261" r:id="rId7"/>
-    <p:sldId id="268" r:id="rId13"/>
-    <p:sldId id="292" r:id="rId42"/>
-    <p:sldId id="293" r:id="rId43"/>
-    <p:sldId id="294" r:id="rId44"/>
-    <p:sldId id="295" r:id="rId49"/>
-    <p:sldId id="271" r:id="rId16"/>
-    <p:sldId id="296" r:id="rId45"/>
-    <p:sldId id="297" r:id="rId52"/>
-    <p:sldId id="298" r:id="rId50"/>
-    <p:sldId id="299" r:id="rId46"/>
-    <p:sldId id="273" r:id="rId18"/>
-    <p:sldId id="300" r:id="rId47"/>
-    <p:sldId id="301" r:id="rId51"/>
-    <p:sldId id="302" r:id="rId48"/>
-    <p:sldId id="267" r:id="rId11"/>
-    <p:sldId id="275" r:id="rId20"/>
+    <p:sldId id="258" r:id="rId2"/>
+    <p:sldId id="261" r:id="rId3"/>
+    <p:sldId id="307" r:id="rId4"/>
+    <p:sldId id="268" r:id="rId5"/>
+    <p:sldId id="292" r:id="rId6"/>
+    <p:sldId id="293" r:id="rId7"/>
+    <p:sldId id="294" r:id="rId8"/>
+    <p:sldId id="295" r:id="rId9"/>
+    <p:sldId id="271" r:id="rId10"/>
+    <p:sldId id="306" r:id="rId11"/>
+    <p:sldId id="305" r:id="rId12"/>
+    <p:sldId id="296" r:id="rId13"/>
+    <p:sldId id="297" r:id="rId14"/>
+    <p:sldId id="298" r:id="rId15"/>
+    <p:sldId id="299" r:id="rId16"/>
+    <p:sldId id="273" r:id="rId17"/>
+    <p:sldId id="300" r:id="rId18"/>
+    <p:sldId id="301" r:id="rId19"/>
+    <p:sldId id="302" r:id="rId20"/>
+    <p:sldId id="267" r:id="rId21"/>
+    <p:sldId id="275" r:id="rId22"/>
   </p:sldIdLst>
   <p:sldSz cx="12192000" cy="6858000"/>
   <p:notesSz cx="6858000" cy="9144000"/>
@@ -1023,7 +1026,7 @@
             <a:pPr lvl="0"/>
             <a:r>
               <a:rPr lang="de-DE" dirty="0"/>
-              <a:t xml:space="preserve">Design </a:t>
+              <a:t>Design </a:t>
             </a:r>
             <a:r>
               <a:rPr lang="de-DE" dirty="0" err="1"/>
@@ -1031,7 +1034,7 @@
             </a:r>
             <a:r>
               <a:rPr lang="de-DE" dirty="0"/>
-              <a:t xml:space="preserve"> Technology | Fachbereich Gestaltung</a:t>
+              <a:t> Technology | Fachbereich Gestaltung</a:t>
             </a:r>
           </a:p>
         </p:txBody>
@@ -1763,7 +1766,7 @@
             </a:r>
             <a:r>
               <a:rPr lang="de-DE" dirty="0"/>
-              <a:t xml:space="preserve"> </a:t>
+              <a:t> </a:t>
             </a:r>
             <a:r>
               <a:rPr lang="de-DE" dirty="0" err="1"/>
@@ -2211,7 +2214,7 @@
             </a:r>
             <a:r>
               <a:rPr lang="de-DE" dirty="0"/>
-              <a:t xml:space="preserve"> </a:t>
+              <a:t> </a:t>
             </a:r>
             <a:r>
               <a:rPr lang="de-DE" dirty="0" err="1"/>
@@ -3027,7 +3030,7 @@
             </a:r>
             <a:r>
               <a:rPr lang="de-DE" dirty="0"/>
-              <a:t xml:space="preserve"> </a:t>
+              <a:t> </a:t>
             </a:r>
             <a:r>
               <a:rPr lang="de-DE" dirty="0" err="1"/>
@@ -3742,7 +3745,7 @@
             </a:r>
             <a:r>
               <a:rPr lang="de-DE" dirty="0"/>
-              <a:t xml:space="preserve"> </a:t>
+              <a:t> </a:t>
             </a:r>
             <a:r>
               <a:rPr lang="de-DE" dirty="0" err="1"/>
@@ -4509,7 +4512,7 @@
             </a:r>
             <a:r>
               <a:rPr lang="de-DE" dirty="0"/>
-              <a:t xml:space="preserve"> </a:t>
+              <a:t> </a:t>
             </a:r>
             <a:r>
               <a:rPr lang="de-DE" dirty="0" err="1"/>
@@ -5164,7 +5167,7 @@
             </a:r>
             <a:r>
               <a:rPr lang="de-DE" dirty="0"/>
-              <a:t xml:space="preserve"> </a:t>
+              <a:t> </a:t>
             </a:r>
             <a:r>
               <a:rPr lang="de-DE" dirty="0" err="1"/>
@@ -5982,7 +5985,7 @@
             </a:r>
             <a:r>
               <a:rPr lang="de-DE" dirty="0"/>
-              <a:t xml:space="preserve"> </a:t>
+              <a:t> </a:t>
             </a:r>
             <a:r>
               <a:rPr lang="de-DE" dirty="0" err="1"/>
@@ -6859,7 +6862,7 @@
             </a:r>
             <a:r>
               <a:rPr lang="de-DE" dirty="0"/>
-              <a:t xml:space="preserve"> </a:t>
+              <a:t> </a:t>
             </a:r>
             <a:r>
               <a:rPr lang="de-DE" dirty="0" err="1"/>
@@ -7632,7 +7635,7 @@
             </a:r>
             <a:r>
               <a:rPr lang="de-DE" dirty="0"/>
-              <a:t xml:space="preserve"> </a:t>
+              <a:t> </a:t>
             </a:r>
             <a:r>
               <a:rPr lang="de-DE" dirty="0" err="1"/>
@@ -8440,7 +8443,7 @@
             </a:r>
             <a:r>
               <a:rPr lang="de-DE" dirty="0"/>
-              <a:t xml:space="preserve"> </a:t>
+              <a:t> </a:t>
             </a:r>
             <a:r>
               <a:rPr lang="de-DE" dirty="0" err="1"/>
@@ -8940,7 +8943,7 @@
             <a:pPr lvl="0"/>
             <a:r>
               <a:rPr lang="de-DE" dirty="0"/>
-              <a:t xml:space="preserve">Design </a:t>
+              <a:t>Design </a:t>
             </a:r>
             <a:r>
               <a:rPr lang="de-DE" dirty="0" err="1"/>
@@ -8948,7 +8951,7 @@
             </a:r>
             <a:r>
               <a:rPr lang="de-DE" dirty="0"/>
-              <a:t xml:space="preserve"> Technology | Fachbereich Gestaltung</a:t>
+              <a:t> Technology | Fachbereich Gestaltung</a:t>
             </a:r>
           </a:p>
         </p:txBody>
@@ -9913,7 +9916,7 @@
             </a:r>
             <a:r>
               <a:rPr lang="de-DE" dirty="0"/>
-              <a:t xml:space="preserve"> </a:t>
+              <a:t> </a:t>
             </a:r>
             <a:r>
               <a:rPr lang="de-DE" dirty="0" err="1"/>
@@ -10998,7 +11001,7 @@
             </a:r>
             <a:r>
               <a:rPr lang="de-DE" dirty="0"/>
-              <a:t xml:space="preserve"> </a:t>
+              <a:t> </a:t>
             </a:r>
             <a:r>
               <a:rPr lang="de-DE" dirty="0" err="1"/>
@@ -12389,7 +12392,7 @@
             </a:r>
             <a:r>
               <a:rPr lang="de-DE" dirty="0"/>
-              <a:t xml:space="preserve"> </a:t>
+              <a:t> </a:t>
             </a:r>
             <a:r>
               <a:rPr lang="de-DE" dirty="0" err="1"/>
@@ -13156,7 +13159,7 @@
             </a:r>
             <a:r>
               <a:rPr lang="de-DE" dirty="0"/>
-              <a:t xml:space="preserve"> </a:t>
+              <a:t> </a:t>
             </a:r>
             <a:r>
               <a:rPr lang="de-DE" dirty="0" err="1"/>
@@ -14027,7 +14030,7 @@
             </a:r>
             <a:r>
               <a:rPr lang="de-DE" dirty="0"/>
-              <a:t xml:space="preserve"> </a:t>
+              <a:t> </a:t>
             </a:r>
             <a:r>
               <a:rPr lang="de-DE" dirty="0" err="1"/>
@@ -14610,7 +14613,7 @@
             </a:r>
             <a:r>
               <a:rPr lang="de-DE" dirty="0"/>
-              <a:t xml:space="preserve"> </a:t>
+              <a:t> </a:t>
             </a:r>
             <a:r>
               <a:rPr lang="de-DE" dirty="0" err="1"/>
@@ -15611,7 +15614,7 @@
             <a:pPr lvl="0"/>
             <a:r>
               <a:rPr lang="de-DE" dirty="0"/>
-              <a:t xml:space="preserve">Design </a:t>
+              <a:t>Design </a:t>
             </a:r>
             <a:r>
               <a:rPr lang="de-DE" dirty="0" err="1"/>
@@ -15619,7 +15622,7 @@
             </a:r>
             <a:r>
               <a:rPr lang="de-DE" dirty="0"/>
-              <a:t xml:space="preserve"> Technology | Fachbereich Gestaltung</a:t>
+              <a:t> Technology | Fachbereich Gestaltung</a:t>
             </a:r>
           </a:p>
         </p:txBody>
@@ -16216,7 +16219,7 @@
             <a:pPr lvl="0"/>
             <a:r>
               <a:rPr lang="de-DE" dirty="0"/>
-              <a:t xml:space="preserve">Design </a:t>
+              <a:t>Design </a:t>
             </a:r>
             <a:r>
               <a:rPr lang="de-DE" dirty="0" err="1"/>
@@ -16224,7 +16227,7 @@
             </a:r>
             <a:r>
               <a:rPr lang="de-DE" dirty="0"/>
-              <a:t xml:space="preserve"> Technology | Fachbereich Gestaltung</a:t>
+              <a:t> Technology | Fachbereich Gestaltung</a:t>
             </a:r>
           </a:p>
         </p:txBody>
@@ -16854,7 +16857,7 @@
             <a:pPr lvl="0"/>
             <a:r>
               <a:rPr lang="de-DE" dirty="0"/>
-              <a:t xml:space="preserve">Design </a:t>
+              <a:t>Design </a:t>
             </a:r>
             <a:r>
               <a:rPr lang="de-DE" dirty="0" err="1"/>
@@ -16862,7 +16865,7 @@
             </a:r>
             <a:r>
               <a:rPr lang="de-DE" dirty="0"/>
-              <a:t xml:space="preserve"> Technology | Fachbereich Gestaltung</a:t>
+              <a:t> Technology | Fachbereich Gestaltung</a:t>
             </a:r>
           </a:p>
         </p:txBody>
@@ -17569,7 +17572,7 @@
             </a:r>
             <a:r>
               <a:rPr lang="de-DE" dirty="0"/>
-              <a:t xml:space="preserve"> </a:t>
+              <a:t> </a:t>
             </a:r>
             <a:r>
               <a:rPr lang="de-DE" dirty="0" err="1"/>
@@ -18116,7 +18119,7 @@
             </a:r>
             <a:r>
               <a:rPr lang="de-DE" dirty="0"/>
-              <a:t xml:space="preserve"> </a:t>
+              <a:t> </a:t>
             </a:r>
             <a:r>
               <a:rPr lang="de-DE" dirty="0" err="1"/>
@@ -18781,7 +18784,7 @@
             </a:r>
             <a:r>
               <a:rPr lang="de-DE" dirty="0"/>
-              <a:t xml:space="preserve"> </a:t>
+              <a:t> </a:t>
             </a:r>
             <a:r>
               <a:rPr lang="de-DE" dirty="0" err="1"/>
@@ -19103,7 +19106,7 @@
             </a:r>
             <a:r>
               <a:rPr lang="de-DE"/>
-              <a:t xml:space="preserve"> Footer</a:t>
+              <a:t> Footer</a:t>
             </a:r>
             <a:endParaRPr lang="de-CH" dirty="0"/>
           </a:p>
@@ -19391,7 +19394,7 @@
             </a:r>
             <a:r>
               <a:rPr lang="de-DE" dirty="0"/>
-              <a:t xml:space="preserve"> </a:t>
+              <a:t> </a:t>
             </a:r>
             <a:r>
               <a:rPr lang="de-DE" dirty="0" err="1"/>
@@ -19894,7 +19897,7 @@
 </p:sldMaster>
 </file>
 
-<file path=ppt/slides/slide10.xml><?xml version="1.0" encoding="utf-8"?>
+<file path=ppt/slides/slide1.xml><?xml version="1.0" encoding="utf-8"?>
 <p:sld xmlns:a="http://schemas.openxmlformats.org/drawingml/2006/main" xmlns:r="http://schemas.openxmlformats.org/officeDocument/2006/relationships" xmlns:p="http://schemas.openxmlformats.org/presentationml/2006/main">
   <p:cSld>
     <p:spTree>
@@ -19916,25 +19919,63 @@
           <p:cNvPr id="2" name="Titel 1">
             <a:extLst>
               <a:ext uri="{FF2B5EF4-FFF2-40B4-BE49-F238E27FC236}">
-                <a16:creationId xmlns:a16="http://schemas.microsoft.com/office/drawing/2014/main" id="{41DF9D96-1AFA-40BA-BAE5-8D745FEC2462}"/>
-              </a:ext>
-            </a:extLst>
-          </p:cNvPr>
-          <p:cNvSpPr>
-            <a:spLocks noGrp="1"/>
-          </p:cNvSpPr>
-          <p:nvPr>
-            <p:ph type="title"/>
-          </p:nvPr>
-        </p:nvSpPr>
-        <p:spPr/>
+                <a16:creationId xmlns:a16="http://schemas.microsoft.com/office/drawing/2014/main" id="{3FDF9179-5F46-4028-8AD3-4988AB9A6C56}"/>
+              </a:ext>
+            </a:extLst>
+          </p:cNvPr>
+          <p:cNvSpPr>
+            <a:spLocks noGrp="1"/>
+          </p:cNvSpPr>
+          <p:nvPr>
+            <p:ph type="ctrTitle"/>
+          </p:nvPr>
+        </p:nvSpPr>
+        <p:spPr>
+          <a:xfrm>
+            <a:off x="-1" y="1940405"/>
+            <a:ext cx="11709780" cy="3420000"/>
+          </a:xfrm>
+        </p:spPr>
         <p:txBody>
           <a:bodyPr/>
           <a:lstStyle/>
           <a:p>
             <a:r>
               <a:rPr lang="de-DE" dirty="0"/>
-              <a:t>Nächste Schritte</a:t>
+              <a:t>Pathfinder Workshop</a:t>
+            </a:r>
+            <a:br>
+              <a:rPr lang="de-DE" dirty="0"/>
+            </a:br>
+            <a:r>
+              <a:rPr lang="de-DE" dirty="0"/>
+              <a:t>Interaktive Systeme mit KI und ESP32</a:t>
+            </a:r>
+            <a:br>
+              <a:rPr lang="de-DE" dirty="0"/>
+            </a:br>
+            <a:br>
+              <a:rPr lang="de-DE" dirty="0"/>
+            </a:br>
+            <a:r>
+              <a:rPr lang="de-DE" dirty="0" err="1"/>
+              <a:t>www.github.com</a:t>
+            </a:r>
+            <a:r>
+              <a:rPr lang="de-DE" dirty="0"/>
+              <a:t>/</a:t>
+            </a:r>
+            <a:r>
+              <a:rPr lang="de-DE" dirty="0" err="1"/>
+              <a:t>archilab</a:t>
+            </a:r>
+            <a:r>
+              <a:rPr lang="de-DE" dirty="0"/>
+              <a:t>/</a:t>
+            </a:r>
+            <a:r>
+              <a:rPr lang="de-DE" dirty="0" err="1"/>
+              <a:t>pathfinder_workshop</a:t>
             </a:r>
             <a:endParaRPr lang="de-CH" dirty="0"/>
           </a:p>
@@ -19942,127 +19983,110 @@
       </p:sp>
       <p:sp>
         <p:nvSpPr>
-          <p:cNvPr id="3" name="Inhaltsplatzhalter 2">
-            <a:extLst>
-              <a:ext uri="{FF2B5EF4-FFF2-40B4-BE49-F238E27FC236}">
-                <a16:creationId xmlns:a16="http://schemas.microsoft.com/office/drawing/2014/main" id="{5D30C9CD-6F3E-4243-AF8B-598CBE0FFE30}"/>
-              </a:ext>
-            </a:extLst>
-          </p:cNvPr>
-          <p:cNvSpPr>
-            <a:spLocks noGrp="1"/>
-          </p:cNvSpPr>
-          <p:nvPr>
-            <p:ph idx="1"/>
-          </p:nvPr>
-        </p:nvSpPr>
-        <p:spPr/>
+          <p:cNvPr id="5" name="Textplatzhalter 4">
+            <a:extLst>
+              <a:ext uri="{FF2B5EF4-FFF2-40B4-BE49-F238E27FC236}">
+                <a16:creationId xmlns:a16="http://schemas.microsoft.com/office/drawing/2014/main" id="{9253DF2A-2730-487C-8E19-2CA6CA915ECA}"/>
+              </a:ext>
+            </a:extLst>
+          </p:cNvPr>
+          <p:cNvSpPr>
+            <a:spLocks noGrp="1"/>
+          </p:cNvSpPr>
+          <p:nvPr>
+            <p:ph type="body" sz="quarter" idx="13"/>
+          </p:nvPr>
+        </p:nvSpPr>
+        <p:spPr>
+          <a:xfrm>
+            <a:off x="1078516" y="4736501"/>
+            <a:ext cx="8640000" cy="1008000"/>
+          </a:xfrm>
+        </p:spPr>
         <p:txBody>
           <a:bodyPr/>
           <a:lstStyle/>
           <a:p>
-            <a:pPr marL="0" indent="0">
-              <a:buNone/>
-            </a:pPr>
-            <a:r>
-              <a:rPr lang="de-DE" b="1" dirty="0"/>
-              <a:t>Setup &amp; Installation</a:t>
-            </a:r>
-          </a:p>
-          <a:p>
-            <a:pPr marL="0" indent="0">
-              <a:buNone/>
-            </a:pPr>
-            <a:r>
-              <a:rPr lang="de-DE" dirty="0"/>
-              <a:t>VS Code + PlatformIO installieren — Schritt-für-Schritt im GitHub-Repo</a:t>
-            </a:r>
-          </a:p>
-          <a:p>
-            <a:pPr marL="0" indent="0">
-              <a:buNone/>
-            </a:pPr>
-            <a:r>
-              <a:rPr lang="de-DE" dirty="0"/>
-              <a:t/>
-            </a:r>
-          </a:p>
-          <a:p>
-            <a:pPr marL="0" indent="0">
-              <a:buNone/>
-            </a:pPr>
-            <a:r>
-              <a:rPr lang="de-DE" b="1" dirty="0"/>
-              <a:t>Erste Verbindung</a:t>
-            </a:r>
-          </a:p>
-          <a:p>
-            <a:pPr marL="0" indent="0">
-              <a:buNone/>
-            </a:pPr>
-            <a:r>
-              <a:rPr lang="de-DE" dirty="0"/>
-              <a:t>“Blink”-Beispiel deployen und Sensor-Kanal testen</a:t>
-            </a:r>
-          </a:p>
-          <a:p>
-            <a:pPr marL="0" indent="0">
-              <a:buNone/>
-            </a:pPr>
-            <a:r>
-              <a:rPr lang="de-DE" dirty="0"/>
-              <a:t/>
-            </a:r>
-          </a:p>
-          <a:p>
-            <a:pPr marL="0" indent="0">
-              <a:buNone/>
-            </a:pPr>
-            <a:r>
-              <a:rPr lang="de-DE" b="1" dirty="0"/>
-              <a:t>GitHub Repository</a:t>
-            </a:r>
-          </a:p>
-          <a:p>
-            <a:pPr marL="0" indent="0">
-              <a:buNone/>
-            </a:pPr>
-            <a:r>
-              <a:rPr lang="de-DE" dirty="0"/>
-              <a:t>github.com/archilab/pathfinder-workshop — Dokumentation, Beispiele, GPT-Dataset</a:t>
-            </a:r>
-          </a:p>
-        </p:txBody>
-      </p:sp>
-      <p:sp>
-        <p:nvSpPr>
-          <p:cNvPr id="5" name="Fußzeilenplatzhalter 4">
-            <a:extLst>
-              <a:ext uri="{FF2B5EF4-FFF2-40B4-BE49-F238E27FC236}">
-                <a16:creationId xmlns:a16="http://schemas.microsoft.com/office/drawing/2014/main" id="{08000522-08D1-4C97-AE24-545093D719FE}"/>
-              </a:ext>
-            </a:extLst>
-          </p:cNvPr>
-          <p:cNvSpPr>
-            <a:spLocks noGrp="1"/>
-          </p:cNvSpPr>
-          <p:nvPr>
-            <p:ph type="ftr" sz="quarter" idx="3"/>
-          </p:nvPr>
-        </p:nvSpPr>
-        <p:spPr>
-          <a:xfrm>
-            <a:off x="2533972" y="6522444"/>
-            <a:ext cx="4038600" cy="215999"/>
+            <a:r>
+              <a:rPr lang="de-DE" b="1" dirty="0">
+                <a:solidFill>
+                  <a:schemeClr val="tx1">
+                    <a:lumMod val="50000"/>
+                    <a:lumOff val="50000"/>
+                  </a:schemeClr>
+                </a:solidFill>
+              </a:rPr>
+              <a:t>Prof. Stefan Neudecker</a:t>
+            </a:r>
+          </a:p>
+          <a:p>
+            <a:r>
+              <a:rPr lang="de-DE" dirty="0">
+                <a:solidFill>
+                  <a:schemeClr val="tx1">
+                    <a:lumMod val="50000"/>
+                    <a:lumOff val="50000"/>
+                  </a:schemeClr>
+                </a:solidFill>
+              </a:rPr>
+              <a:t>Design by Technology | Industrialdesign</a:t>
+            </a:r>
+          </a:p>
+          <a:p>
+            <a:r>
+              <a:rPr lang="de-DE" dirty="0">
+                <a:solidFill>
+                  <a:schemeClr val="tx1">
+                    <a:lumMod val="50000"/>
+                    <a:lumOff val="50000"/>
+                  </a:schemeClr>
+                </a:solidFill>
+              </a:rPr>
+              <a:t>Sommersemester 2026, Folkwang Universität der Künste</a:t>
+            </a:r>
+            <a:endParaRPr lang="de-CH" dirty="0">
+              <a:solidFill>
+                <a:schemeClr val="tx1">
+                  <a:lumMod val="50000"/>
+                  <a:lumOff val="50000"/>
+                </a:schemeClr>
+              </a:solidFill>
+            </a:endParaRPr>
+          </a:p>
+        </p:txBody>
+      </p:sp>
+      <p:sp>
+        <p:nvSpPr>
+          <p:cNvPr id="7" name="Textplatzhalter 8">
+            <a:extLst>
+              <a:ext uri="{FF2B5EF4-FFF2-40B4-BE49-F238E27FC236}">
+                <a16:creationId xmlns:a16="http://schemas.microsoft.com/office/drawing/2014/main" id="{C6B18E6F-BDD9-4B0B-9B9E-C25187E0E1F2}"/>
+              </a:ext>
+            </a:extLst>
+          </p:cNvPr>
+          <p:cNvSpPr>
+            <a:spLocks noGrp="1"/>
+          </p:cNvSpPr>
+          <p:nvPr>
+            <p:ph type="body" sz="quarter" idx="4294967295"/>
+          </p:nvPr>
+        </p:nvSpPr>
+        <p:spPr>
+          <a:xfrm>
+            <a:off x="6211614" y="316800"/>
+            <a:ext cx="5248549" cy="360000"/>
           </a:xfrm>
         </p:spPr>
         <p:txBody>
           <a:bodyPr/>
           <a:lstStyle/>
           <a:p>
+            <a:pPr marL="0" indent="0" algn="r">
+              <a:buNone/>
+            </a:pPr>
             <a:r>
               <a:rPr lang="de-DE" dirty="0"/>
-              <a:t xml:space="preserve">Design </a:t>
+              <a:t>Design </a:t>
             </a:r>
             <a:r>
               <a:rPr lang="de-DE" dirty="0" err="1"/>
@@ -20070,84 +20094,450 @@
             </a:r>
             <a:r>
               <a:rPr lang="de-DE" dirty="0"/>
-              <a:t xml:space="preserve"> Technology</a:t>
+              <a:t> Technology</a:t>
             </a:r>
             <a:endParaRPr lang="de-CH" dirty="0"/>
-          </a:p>
-        </p:txBody>
-      </p:sp>
-      <p:sp>
-        <p:nvSpPr>
-          <p:cNvPr id="4" name="Datumsplatzhalter 3">
-            <a:extLst>
-              <a:ext uri="{FF2B5EF4-FFF2-40B4-BE49-F238E27FC236}">
-                <a16:creationId xmlns:a16="http://schemas.microsoft.com/office/drawing/2014/main" id="{3E5DECAF-74B9-42C9-91F9-16811C11DDD9}"/>
-              </a:ext>
-            </a:extLst>
-          </p:cNvPr>
-          <p:cNvSpPr>
-            <a:spLocks noGrp="1"/>
-          </p:cNvSpPr>
-          <p:nvPr>
-            <p:ph type="dt" sz="half" idx="2"/>
-          </p:nvPr>
-        </p:nvSpPr>
-        <p:spPr>
-          <a:xfrm>
-            <a:off x="10328132" y="6522442"/>
-            <a:ext cx="789039" cy="216001"/>
-          </a:xfrm>
-        </p:spPr>
-        <p:txBody>
-          <a:bodyPr/>
-          <a:lstStyle/>
-          <a:p>
-            <a:fld id="{255C2D81-634A-41B2-966F-5B8C1282A848}" type="datetime1">
-              <a:rPr lang="de-CH" noProof="0" smtClean="0"/>
-              <a:t>13.04.26</a:t>
-            </a:fld>
-            <a:endParaRPr lang="de-CH" noProof="0"/>
-          </a:p>
-        </p:txBody>
-      </p:sp>
-      <p:sp>
-        <p:nvSpPr>
-          <p:cNvPr id="6" name="Foliennummernplatzhalter 5">
-            <a:extLst>
-              <a:ext uri="{FF2B5EF4-FFF2-40B4-BE49-F238E27FC236}">
-                <a16:creationId xmlns:a16="http://schemas.microsoft.com/office/drawing/2014/main" id="{92390BB4-CA1A-4AB3-997F-BC93DE23C7B5}"/>
-              </a:ext>
-            </a:extLst>
-          </p:cNvPr>
-          <p:cNvSpPr>
-            <a:spLocks noGrp="1"/>
-          </p:cNvSpPr>
-          <p:nvPr>
-            <p:ph type="sldNum" sz="quarter" idx="4"/>
-          </p:nvPr>
-        </p:nvSpPr>
-        <p:spPr>
-          <a:xfrm>
-            <a:off x="11137585" y="6522444"/>
-            <a:ext cx="322577" cy="216000"/>
-          </a:xfrm>
-        </p:spPr>
-        <p:txBody>
-          <a:bodyPr/>
-          <a:lstStyle/>
-          <a:p>
-            <a:fld id="{5ACA52AF-F19D-405C-AD5F-7D94B96A5CC3}" type="slidenum">
-              <a:rPr lang="de-CH" noProof="0" smtClean="0"/>
-              <a:t>10</a:t>
-            </a:fld>
-            <a:endParaRPr lang="de-CH" noProof="0"/>
           </a:p>
         </p:txBody>
       </p:sp>
     </p:spTree>
     <p:extLst>
       <p:ext uri="{BB962C8B-B14F-4D97-AF65-F5344CB8AC3E}">
-        <p14:creationId xmlns:p14="http://schemas.microsoft.com/office/powerpoint/2010/main" val="2463831729"/>
+        <p14:creationId xmlns:p14="http://schemas.microsoft.com/office/powerpoint/2010/main" val="3782702085"/>
+      </p:ext>
+    </p:extLst>
+  </p:cSld>
+  <p:clrMapOvr>
+    <a:masterClrMapping/>
+  </p:clrMapOvr>
+</p:sld>
+</file>
+
+<file path=ppt/slides/slide10.xml><?xml version="1.0" encoding="utf-8"?>
+<p:sld xmlns:a="http://schemas.openxmlformats.org/drawingml/2006/main" xmlns:r="http://schemas.openxmlformats.org/officeDocument/2006/relationships" xmlns:p="http://schemas.openxmlformats.org/presentationml/2006/main">
+  <p:cSld>
+    <p:spTree>
+      <p:nvGrpSpPr>
+        <p:cNvPr id="1" name="">
+          <a:extLst>
+            <a:ext uri="{FF2B5EF4-FFF2-40B4-BE49-F238E27FC236}">
+              <a16:creationId xmlns:a16="http://schemas.microsoft.com/office/drawing/2014/main" id="{57C49A25-6D4B-7449-BE95-B4A91BD898EB}"/>
+            </a:ext>
+          </a:extLst>
+        </p:cNvPr>
+        <p:cNvGrpSpPr/>
+        <p:nvPr/>
+      </p:nvGrpSpPr>
+      <p:grpSpPr>
+        <a:xfrm>
+          <a:off x="0" y="0"/>
+          <a:ext cx="0" cy="0"/>
+          <a:chOff x="0" y="0"/>
+          <a:chExt cx="0" cy="0"/>
+        </a:xfrm>
+      </p:grpSpPr>
+      <p:sp>
+        <p:nvSpPr>
+          <p:cNvPr id="4" name="Datumsplatzhalter 3">
+            <a:extLst>
+              <a:ext uri="{FF2B5EF4-FFF2-40B4-BE49-F238E27FC236}">
+                <a16:creationId xmlns:a16="http://schemas.microsoft.com/office/drawing/2014/main" id="{0CE8254D-FA03-C106-4705-B6A9786302D5}"/>
+              </a:ext>
+            </a:extLst>
+          </p:cNvPr>
+          <p:cNvSpPr>
+            <a:spLocks noGrp="1"/>
+          </p:cNvSpPr>
+          <p:nvPr>
+            <p:ph type="dt" sz="half" idx="2"/>
+          </p:nvPr>
+        </p:nvSpPr>
+        <p:spPr>
+          <a:xfrm>
+            <a:off x="10328132" y="6522442"/>
+            <a:ext cx="789039" cy="216001"/>
+          </a:xfrm>
+        </p:spPr>
+        <p:txBody>
+          <a:bodyPr anchor="ctr">
+            <a:normAutofit/>
+          </a:bodyPr>
+          <a:lstStyle/>
+          <a:p>
+            <a:pPr marL="95250">
+              <a:spcAft>
+                <a:spcPts val="600"/>
+              </a:spcAft>
+            </a:pPr>
+            <a:fld id="{4A358CF3-A22A-46C1-A4E5-5810212466EF}" type="datetime1">
+              <a:rPr lang="de-CH" smtClean="0"/>
+              <a:pPr marL="95250">
+                <a:spcAft>
+                  <a:spcPts val="600"/>
+                </a:spcAft>
+              </a:pPr>
+              <a:t>15.04.26</a:t>
+            </a:fld>
+            <a:endParaRPr lang="de-CH"/>
+          </a:p>
+        </p:txBody>
+      </p:sp>
+      <p:sp>
+        <p:nvSpPr>
+          <p:cNvPr id="5" name="Foliennummernplatzhalter 4">
+            <a:extLst>
+              <a:ext uri="{FF2B5EF4-FFF2-40B4-BE49-F238E27FC236}">
+                <a16:creationId xmlns:a16="http://schemas.microsoft.com/office/drawing/2014/main" id="{1F2758DA-C053-3D75-1C16-EADD22357FEF}"/>
+              </a:ext>
+            </a:extLst>
+          </p:cNvPr>
+          <p:cNvSpPr>
+            <a:spLocks noGrp="1"/>
+          </p:cNvSpPr>
+          <p:nvPr>
+            <p:ph type="sldNum" sz="quarter" idx="4"/>
+          </p:nvPr>
+        </p:nvSpPr>
+        <p:spPr>
+          <a:xfrm>
+            <a:off x="11137585" y="6522444"/>
+            <a:ext cx="322577" cy="216000"/>
+          </a:xfrm>
+        </p:spPr>
+        <p:txBody>
+          <a:bodyPr anchor="ctr">
+            <a:normAutofit/>
+          </a:bodyPr>
+          <a:lstStyle/>
+          <a:p>
+            <a:pPr>
+              <a:spcAft>
+                <a:spcPts val="600"/>
+              </a:spcAft>
+            </a:pPr>
+            <a:fld id="{5ACA52AF-F19D-405C-AD5F-7D94B96A5CC3}" type="slidenum">
+              <a:rPr lang="de-CH" smtClean="0"/>
+              <a:pPr>
+                <a:spcAft>
+                  <a:spcPts val="600"/>
+                </a:spcAft>
+              </a:pPr>
+              <a:t>10</a:t>
+            </a:fld>
+            <a:endParaRPr lang="de-CH"/>
+          </a:p>
+        </p:txBody>
+      </p:sp>
+      <p:sp>
+        <p:nvSpPr>
+          <p:cNvPr id="8" name="Fußzeilenplatzhalter 4">
+            <a:extLst>
+              <a:ext uri="{FF2B5EF4-FFF2-40B4-BE49-F238E27FC236}">
+                <a16:creationId xmlns:a16="http://schemas.microsoft.com/office/drawing/2014/main" id="{4CC96F1F-52FD-AA44-2189-45CED5906B67}"/>
+              </a:ext>
+            </a:extLst>
+          </p:cNvPr>
+          <p:cNvSpPr>
+            <a:spLocks noGrp="1"/>
+          </p:cNvSpPr>
+          <p:nvPr>
+            <p:ph type="ftr" sz="quarter" idx="3"/>
+          </p:nvPr>
+        </p:nvSpPr>
+        <p:spPr>
+          <a:xfrm>
+            <a:off x="2563285" y="6516094"/>
+            <a:ext cx="4038600" cy="215999"/>
+          </a:xfrm>
+        </p:spPr>
+        <p:txBody>
+          <a:bodyPr anchor="ctr">
+            <a:normAutofit/>
+          </a:bodyPr>
+          <a:lstStyle/>
+          <a:p>
+            <a:pPr>
+              <a:spcAft>
+                <a:spcPts val="600"/>
+              </a:spcAft>
+            </a:pPr>
+            <a:r>
+              <a:rPr lang="de-DE" dirty="0"/>
+              <a:t>Design </a:t>
+            </a:r>
+            <a:r>
+              <a:rPr lang="de-DE" dirty="0" err="1"/>
+              <a:t>by</a:t>
+            </a:r>
+            <a:r>
+              <a:rPr lang="de-DE" dirty="0"/>
+              <a:t> Technology.        </a:t>
+            </a:r>
+            <a:r>
+              <a:rPr lang="de-DE" dirty="0" err="1"/>
+              <a:t>PathFinder</a:t>
+            </a:r>
+            <a:endParaRPr lang="de-CH"/>
+          </a:p>
+        </p:txBody>
+      </p:sp>
+      <p:pic>
+        <p:nvPicPr>
+          <p:cNvPr id="6" name="Grafik 5">
+            <a:extLst>
+              <a:ext uri="{FF2B5EF4-FFF2-40B4-BE49-F238E27FC236}">
+                <a16:creationId xmlns:a16="http://schemas.microsoft.com/office/drawing/2014/main" id="{A568C0CE-F5CA-3DA7-1646-3EEAD988E6E8}"/>
+              </a:ext>
+            </a:extLst>
+          </p:cNvPr>
+          <p:cNvPicPr>
+            <a:picLocks noChangeAspect="1"/>
+          </p:cNvPicPr>
+          <p:nvPr/>
+        </p:nvPicPr>
+        <p:blipFill>
+          <a:blip>
+            <a:extLst>
+              <a:ext uri="{96DAC541-7B7A-43D3-8B79-37D633B846F1}">
+                <asvg:svgBlip xmlns:asvg="http://schemas.microsoft.com/office/drawing/2016/SVG/main" r:embed="rId2"/>
+              </a:ext>
+            </a:extLst>
+          </a:blip>
+          <a:stretch>
+            <a:fillRect/>
+          </a:stretch>
+        </p:blipFill>
+        <p:spPr>
+          <a:xfrm>
+            <a:off x="324323" y="-147461"/>
+            <a:ext cx="9676262" cy="6432197"/>
+          </a:xfrm>
+          <a:prstGeom prst="rect">
+            <a:avLst/>
+          </a:prstGeom>
+        </p:spPr>
+      </p:pic>
+    </p:spTree>
+    <p:extLst>
+      <p:ext uri="{BB962C8B-B14F-4D97-AF65-F5344CB8AC3E}">
+        <p14:creationId xmlns:p14="http://schemas.microsoft.com/office/powerpoint/2010/main" val="784088270"/>
+      </p:ext>
+    </p:extLst>
+  </p:cSld>
+  <p:clrMapOvr>
+    <a:masterClrMapping/>
+  </p:clrMapOvr>
+</p:sld>
+</file>
+
+<file path=ppt/slides/slide11.xml><?xml version="1.0" encoding="utf-8"?>
+<p:sld xmlns:a="http://schemas.openxmlformats.org/drawingml/2006/main" xmlns:r="http://schemas.openxmlformats.org/officeDocument/2006/relationships" xmlns:p="http://schemas.openxmlformats.org/presentationml/2006/main">
+  <p:cSld>
+    <p:spTree>
+      <p:nvGrpSpPr>
+        <p:cNvPr id="1" name="">
+          <a:extLst>
+            <a:ext uri="{FF2B5EF4-FFF2-40B4-BE49-F238E27FC236}">
+              <a16:creationId xmlns:a16="http://schemas.microsoft.com/office/drawing/2014/main" id="{1AEE3D43-7EC4-C59A-27D5-EC0B0A4A6EA6}"/>
+            </a:ext>
+          </a:extLst>
+        </p:cNvPr>
+        <p:cNvGrpSpPr/>
+        <p:nvPr/>
+      </p:nvGrpSpPr>
+      <p:grpSpPr>
+        <a:xfrm>
+          <a:off x="0" y="0"/>
+          <a:ext cx="0" cy="0"/>
+          <a:chOff x="0" y="0"/>
+          <a:chExt cx="0" cy="0"/>
+        </a:xfrm>
+      </p:grpSpPr>
+      <p:sp>
+        <p:nvSpPr>
+          <p:cNvPr id="4" name="Datumsplatzhalter 3">
+            <a:extLst>
+              <a:ext uri="{FF2B5EF4-FFF2-40B4-BE49-F238E27FC236}">
+                <a16:creationId xmlns:a16="http://schemas.microsoft.com/office/drawing/2014/main" id="{A8EA75D8-CF29-76B9-2ACE-F5DBB17E9C84}"/>
+              </a:ext>
+            </a:extLst>
+          </p:cNvPr>
+          <p:cNvSpPr>
+            <a:spLocks noGrp="1"/>
+          </p:cNvSpPr>
+          <p:nvPr>
+            <p:ph type="dt" sz="half" idx="2"/>
+          </p:nvPr>
+        </p:nvSpPr>
+        <p:spPr>
+          <a:xfrm>
+            <a:off x="10328132" y="6522442"/>
+            <a:ext cx="789039" cy="216001"/>
+          </a:xfrm>
+        </p:spPr>
+        <p:txBody>
+          <a:bodyPr anchor="ctr">
+            <a:normAutofit/>
+          </a:bodyPr>
+          <a:lstStyle/>
+          <a:p>
+            <a:pPr marL="95250">
+              <a:spcAft>
+                <a:spcPts val="600"/>
+              </a:spcAft>
+            </a:pPr>
+            <a:fld id="{4A358CF3-A22A-46C1-A4E5-5810212466EF}" type="datetime1">
+              <a:rPr lang="de-CH" smtClean="0"/>
+              <a:pPr marL="95250">
+                <a:spcAft>
+                  <a:spcPts val="600"/>
+                </a:spcAft>
+              </a:pPr>
+              <a:t>15.04.26</a:t>
+            </a:fld>
+            <a:endParaRPr lang="de-CH"/>
+          </a:p>
+        </p:txBody>
+      </p:sp>
+      <p:sp>
+        <p:nvSpPr>
+          <p:cNvPr id="5" name="Foliennummernplatzhalter 4">
+            <a:extLst>
+              <a:ext uri="{FF2B5EF4-FFF2-40B4-BE49-F238E27FC236}">
+                <a16:creationId xmlns:a16="http://schemas.microsoft.com/office/drawing/2014/main" id="{B3ACBEF9-50CD-8F0D-C5E8-441985BAD3D7}"/>
+              </a:ext>
+            </a:extLst>
+          </p:cNvPr>
+          <p:cNvSpPr>
+            <a:spLocks noGrp="1"/>
+          </p:cNvSpPr>
+          <p:nvPr>
+            <p:ph type="sldNum" sz="quarter" idx="4"/>
+          </p:nvPr>
+        </p:nvSpPr>
+        <p:spPr>
+          <a:xfrm>
+            <a:off x="11137585" y="6522444"/>
+            <a:ext cx="322577" cy="216000"/>
+          </a:xfrm>
+        </p:spPr>
+        <p:txBody>
+          <a:bodyPr anchor="ctr">
+            <a:normAutofit/>
+          </a:bodyPr>
+          <a:lstStyle/>
+          <a:p>
+            <a:pPr>
+              <a:spcAft>
+                <a:spcPts val="600"/>
+              </a:spcAft>
+            </a:pPr>
+            <a:fld id="{5ACA52AF-F19D-405C-AD5F-7D94B96A5CC3}" type="slidenum">
+              <a:rPr lang="de-CH" smtClean="0"/>
+              <a:pPr>
+                <a:spcAft>
+                  <a:spcPts val="600"/>
+                </a:spcAft>
+              </a:pPr>
+              <a:t>11</a:t>
+            </a:fld>
+            <a:endParaRPr lang="de-CH"/>
+          </a:p>
+        </p:txBody>
+      </p:sp>
+      <p:sp>
+        <p:nvSpPr>
+          <p:cNvPr id="8" name="Fußzeilenplatzhalter 4">
+            <a:extLst>
+              <a:ext uri="{FF2B5EF4-FFF2-40B4-BE49-F238E27FC236}">
+                <a16:creationId xmlns:a16="http://schemas.microsoft.com/office/drawing/2014/main" id="{CB3A9C86-8010-8C86-0B67-E532D25A2337}"/>
+              </a:ext>
+            </a:extLst>
+          </p:cNvPr>
+          <p:cNvSpPr>
+            <a:spLocks noGrp="1"/>
+          </p:cNvSpPr>
+          <p:nvPr>
+            <p:ph type="ftr" sz="quarter" idx="3"/>
+          </p:nvPr>
+        </p:nvSpPr>
+        <p:spPr>
+          <a:xfrm>
+            <a:off x="2563285" y="6516094"/>
+            <a:ext cx="4038600" cy="215999"/>
+          </a:xfrm>
+        </p:spPr>
+        <p:txBody>
+          <a:bodyPr anchor="ctr">
+            <a:normAutofit/>
+          </a:bodyPr>
+          <a:lstStyle/>
+          <a:p>
+            <a:pPr>
+              <a:spcAft>
+                <a:spcPts val="600"/>
+              </a:spcAft>
+            </a:pPr>
+            <a:r>
+              <a:rPr lang="de-DE" dirty="0"/>
+              <a:t>Design </a:t>
+            </a:r>
+            <a:r>
+              <a:rPr lang="de-DE" dirty="0" err="1"/>
+              <a:t>by</a:t>
+            </a:r>
+            <a:r>
+              <a:rPr lang="de-DE" dirty="0"/>
+              <a:t> Technology.        </a:t>
+            </a:r>
+            <a:r>
+              <a:rPr lang="de-DE" dirty="0" err="1"/>
+              <a:t>PathFinder</a:t>
+            </a:r>
+            <a:endParaRPr lang="de-CH"/>
+          </a:p>
+        </p:txBody>
+      </p:sp>
+      <p:pic>
+        <p:nvPicPr>
+          <p:cNvPr id="3" name="Grafik 2">
+            <a:extLst>
+              <a:ext uri="{FF2B5EF4-FFF2-40B4-BE49-F238E27FC236}">
+                <a16:creationId xmlns:a16="http://schemas.microsoft.com/office/drawing/2014/main" id="{B3D20FDD-92A4-8683-8D17-6D4CEAFEB1EF}"/>
+              </a:ext>
+            </a:extLst>
+          </p:cNvPr>
+          <p:cNvPicPr>
+            <a:picLocks noChangeAspect="1"/>
+          </p:cNvPicPr>
+          <p:nvPr/>
+        </p:nvPicPr>
+        <p:blipFill>
+          <a:blip>
+            <a:extLst>
+              <a:ext uri="{96DAC541-7B7A-43D3-8B79-37D633B846F1}">
+                <asvg:svgBlip xmlns:asvg="http://schemas.microsoft.com/office/drawing/2016/SVG/main" r:embed="rId2"/>
+              </a:ext>
+            </a:extLst>
+          </a:blip>
+          <a:stretch>
+            <a:fillRect/>
+          </a:stretch>
+        </p:blipFill>
+        <p:spPr>
+          <a:xfrm>
+            <a:off x="706454" y="-350767"/>
+            <a:ext cx="9621678" cy="6597722"/>
+          </a:xfrm>
+          <a:prstGeom prst="rect">
+            <a:avLst/>
+          </a:prstGeom>
+        </p:spPr>
+      </p:pic>
+    </p:spTree>
+    <p:extLst>
+      <p:ext uri="{BB962C8B-B14F-4D97-AF65-F5344CB8AC3E}">
+        <p14:creationId xmlns:p14="http://schemas.microsoft.com/office/powerpoint/2010/main" val="3436194614"/>
       </p:ext>
     </p:extLst>
   </p:cSld>
@@ -20179,7 +20569,7 @@
           <p:cNvPr id="2" name="Titel 1">
             <a:extLst>
               <a:ext uri="{FF2B5EF4-FFF2-40B4-BE49-F238E27FC236}">
-                <a16:creationId xmlns:a16="http://schemas.microsoft.com/office/drawing/2014/main" id="{DA757BF2-5EC6-42D6-9F04-4237E99FD6E5}"/>
+                <a16:creationId xmlns:a16="http://schemas.microsoft.com/office/drawing/2014/main" id="{9FF31ECF-EF04-4AAA-9A8E-583E3D217F33}"/>
               </a:ext>
             </a:extLst>
           </p:cNvPr>
@@ -20197,14 +20587,528 @@
           <a:p>
             <a:r>
               <a:rPr lang="de-DE" dirty="0"/>
-              <a:t>01</a:t>
+              <a:t>PairLink: Das Vernetzungssystem</a:t>
+            </a:r>
+            <a:endParaRPr lang="de-CH" dirty="0"/>
+          </a:p>
+        </p:txBody>
+      </p:sp>
+      <p:sp>
+        <p:nvSpPr>
+          <p:cNvPr id="3" name="Inhaltsplatzhalter 2">
+            <a:extLst>
+              <a:ext uri="{FF2B5EF4-FFF2-40B4-BE49-F238E27FC236}">
+                <a16:creationId xmlns:a16="http://schemas.microsoft.com/office/drawing/2014/main" id="{9EE0A683-618F-4D75-846F-0DB536B4E502}"/>
+              </a:ext>
+            </a:extLst>
+          </p:cNvPr>
+          <p:cNvSpPr>
+            <a:spLocks noGrp="1"/>
+          </p:cNvSpPr>
+          <p:nvPr>
+            <p:ph idx="1"/>
+          </p:nvPr>
+        </p:nvSpPr>
+        <p:spPr/>
+        <p:txBody>
+          <a:bodyPr/>
+          <a:lstStyle/>
+          <a:p>
+            <a:pPr marL="0" indent="0">
+              <a:buNone/>
+            </a:pPr>
+            <a:r>
+              <a:rPr lang="de-DE" b="1" dirty="0"/>
+              <a:t>Sensor → 0.0 bis 1.0 → Aktor</a:t>
+            </a:r>
+          </a:p>
+          <a:p>
+            <a:pPr marL="0" indent="0">
+              <a:buNone/>
+            </a:pPr>
+            <a:r>
+              <a:rPr lang="de-DE" dirty="0"/>
+              <a:t>PairLink ist eine WebSocket-Bibliothek für den ESP32. Sie ermöglicht die bidirektionale</a:t>
+            </a:r>
+          </a:p>
+          <a:p>
+            <a:pPr marL="0" indent="0">
+              <a:buNone/>
+            </a:pPr>
+            <a:r>
+              <a:rPr lang="de-DE" dirty="0"/>
+              <a:t>Übertragung von Werten zwischen Controller und Anwendung über ein lokales Netzwerk.</a:t>
+            </a:r>
+          </a:p>
+          <a:p>
+            <a:pPr marL="0" indent="0">
+              <a:buNone/>
+            </a:pPr>
+            <a:endParaRPr lang="de-DE" dirty="0"/>
+          </a:p>
+          <a:p>
+            <a:pPr marL="0" indent="0">
+              <a:buNone/>
+            </a:pPr>
+            <a:r>
+              <a:rPr lang="de-DE" dirty="0"/>
+              <a:t>Alle Sensorwerte werden auf einen einzigen Kanal normiert: sensor.value (Float 0.0 — 1.0).</a:t>
+            </a:r>
+          </a:p>
+          <a:p>
+            <a:pPr marL="0" indent="0">
+              <a:buNone/>
+            </a:pPr>
+            <a:r>
+              <a:rPr lang="de-DE" dirty="0"/>
+              <a:t>Eine Geste, ein Bewegungswert, ein Tasterklick — alles wird zur gleichen Zahl.</a:t>
+            </a:r>
+          </a:p>
+          <a:p>
+            <a:pPr marL="0" indent="0">
+              <a:buNone/>
+            </a:pPr>
+            <a:endParaRPr lang="de-DE" dirty="0"/>
+          </a:p>
+          <a:p>
+            <a:pPr marL="0" indent="0">
+              <a:buNone/>
+            </a:pPr>
+            <a:r>
+              <a:rPr lang="de-DE" dirty="0"/>
+              <a:t>Das macht den Code vorhersehbar, testbar und für GPT optimal generierbar.</a:t>
+            </a:r>
+          </a:p>
+        </p:txBody>
+      </p:sp>
+      <p:sp>
+        <p:nvSpPr>
+          <p:cNvPr id="5" name="Fußzeilenplatzhalter 4">
+            <a:extLst>
+              <a:ext uri="{FF2B5EF4-FFF2-40B4-BE49-F238E27FC236}">
+                <a16:creationId xmlns:a16="http://schemas.microsoft.com/office/drawing/2014/main" id="{572B1E5F-FA5D-4B47-A43F-C570AFE8C6D3}"/>
+              </a:ext>
+            </a:extLst>
+          </p:cNvPr>
+          <p:cNvSpPr>
+            <a:spLocks noGrp="1"/>
+          </p:cNvSpPr>
+          <p:nvPr>
+            <p:ph type="ftr" sz="quarter" idx="3"/>
+          </p:nvPr>
+        </p:nvSpPr>
+        <p:spPr>
+          <a:xfrm>
+            <a:off x="2550014" y="6522444"/>
+            <a:ext cx="4038600" cy="215999"/>
+          </a:xfrm>
+        </p:spPr>
+        <p:txBody>
+          <a:bodyPr/>
+          <a:lstStyle/>
+          <a:p>
+            <a:r>
+              <a:rPr lang="de-DE" dirty="0"/>
+              <a:t>Design </a:t>
+            </a:r>
+            <a:r>
+              <a:rPr lang="de-DE" dirty="0" err="1"/>
+              <a:t>by</a:t>
+            </a:r>
+            <a:r>
+              <a:rPr lang="de-DE" dirty="0"/>
+              <a:t> Technology</a:t>
+            </a:r>
+            <a:endParaRPr lang="de-CH" dirty="0"/>
+          </a:p>
+        </p:txBody>
+      </p:sp>
+      <p:sp>
+        <p:nvSpPr>
+          <p:cNvPr id="4" name="Datumsplatzhalter 3">
+            <a:extLst>
+              <a:ext uri="{FF2B5EF4-FFF2-40B4-BE49-F238E27FC236}">
+                <a16:creationId xmlns:a16="http://schemas.microsoft.com/office/drawing/2014/main" id="{44DAA5A3-8CEF-4027-9289-B60138CD16A2}"/>
+              </a:ext>
+            </a:extLst>
+          </p:cNvPr>
+          <p:cNvSpPr>
+            <a:spLocks noGrp="1"/>
+          </p:cNvSpPr>
+          <p:nvPr>
+            <p:ph type="dt" sz="half" idx="2"/>
+          </p:nvPr>
+        </p:nvSpPr>
+        <p:spPr>
+          <a:xfrm>
+            <a:off x="10328132" y="6522442"/>
+            <a:ext cx="789039" cy="216001"/>
+          </a:xfrm>
+        </p:spPr>
+        <p:txBody>
+          <a:bodyPr/>
+          <a:lstStyle/>
+          <a:p>
+            <a:fld id="{8D93BFA6-70D2-4653-B5CB-D3376F3BFAE7}" type="datetime1">
+              <a:rPr lang="de-CH" noProof="0" smtClean="0"/>
+              <a:t>13.04.26</a:t>
+            </a:fld>
+            <a:endParaRPr lang="de-CH" noProof="0"/>
+          </a:p>
+        </p:txBody>
+      </p:sp>
+      <p:sp>
+        <p:nvSpPr>
+          <p:cNvPr id="6" name="Foliennummernplatzhalter 5">
+            <a:extLst>
+              <a:ext uri="{FF2B5EF4-FFF2-40B4-BE49-F238E27FC236}">
+                <a16:creationId xmlns:a16="http://schemas.microsoft.com/office/drawing/2014/main" id="{5C9B1E27-9E06-4598-A6EF-3BCBC8D0152F}"/>
+              </a:ext>
+            </a:extLst>
+          </p:cNvPr>
+          <p:cNvSpPr>
+            <a:spLocks noGrp="1"/>
+          </p:cNvSpPr>
+          <p:nvPr>
+            <p:ph type="sldNum" sz="quarter" idx="4"/>
+          </p:nvPr>
+        </p:nvSpPr>
+        <p:spPr>
+          <a:xfrm>
+            <a:off x="11137585" y="6522444"/>
+            <a:ext cx="322577" cy="216000"/>
+          </a:xfrm>
+        </p:spPr>
+        <p:txBody>
+          <a:bodyPr/>
+          <a:lstStyle/>
+          <a:p>
+            <a:fld id="{5ACA52AF-F19D-405C-AD5F-7D94B96A5CC3}" type="slidenum">
+              <a:rPr lang="de-CH" noProof="0" smtClean="0"/>
+              <a:t>12</a:t>
+            </a:fld>
+            <a:endParaRPr lang="de-CH" noProof="0"/>
+          </a:p>
+        </p:txBody>
+      </p:sp>
+    </p:spTree>
+    <p:extLst>
+      <p:ext uri="{BB962C8B-B14F-4D97-AF65-F5344CB8AC3E}">
+        <p14:creationId xmlns:p14="http://schemas.microsoft.com/office/powerpoint/2010/main" val="294303585"/>
+      </p:ext>
+    </p:extLst>
+  </p:cSld>
+  <p:clrMapOvr>
+    <a:masterClrMapping/>
+  </p:clrMapOvr>
+</p:sld>
+</file>
+
+<file path=ppt/slides/slide13.xml><?xml version="1.0" encoding="utf-8"?>
+<p:sld xmlns:a="http://schemas.openxmlformats.org/drawingml/2006/main" xmlns:r="http://schemas.openxmlformats.org/officeDocument/2006/relationships" xmlns:p="http://schemas.openxmlformats.org/presentationml/2006/main">
+  <p:cSld>
+    <p:spTree>
+      <p:nvGrpSpPr>
+        <p:cNvPr id="1" name=""/>
+        <p:cNvGrpSpPr/>
+        <p:nvPr/>
+      </p:nvGrpSpPr>
+      <p:grpSpPr>
+        <a:xfrm>
+          <a:off x="0" y="0"/>
+          <a:ext cx="0" cy="0"/>
+          <a:chOff x="0" y="0"/>
+          <a:chExt cx="0" cy="0"/>
+        </a:xfrm>
+      </p:grpSpPr>
+      <p:sp>
+        <p:nvSpPr>
+          <p:cNvPr id="2" name="Titel 1">
+            <a:extLst>
+              <a:ext uri="{FF2B5EF4-FFF2-40B4-BE49-F238E27FC236}">
+                <a16:creationId xmlns:a16="http://schemas.microsoft.com/office/drawing/2014/main" id="{41DF9D96-1AFA-40BA-BAE5-8D745FEC2462}"/>
+              </a:ext>
+            </a:extLst>
+          </p:cNvPr>
+          <p:cNvSpPr>
+            <a:spLocks noGrp="1"/>
+          </p:cNvSpPr>
+          <p:nvPr>
+            <p:ph type="title"/>
+          </p:nvPr>
+        </p:nvSpPr>
+        <p:spPr/>
+        <p:txBody>
+          <a:bodyPr/>
+          <a:lstStyle/>
+          <a:p>
+            <a:r>
+              <a:rPr lang="de-DE" dirty="0"/>
+              <a:t>Der 3-Schritt-Workflow</a:t>
+            </a:r>
+            <a:endParaRPr lang="de-CH" dirty="0"/>
+          </a:p>
+        </p:txBody>
+      </p:sp>
+      <p:sp>
+        <p:nvSpPr>
+          <p:cNvPr id="3" name="Inhaltsplatzhalter 2">
+            <a:extLst>
+              <a:ext uri="{FF2B5EF4-FFF2-40B4-BE49-F238E27FC236}">
+                <a16:creationId xmlns:a16="http://schemas.microsoft.com/office/drawing/2014/main" id="{5D30C9CD-6F3E-4243-AF8B-598CBE0FFE30}"/>
+              </a:ext>
+            </a:extLst>
+          </p:cNvPr>
+          <p:cNvSpPr>
+            <a:spLocks noGrp="1"/>
+          </p:cNvSpPr>
+          <p:nvPr>
+            <p:ph idx="1"/>
+          </p:nvPr>
+        </p:nvSpPr>
+        <p:spPr/>
+        <p:txBody>
+          <a:bodyPr/>
+          <a:lstStyle/>
+          <a:p>
+            <a:pPr marL="0" indent="0">
+              <a:buNone/>
+            </a:pPr>
+            <a:r>
+              <a:rPr lang="de-DE" b="1" dirty="0"/>
+              <a:t>Schritt 1 — GPT-Anfrage</a:t>
+            </a:r>
+          </a:p>
+          <a:p>
+            <a:pPr marL="0" indent="0">
+              <a:buNone/>
+            </a:pPr>
+            <a:r>
+              <a:rPr lang="de-DE" dirty="0"/>
+              <a:t>Idee als Prompt formulieren — der Custom GPT generiert direkt ausführbaren Code.</a:t>
+            </a:r>
+          </a:p>
+          <a:p>
+            <a:pPr marL="0" indent="0">
+              <a:buNone/>
+            </a:pPr>
+            <a:endParaRPr lang="de-DE" dirty="0"/>
+          </a:p>
+          <a:p>
+            <a:pPr marL="0" indent="0">
+              <a:buNone/>
+            </a:pPr>
+            <a:r>
+              <a:rPr lang="de-DE" b="1" dirty="0"/>
+              <a:t>Schritt 2 — PlatformIO</a:t>
+            </a:r>
+          </a:p>
+          <a:p>
+            <a:pPr marL="0" indent="0">
+              <a:buNone/>
+            </a:pPr>
+            <a:r>
+              <a:rPr lang="de-DE" dirty="0"/>
+              <a:t>Code in src/main.cpp einfügen, Board pico32 auswählen, kompilieren.</a:t>
+            </a:r>
+          </a:p>
+          <a:p>
+            <a:pPr marL="0" indent="0">
+              <a:buNone/>
+            </a:pPr>
+            <a:endParaRPr lang="de-DE" dirty="0"/>
+          </a:p>
+          <a:p>
+            <a:pPr marL="0" indent="0">
+              <a:buNone/>
+            </a:pPr>
+            <a:r>
+              <a:rPr lang="de-DE" b="1" dirty="0"/>
+              <a:t>Schritt 3 — Deployen</a:t>
+            </a:r>
+          </a:p>
+          <a:p>
+            <a:pPr marL="0" indent="0">
+              <a:buNone/>
+            </a:pPr>
+            <a:r>
+              <a:rPr lang="de-DE" dirty="0"/>
+              <a:t>Code per USB auf den Controller übertragen — die Installation ist sofort live.</a:t>
+            </a:r>
+          </a:p>
+        </p:txBody>
+      </p:sp>
+      <p:sp>
+        <p:nvSpPr>
+          <p:cNvPr id="5" name="Fußzeilenplatzhalter 4">
+            <a:extLst>
+              <a:ext uri="{FF2B5EF4-FFF2-40B4-BE49-F238E27FC236}">
+                <a16:creationId xmlns:a16="http://schemas.microsoft.com/office/drawing/2014/main" id="{08000522-08D1-4C97-AE24-545093D719FE}"/>
+              </a:ext>
+            </a:extLst>
+          </p:cNvPr>
+          <p:cNvSpPr>
+            <a:spLocks noGrp="1"/>
+          </p:cNvSpPr>
+          <p:nvPr>
+            <p:ph type="ftr" sz="quarter" idx="3"/>
+          </p:nvPr>
+        </p:nvSpPr>
+        <p:spPr>
+          <a:xfrm>
+            <a:off x="2533972" y="6522444"/>
+            <a:ext cx="4038600" cy="215999"/>
+          </a:xfrm>
+        </p:spPr>
+        <p:txBody>
+          <a:bodyPr/>
+          <a:lstStyle/>
+          <a:p>
+            <a:r>
+              <a:rPr lang="de-DE" dirty="0"/>
+              <a:t>Design </a:t>
+            </a:r>
+            <a:r>
+              <a:rPr lang="de-DE" dirty="0" err="1"/>
+              <a:t>by</a:t>
+            </a:r>
+            <a:r>
+              <a:rPr lang="de-DE" dirty="0"/>
+              <a:t> Technology</a:t>
+            </a:r>
+            <a:endParaRPr lang="de-CH" dirty="0"/>
+          </a:p>
+        </p:txBody>
+      </p:sp>
+      <p:sp>
+        <p:nvSpPr>
+          <p:cNvPr id="4" name="Datumsplatzhalter 3">
+            <a:extLst>
+              <a:ext uri="{FF2B5EF4-FFF2-40B4-BE49-F238E27FC236}">
+                <a16:creationId xmlns:a16="http://schemas.microsoft.com/office/drawing/2014/main" id="{3E5DECAF-74B9-42C9-91F9-16811C11DDD9}"/>
+              </a:ext>
+            </a:extLst>
+          </p:cNvPr>
+          <p:cNvSpPr>
+            <a:spLocks noGrp="1"/>
+          </p:cNvSpPr>
+          <p:nvPr>
+            <p:ph type="dt" sz="half" idx="2"/>
+          </p:nvPr>
+        </p:nvSpPr>
+        <p:spPr>
+          <a:xfrm>
+            <a:off x="10328132" y="6522442"/>
+            <a:ext cx="789039" cy="216001"/>
+          </a:xfrm>
+        </p:spPr>
+        <p:txBody>
+          <a:bodyPr/>
+          <a:lstStyle/>
+          <a:p>
+            <a:fld id="{255C2D81-634A-41B2-966F-5B8C1282A848}" type="datetime1">
+              <a:rPr lang="de-CH" noProof="0" smtClean="0"/>
+              <a:t>13.04.26</a:t>
+            </a:fld>
+            <a:endParaRPr lang="de-CH" noProof="0"/>
+          </a:p>
+        </p:txBody>
+      </p:sp>
+      <p:sp>
+        <p:nvSpPr>
+          <p:cNvPr id="6" name="Foliennummernplatzhalter 5">
+            <a:extLst>
+              <a:ext uri="{FF2B5EF4-FFF2-40B4-BE49-F238E27FC236}">
+                <a16:creationId xmlns:a16="http://schemas.microsoft.com/office/drawing/2014/main" id="{92390BB4-CA1A-4AB3-997F-BC93DE23C7B5}"/>
+              </a:ext>
+            </a:extLst>
+          </p:cNvPr>
+          <p:cNvSpPr>
+            <a:spLocks noGrp="1"/>
+          </p:cNvSpPr>
+          <p:nvPr>
+            <p:ph type="sldNum" sz="quarter" idx="4"/>
+          </p:nvPr>
+        </p:nvSpPr>
+        <p:spPr>
+          <a:xfrm>
+            <a:off x="11137585" y="6522444"/>
+            <a:ext cx="322577" cy="216000"/>
+          </a:xfrm>
+        </p:spPr>
+        <p:txBody>
+          <a:bodyPr/>
+          <a:lstStyle/>
+          <a:p>
+            <a:fld id="{5ACA52AF-F19D-405C-AD5F-7D94B96A5CC3}" type="slidenum">
+              <a:rPr lang="de-CH" noProof="0" smtClean="0"/>
+              <a:t>13</a:t>
+            </a:fld>
+            <a:endParaRPr lang="de-CH" noProof="0"/>
+          </a:p>
+        </p:txBody>
+      </p:sp>
+    </p:spTree>
+    <p:extLst>
+      <p:ext uri="{BB962C8B-B14F-4D97-AF65-F5344CB8AC3E}">
+        <p14:creationId xmlns:p14="http://schemas.microsoft.com/office/powerpoint/2010/main" val="2463831729"/>
+      </p:ext>
+    </p:extLst>
+  </p:cSld>
+  <p:clrMapOvr>
+    <a:masterClrMapping/>
+  </p:clrMapOvr>
+</p:sld>
+</file>
+
+<file path=ppt/slides/slide14.xml><?xml version="1.0" encoding="utf-8"?>
+<p:sld xmlns:a="http://schemas.openxmlformats.org/drawingml/2006/main" xmlns:r="http://schemas.openxmlformats.org/officeDocument/2006/relationships" xmlns:p="http://schemas.openxmlformats.org/presentationml/2006/main">
+  <p:cSld>
+    <p:spTree>
+      <p:nvGrpSpPr>
+        <p:cNvPr id="1" name=""/>
+        <p:cNvGrpSpPr/>
+        <p:nvPr/>
+      </p:nvGrpSpPr>
+      <p:grpSpPr>
+        <a:xfrm>
+          <a:off x="0" y="0"/>
+          <a:ext cx="0" cy="0"/>
+          <a:chOff x="0" y="0"/>
+          <a:chExt cx="0" cy="0"/>
+        </a:xfrm>
+      </p:grpSpPr>
+      <p:sp>
+        <p:nvSpPr>
+          <p:cNvPr id="2" name="Titel 1">
+            <a:extLst>
+              <a:ext uri="{FF2B5EF4-FFF2-40B4-BE49-F238E27FC236}">
+                <a16:creationId xmlns:a16="http://schemas.microsoft.com/office/drawing/2014/main" id="{DA757BF2-5EC6-42D6-9F04-4237E99FD6E5}"/>
+              </a:ext>
+            </a:extLst>
+          </p:cNvPr>
+          <p:cNvSpPr>
+            <a:spLocks noGrp="1"/>
+          </p:cNvSpPr>
+          <p:nvPr>
+            <p:ph type="title"/>
+          </p:nvPr>
+        </p:nvSpPr>
+        <p:spPr/>
+        <p:txBody>
+          <a:bodyPr/>
+          <a:lstStyle/>
+          <a:p>
+            <a:r>
+              <a:rPr lang="de-DE" dirty="0"/>
+              <a:t>03</a:t>
             </a:r>
             <a:br>
               <a:rPr lang="de-DE" dirty="0"/>
             </a:br>
             <a:r>
               <a:rPr lang="de-DE" dirty="0"/>
-              <a:t>Der Paradigmenwechsel</a:t>
+              <a:t>Das Custom GPT</a:t>
             </a:r>
           </a:p>
         </p:txBody>
@@ -20237,7 +21141,7 @@
           <a:p>
             <a:r>
               <a:rPr lang="de-DE" dirty="0"/>
-              <a:t xml:space="preserve">Design </a:t>
+              <a:t>Design </a:t>
             </a:r>
             <a:r>
               <a:rPr lang="de-DE" dirty="0" err="1"/>
@@ -20245,7 +21149,7 @@
             </a:r>
             <a:r>
               <a:rPr lang="de-DE" dirty="0"/>
-              <a:t xml:space="preserve"> Technology</a:t>
+              <a:t> Technology</a:t>
             </a:r>
             <a:endParaRPr lang="de-CH" dirty="0"/>
           </a:p>
@@ -20314,7 +21218,7 @@
             <a:fld id="{5ACA52AF-F19D-405C-AD5F-7D94B96A5CC3}" type="slidenum">
               <a:rPr lang="de-CH" noProof="0" smtClean="0"/>
               <a:pPr/>
-              <a:t>12</a:t>
+              <a:t>14</a:t>
             </a:fld>
             <a:endParaRPr lang="de-CH" noProof="0"/>
           </a:p>
@@ -20352,18 +21256,18 @@
       </p:grpSpPr>
       <p:sp>
         <p:nvSpPr>
-          <p:cNvPr id="8" name="Bildplatzhalter 7">
-            <a:extLst>
-              <a:ext uri="{FF2B5EF4-FFF2-40B4-BE49-F238E27FC236}">
-                <a16:creationId xmlns:a16="http://schemas.microsoft.com/office/drawing/2014/main" id="{4C49AA40-13ED-7ACE-3A88-43E5091ED65E}"/>
-              </a:ext>
-            </a:extLst>
-          </p:cNvPr>
-          <p:cNvSpPr>
-            <a:spLocks noGrp="1"/>
-          </p:cNvSpPr>
-          <p:nvPr>
-            <p:ph type="pic" sz="quarter" idx="13"/>
+          <p:cNvPr id="2" name="Titel 1">
+            <a:extLst>
+              <a:ext uri="{FF2B5EF4-FFF2-40B4-BE49-F238E27FC236}">
+                <a16:creationId xmlns:a16="http://schemas.microsoft.com/office/drawing/2014/main" id="{9FF31ECF-EF04-4AAA-9A8E-583E3D217F33}"/>
+              </a:ext>
+            </a:extLst>
+          </p:cNvPr>
+          <p:cNvSpPr>
+            <a:spLocks noGrp="1"/>
+          </p:cNvSpPr>
+          <p:nvPr>
+            <p:ph type="title"/>
           </p:nvPr>
         </p:nvSpPr>
         <p:spPr/>
@@ -20371,24 +21275,28 @@
           <a:bodyPr/>
           <a:lstStyle/>
           <a:p>
-            <a:endParaRPr lang="de-DE"/>
-          </a:p>
-        </p:txBody>
-      </p:sp>
-      <p:sp>
-        <p:nvSpPr>
-          <p:cNvPr id="2" name="Titel 1">
-            <a:extLst>
-              <a:ext uri="{FF2B5EF4-FFF2-40B4-BE49-F238E27FC236}">
-                <a16:creationId xmlns:a16="http://schemas.microsoft.com/office/drawing/2014/main" id="{CCD79B13-3C6D-410C-8179-6B3490718B07}"/>
-              </a:ext>
-            </a:extLst>
-          </p:cNvPr>
-          <p:cNvSpPr>
-            <a:spLocks noGrp="1"/>
-          </p:cNvSpPr>
-          <p:nvPr>
-            <p:ph type="title"/>
+            <a:r>
+              <a:rPr lang="de-DE" dirty="0"/>
+              <a:t>Was ist ein Custom GPT?</a:t>
+            </a:r>
+            <a:endParaRPr lang="de-CH" dirty="0"/>
+          </a:p>
+        </p:txBody>
+      </p:sp>
+      <p:sp>
+        <p:nvSpPr>
+          <p:cNvPr id="3" name="Inhaltsplatzhalter 2">
+            <a:extLst>
+              <a:ext uri="{FF2B5EF4-FFF2-40B4-BE49-F238E27FC236}">
+                <a16:creationId xmlns:a16="http://schemas.microsoft.com/office/drawing/2014/main" id="{9EE0A683-618F-4D75-846F-0DB536B4E502}"/>
+              </a:ext>
+            </a:extLst>
+          </p:cNvPr>
+          <p:cNvSpPr>
+            <a:spLocks noGrp="1"/>
+          </p:cNvSpPr>
+          <p:nvPr>
+            <p:ph idx="1"/>
           </p:nvPr>
         </p:nvSpPr>
         <p:spPr/>
@@ -20396,204 +21304,151 @@
           <a:bodyPr/>
           <a:lstStyle/>
           <a:p>
+            <a:pPr marL="0" indent="0">
+              <a:buNone/>
+            </a:pPr>
+            <a:r>
+              <a:rPr lang="de-DE" b="1" dirty="0"/>
+              <a:t>Ein KI-Assistent mit Persönlichkeit und Regeln</a:t>
+            </a:r>
+          </a:p>
+          <a:p>
+            <a:pPr marL="0" indent="0">
+              <a:buNone/>
+            </a:pPr>
             <a:r>
               <a:rPr lang="de-DE" dirty="0"/>
-              <a:t>Das Toolkit</a:t>
-            </a:r>
-            <a:endParaRPr lang="de-CH" dirty="0"/>
-          </a:p>
-        </p:txBody>
-      </p:sp>
-      <p:sp>
-        <p:nvSpPr>
-          <p:cNvPr id="3" name="Inhaltsplatzhalter 2">
-            <a:extLst>
-              <a:ext uri="{FF2B5EF4-FFF2-40B4-BE49-F238E27FC236}">
-                <a16:creationId xmlns:a16="http://schemas.microsoft.com/office/drawing/2014/main" id="{DD1C6779-ACCD-4204-B972-A9B2595451EA}"/>
-              </a:ext>
-            </a:extLst>
-          </p:cNvPr>
-          <p:cNvSpPr>
-            <a:spLocks noGrp="1"/>
-          </p:cNvSpPr>
-          <p:nvPr>
-            <p:ph idx="1"/>
-          </p:nvPr>
-        </p:nvSpPr>
-        <p:spPr/>
+              <a:t>Custom GPTs sind spezialisierte Versionen von ChatGPT — vorkonfiguriert mit einem</a:t>
+            </a:r>
+          </a:p>
+          <a:p>
+            <a:pPr marL="0" indent="0">
+              <a:buNone/>
+            </a:pPr>
+            <a:r>
+              <a:rPr lang="de-DE" dirty="0"/>
+              <a:t>System Prompt, der das Verhalten, Wissen und die Grenzen des Assistenten definiert.</a:t>
+            </a:r>
+          </a:p>
+          <a:p>
+            <a:pPr marL="0" indent="0">
+              <a:buNone/>
+            </a:pPr>
+            <a:endParaRPr lang="de-DE" dirty="0"/>
+          </a:p>
+          <a:p>
+            <a:pPr marL="0" indent="0">
+              <a:buNone/>
+            </a:pPr>
+            <a:r>
+              <a:rPr lang="de-DE" dirty="0"/>
+              <a:t>Der FOLWANG-PairLink-Starter ist speziell auf den Pathfinder Workshop zugeschnitten:</a:t>
+            </a:r>
+          </a:p>
+          <a:p>
+            <a:pPr marL="0" indent="0">
+              <a:buNone/>
+            </a:pPr>
+            <a:r>
+              <a:rPr lang="de-DE" dirty="0"/>
+              <a:t>Er kennt die Hardware, die Bibliotheken, die Pinbelegung und den Workflow.</a:t>
+            </a:r>
+          </a:p>
+          <a:p>
+            <a:pPr marL="0" indent="0">
+              <a:buNone/>
+            </a:pPr>
+            <a:endParaRPr lang="de-DE" dirty="0"/>
+          </a:p>
+          <a:p>
+            <a:pPr marL="0" indent="0">
+              <a:buNone/>
+            </a:pPr>
+            <a:r>
+              <a:rPr lang="de-DE" dirty="0"/>
+              <a:t>Er beantwortet keine Fragen zu anderen Boards oder framefremden Libraries —</a:t>
+            </a:r>
+          </a:p>
+          <a:p>
+            <a:pPr marL="0" indent="0">
+              <a:buNone/>
+            </a:pPr>
+            <a:r>
+              <a:rPr lang="de-DE" dirty="0"/>
+              <a:t>und generiert nur Code, der auf dem ESP32-PICO-KIT direkt funktioniert.</a:t>
+            </a:r>
+          </a:p>
+        </p:txBody>
+      </p:sp>
+      <p:sp>
+        <p:nvSpPr>
+          <p:cNvPr id="5" name="Fußzeilenplatzhalter 4">
+            <a:extLst>
+              <a:ext uri="{FF2B5EF4-FFF2-40B4-BE49-F238E27FC236}">
+                <a16:creationId xmlns:a16="http://schemas.microsoft.com/office/drawing/2014/main" id="{572B1E5F-FA5D-4B47-A43F-C570AFE8C6D3}"/>
+              </a:ext>
+            </a:extLst>
+          </p:cNvPr>
+          <p:cNvSpPr>
+            <a:spLocks noGrp="1"/>
+          </p:cNvSpPr>
+          <p:nvPr>
+            <p:ph type="ftr" sz="quarter" idx="3"/>
+          </p:nvPr>
+        </p:nvSpPr>
+        <p:spPr>
+          <a:xfrm>
+            <a:off x="2550014" y="6522444"/>
+            <a:ext cx="4038600" cy="215999"/>
+          </a:xfrm>
+        </p:spPr>
         <p:txBody>
           <a:bodyPr/>
           <a:lstStyle/>
           <a:p>
-            <a:pPr marL="0" indent="0">
-              <a:buNone/>
-            </a:pPr>
-            <a:r>
-              <a:rPr lang="de-DE" b="1" dirty="0"/>
-              <a:t>Microcontroller</a:t>
-            </a:r>
-          </a:p>
-          <a:p>
-            <a:pPr marL="0" indent="0">
-              <a:buNone/>
-            </a:pPr>
             <a:r>
               <a:rPr lang="de-DE" dirty="0"/>
-              <a:t>ESP32-PICO-KIT — WLAN + Bluetooth, 240 MHz, 4 MB Flash</a:t>
-            </a:r>
-          </a:p>
-          <a:p>
-            <a:pPr marL="0" indent="0">
-              <a:buNone/>
-            </a:pPr>
+              <a:t>Design </a:t>
+            </a:r>
+            <a:r>
+              <a:rPr lang="de-DE" dirty="0" err="1"/>
+              <a:t>by</a:t>
+            </a:r>
             <a:r>
               <a:rPr lang="de-DE" dirty="0"/>
-              <a:t/>
-            </a:r>
-          </a:p>
-          <a:p>
-            <a:pPr marL="0" indent="0">
-              <a:buNone/>
-            </a:pPr>
-            <a:r>
-              <a:rPr lang="de-DE" b="1" dirty="0"/>
-              <a:t>Sensoren</a:t>
-            </a:r>
-          </a:p>
-          <a:p>
-            <a:pPr marL="0" indent="0">
-              <a:buNone/>
-            </a:pPr>
-            <a:r>
-              <a:rPr lang="de-DE" dirty="0"/>
-              <a:t>APDS9960 — Gestenerkennung, Farbe, Nähe</a:t>
-            </a:r>
-          </a:p>
-          <a:p>
-            <a:pPr marL="0" indent="0">
-              <a:buNone/>
-            </a:pPr>
-            <a:r>
-              <a:rPr lang="de-DE" dirty="0"/>
-              <a:t>MPU6050 — 6-Achsen Beschleunigung &amp; Gyro</a:t>
-            </a:r>
-          </a:p>
-          <a:p>
-            <a:pPr marL="0" indent="0">
-              <a:buNone/>
-            </a:pPr>
-            <a:r>
-              <a:rPr lang="de-DE" dirty="0"/>
-              <a:t>Taster (GPIO 0)</a:t>
-            </a:r>
-          </a:p>
-          <a:p>
-            <a:pPr marL="0" indent="0">
-              <a:buNone/>
-            </a:pPr>
-            <a:r>
-              <a:rPr lang="de-DE" dirty="0"/>
-              <a:t/>
-            </a:r>
-          </a:p>
-          <a:p>
-            <a:pPr marL="0" indent="0">
-              <a:buNone/>
-            </a:pPr>
-            <a:r>
-              <a:rPr lang="de-DE" b="1" dirty="0"/>
-              <a:t>Aktoren</a:t>
-            </a:r>
-          </a:p>
-          <a:p>
-            <a:pPr marL="0" indent="0">
-              <a:buNone/>
-            </a:pPr>
-            <a:r>
-              <a:rPr lang="de-DE" dirty="0"/>
-              <a:t>NeoPixel-Strip — RGB-LEDs (GPIO 14)</a:t>
-            </a:r>
-          </a:p>
-          <a:p>
-            <a:pPr marL="0" indent="0">
-              <a:buNone/>
-            </a:pPr>
-            <a:r>
-              <a:rPr lang="de-DE" dirty="0"/>
-              <a:t>Servo-Motor (GPIO 12)</a:t>
-            </a:r>
-          </a:p>
-        </p:txBody>
-      </p:sp>
-      <p:sp>
-        <p:nvSpPr>
-          <p:cNvPr id="5" name="Fußzeilenplatzhalter 4">
-            <a:extLst>
-              <a:ext uri="{FF2B5EF4-FFF2-40B4-BE49-F238E27FC236}">
-                <a16:creationId xmlns:a16="http://schemas.microsoft.com/office/drawing/2014/main" id="{58F6FD95-BB89-40C0-BC74-30458C4F33AB}"/>
-              </a:ext>
-            </a:extLst>
-          </p:cNvPr>
-          <p:cNvSpPr>
-            <a:spLocks noGrp="1"/>
-          </p:cNvSpPr>
-          <p:nvPr>
-            <p:ph type="ftr" sz="quarter" idx="3"/>
-          </p:nvPr>
-        </p:nvSpPr>
-        <p:spPr>
-          <a:xfrm>
-            <a:off x="2533972" y="6522444"/>
-            <a:ext cx="4038600" cy="215999"/>
+              <a:t> Technology</a:t>
+            </a:r>
+            <a:endParaRPr lang="de-CH" dirty="0"/>
+          </a:p>
+        </p:txBody>
+      </p:sp>
+      <p:sp>
+        <p:nvSpPr>
+          <p:cNvPr id="4" name="Datumsplatzhalter 3">
+            <a:extLst>
+              <a:ext uri="{FF2B5EF4-FFF2-40B4-BE49-F238E27FC236}">
+                <a16:creationId xmlns:a16="http://schemas.microsoft.com/office/drawing/2014/main" id="{44DAA5A3-8CEF-4027-9289-B60138CD16A2}"/>
+              </a:ext>
+            </a:extLst>
+          </p:cNvPr>
+          <p:cNvSpPr>
+            <a:spLocks noGrp="1"/>
+          </p:cNvSpPr>
+          <p:nvPr>
+            <p:ph type="dt" sz="half" idx="2"/>
+          </p:nvPr>
+        </p:nvSpPr>
+        <p:spPr>
+          <a:xfrm>
+            <a:off x="10328132" y="6522442"/>
+            <a:ext cx="789039" cy="216001"/>
           </a:xfrm>
         </p:spPr>
         <p:txBody>
           <a:bodyPr/>
           <a:lstStyle/>
           <a:p>
-            <a:r>
-              <a:rPr lang="de-DE" dirty="0"/>
-              <a:t xml:space="preserve">Design </a:t>
-            </a:r>
-            <a:r>
-              <a:rPr lang="de-DE" dirty="0" err="1"/>
-              <a:t>by</a:t>
-            </a:r>
-            <a:r>
-              <a:rPr lang="de-DE" dirty="0"/>
-              <a:t xml:space="preserve"> Technology</a:t>
-            </a:r>
-            <a:endParaRPr lang="de-CH" dirty="0"/>
-          </a:p>
-        </p:txBody>
-      </p:sp>
-      <p:sp>
-        <p:nvSpPr>
-          <p:cNvPr id="4" name="Datumsplatzhalter 3">
-            <a:extLst>
-              <a:ext uri="{FF2B5EF4-FFF2-40B4-BE49-F238E27FC236}">
-                <a16:creationId xmlns:a16="http://schemas.microsoft.com/office/drawing/2014/main" id="{E561EB33-26DA-4BFB-9717-A85E7FB5C915}"/>
-              </a:ext>
-            </a:extLst>
-          </p:cNvPr>
-          <p:cNvSpPr>
-            <a:spLocks noGrp="1"/>
-          </p:cNvSpPr>
-          <p:nvPr>
-            <p:ph type="dt" sz="half" idx="2"/>
-          </p:nvPr>
-        </p:nvSpPr>
-        <p:spPr>
-          <a:xfrm>
-            <a:off x="10328132" y="6522442"/>
-            <a:ext cx="789039" cy="216001"/>
-          </a:xfrm>
-        </p:spPr>
-        <p:txBody>
-          <a:bodyPr/>
-          <a:lstStyle/>
-          <a:p>
-            <a:fld id="{3883C902-160B-4538-99A8-1486892643D4}" type="datetime1">
+            <a:fld id="{8D93BFA6-70D2-4653-B5CB-D3376F3BFAE7}" type="datetime1">
               <a:rPr lang="de-CH" noProof="0" smtClean="0"/>
               <a:t>13.04.26</a:t>
             </a:fld>
@@ -20606,7 +21461,7 @@
           <p:cNvPr id="6" name="Foliennummernplatzhalter 5">
             <a:extLst>
               <a:ext uri="{FF2B5EF4-FFF2-40B4-BE49-F238E27FC236}">
-                <a16:creationId xmlns:a16="http://schemas.microsoft.com/office/drawing/2014/main" id="{3F2CD38D-E3F5-46D6-96B1-4BEB06DA84C2}"/>
+                <a16:creationId xmlns:a16="http://schemas.microsoft.com/office/drawing/2014/main" id="{5C9B1E27-9E06-4598-A6EF-3BCBC8D0152F}"/>
               </a:ext>
             </a:extLst>
           </p:cNvPr>
@@ -20638,7 +21493,210 @@
     </p:spTree>
     <p:extLst>
       <p:ext uri="{BB962C8B-B14F-4D97-AF65-F5344CB8AC3E}">
-        <p14:creationId xmlns:p14="http://schemas.microsoft.com/office/powerpoint/2010/main" val="3328173493"/>
+        <p14:creationId xmlns:p14="http://schemas.microsoft.com/office/powerpoint/2010/main" val="294303585"/>
+      </p:ext>
+    </p:extLst>
+  </p:cSld>
+  <p:clrMapOvr>
+    <a:masterClrMapping/>
+  </p:clrMapOvr>
+</p:sld>
+</file>
+
+<file path=ppt/slides/slide16.xml><?xml version="1.0" encoding="utf-8"?>
+<p:sld xmlns:a="http://schemas.openxmlformats.org/drawingml/2006/main" xmlns:r="http://schemas.openxmlformats.org/officeDocument/2006/relationships" xmlns:p="http://schemas.openxmlformats.org/presentationml/2006/main">
+  <p:cSld>
+    <p:spTree>
+      <p:nvGrpSpPr>
+        <p:cNvPr id="1" name=""/>
+        <p:cNvGrpSpPr/>
+        <p:nvPr/>
+      </p:nvGrpSpPr>
+      <p:grpSpPr>
+        <a:xfrm>
+          <a:off x="0" y="0"/>
+          <a:ext cx="0" cy="0"/>
+          <a:chOff x="0" y="0"/>
+          <a:chExt cx="0" cy="0"/>
+        </a:xfrm>
+      </p:grpSpPr>
+      <p:sp>
+        <p:nvSpPr>
+          <p:cNvPr id="3" name="Inhaltsplatzhalter 2">
+            <a:extLst>
+              <a:ext uri="{FF2B5EF4-FFF2-40B4-BE49-F238E27FC236}">
+                <a16:creationId xmlns:a16="http://schemas.microsoft.com/office/drawing/2014/main" id="{5DC67D2E-7487-43A9-B734-0DEEE96D6BCF}"/>
+              </a:ext>
+            </a:extLst>
+          </p:cNvPr>
+          <p:cNvSpPr>
+            <a:spLocks noGrp="1"/>
+          </p:cNvSpPr>
+          <p:nvPr>
+            <p:ph idx="1"/>
+          </p:nvPr>
+        </p:nvSpPr>
+        <p:spPr>
+          <a:xfrm>
+            <a:off x="731835" y="2097088"/>
+            <a:ext cx="10728327" cy="2124401"/>
+          </a:xfrm>
+        </p:spPr>
+        <p:txBody>
+          <a:bodyPr/>
+          <a:lstStyle/>
+          <a:p>
+            <a:pPr marL="0" indent="0">
+              <a:buNone/>
+            </a:pPr>
+            <a:r>
+              <a:rPr lang="de-DE" b="1" dirty="0"/>
+              <a:t>Live-Demo: GPT → Code → Controller</a:t>
+            </a:r>
+          </a:p>
+          <a:p>
+            <a:pPr marL="0" indent="0">
+              <a:buNone/>
+            </a:pPr>
+            <a:r>
+              <a:rPr lang="de-DE" dirty="0"/>
+              <a:t>Prompt eingeben — generierten Code kopieren</a:t>
+            </a:r>
+          </a:p>
+          <a:p>
+            <a:pPr marL="0" indent="0">
+              <a:buNone/>
+            </a:pPr>
+            <a:r>
+              <a:rPr lang="de-DE" dirty="0"/>
+              <a:t>In PlatformIO einfügen — auf Board flashen</a:t>
+            </a:r>
+          </a:p>
+          <a:p>
+            <a:pPr marL="0" indent="0">
+              <a:buNone/>
+            </a:pPr>
+            <a:r>
+              <a:rPr lang="de-DE" dirty="0"/>
+              <a:t>Sensor bewegen — LED oder Servo reagiert</a:t>
+            </a:r>
+          </a:p>
+        </p:txBody>
+      </p:sp>
+      <p:sp>
+        <p:nvSpPr>
+          <p:cNvPr id="4" name="Datumsplatzhalter 3">
+            <a:extLst>
+              <a:ext uri="{FF2B5EF4-FFF2-40B4-BE49-F238E27FC236}">
+                <a16:creationId xmlns:a16="http://schemas.microsoft.com/office/drawing/2014/main" id="{1EDD72CB-F104-4DE7-8E0E-740091A208E7}"/>
+              </a:ext>
+            </a:extLst>
+          </p:cNvPr>
+          <p:cNvSpPr>
+            <a:spLocks noGrp="1"/>
+          </p:cNvSpPr>
+          <p:nvPr>
+            <p:ph type="dt" sz="half" idx="2"/>
+          </p:nvPr>
+        </p:nvSpPr>
+        <p:spPr>
+          <a:xfrm>
+            <a:off x="10328132" y="6522442"/>
+            <a:ext cx="789039" cy="216001"/>
+          </a:xfrm>
+        </p:spPr>
+        <p:txBody>
+          <a:bodyPr/>
+          <a:lstStyle/>
+          <a:p>
+            <a:fld id="{C346C403-2363-42FC-8982-6D08D86AEC82}" type="datetime1">
+              <a:rPr lang="de-CH" noProof="0" smtClean="0"/>
+              <a:t>13.04.26</a:t>
+            </a:fld>
+            <a:endParaRPr lang="de-CH" noProof="0"/>
+          </a:p>
+        </p:txBody>
+      </p:sp>
+      <p:sp>
+        <p:nvSpPr>
+          <p:cNvPr id="6" name="Foliennummernplatzhalter 5">
+            <a:extLst>
+              <a:ext uri="{FF2B5EF4-FFF2-40B4-BE49-F238E27FC236}">
+                <a16:creationId xmlns:a16="http://schemas.microsoft.com/office/drawing/2014/main" id="{5985790D-0071-457D-86B5-CFCB0B92A18F}"/>
+              </a:ext>
+            </a:extLst>
+          </p:cNvPr>
+          <p:cNvSpPr>
+            <a:spLocks noGrp="1"/>
+          </p:cNvSpPr>
+          <p:nvPr>
+            <p:ph type="sldNum" sz="quarter" idx="4"/>
+          </p:nvPr>
+        </p:nvSpPr>
+        <p:spPr>
+          <a:xfrm>
+            <a:off x="11137585" y="6522444"/>
+            <a:ext cx="322577" cy="216000"/>
+          </a:xfrm>
+        </p:spPr>
+        <p:txBody>
+          <a:bodyPr/>
+          <a:lstStyle/>
+          <a:p>
+            <a:fld id="{5ACA52AF-F19D-405C-AD5F-7D94B96A5CC3}" type="slidenum">
+              <a:rPr lang="de-CH" noProof="0" smtClean="0"/>
+              <a:t>16</a:t>
+            </a:fld>
+            <a:endParaRPr lang="de-CH" noProof="0"/>
+          </a:p>
+        </p:txBody>
+      </p:sp>
+      <p:sp>
+        <p:nvSpPr>
+          <p:cNvPr id="7" name="Fußzeilenplatzhalter 4">
+            <a:extLst>
+              <a:ext uri="{FF2B5EF4-FFF2-40B4-BE49-F238E27FC236}">
+                <a16:creationId xmlns:a16="http://schemas.microsoft.com/office/drawing/2014/main" id="{AFE0E341-8911-1EEF-68AE-B6CA70F83C29}"/>
+              </a:ext>
+            </a:extLst>
+          </p:cNvPr>
+          <p:cNvSpPr>
+            <a:spLocks noGrp="1"/>
+          </p:cNvSpPr>
+          <p:nvPr>
+            <p:ph type="ftr" sz="quarter" idx="3"/>
+          </p:nvPr>
+        </p:nvSpPr>
+        <p:spPr>
+          <a:xfrm>
+            <a:off x="2550014" y="6516094"/>
+            <a:ext cx="4038600" cy="215999"/>
+          </a:xfrm>
+        </p:spPr>
+        <p:txBody>
+          <a:bodyPr/>
+          <a:lstStyle/>
+          <a:p>
+            <a:r>
+              <a:rPr lang="de-DE" dirty="0"/>
+              <a:t>Design </a:t>
+            </a:r>
+            <a:r>
+              <a:rPr lang="de-DE" dirty="0" err="1"/>
+              <a:t>by</a:t>
+            </a:r>
+            <a:r>
+              <a:rPr lang="de-DE" dirty="0"/>
+              <a:t> Technology - Folientitel</a:t>
+            </a:r>
+            <a:endParaRPr lang="de-CH" dirty="0"/>
+          </a:p>
+        </p:txBody>
+      </p:sp>
+    </p:spTree>
+    <p:extLst>
+      <p:ext uri="{BB962C8B-B14F-4D97-AF65-F5344CB8AC3E}">
+        <p14:creationId xmlns:p14="http://schemas.microsoft.com/office/powerpoint/2010/main" val="1032210412"/>
       </p:ext>
     </p:extLst>
   </p:cSld>
@@ -20667,18 +21725,18 @@
       </p:grpSpPr>
       <p:sp>
         <p:nvSpPr>
-          <p:cNvPr id="9" name="Bildplatzhalter 8">
-            <a:extLst>
-              <a:ext uri="{FF2B5EF4-FFF2-40B4-BE49-F238E27FC236}">
-                <a16:creationId xmlns:a16="http://schemas.microsoft.com/office/drawing/2014/main" id="{4C305A14-2DEA-1C2C-8BD1-1F2C065B7DBC}"/>
-              </a:ext>
-            </a:extLst>
-          </p:cNvPr>
-          <p:cNvSpPr>
-            <a:spLocks noGrp="1"/>
-          </p:cNvSpPr>
-          <p:nvPr>
-            <p:ph type="pic" sz="quarter" idx="17"/>
+          <p:cNvPr id="2" name="Titel 1">
+            <a:extLst>
+              <a:ext uri="{FF2B5EF4-FFF2-40B4-BE49-F238E27FC236}">
+                <a16:creationId xmlns:a16="http://schemas.microsoft.com/office/drawing/2014/main" id="{9FF31ECF-EF04-4AAA-9A8E-583E3D217F33}"/>
+              </a:ext>
+            </a:extLst>
+          </p:cNvPr>
+          <p:cNvSpPr>
+            <a:spLocks noGrp="1"/>
+          </p:cNvSpPr>
+          <p:nvPr>
+            <p:ph type="title"/>
           </p:nvPr>
         </p:nvSpPr>
         <p:spPr/>
@@ -20686,24 +21744,28 @@
           <a:bodyPr/>
           <a:lstStyle/>
           <a:p>
-            <a:endParaRPr lang="de-DE"/>
-          </a:p>
-        </p:txBody>
-      </p:sp>
-      <p:sp>
-        <p:nvSpPr>
-          <p:cNvPr id="11" name="Bildplatzhalter 10">
-            <a:extLst>
-              <a:ext uri="{FF2B5EF4-FFF2-40B4-BE49-F238E27FC236}">
-                <a16:creationId xmlns:a16="http://schemas.microsoft.com/office/drawing/2014/main" id="{504BF29E-E968-BDD9-296F-DEF201BD2CDE}"/>
-              </a:ext>
-            </a:extLst>
-          </p:cNvPr>
-          <p:cNvSpPr>
-            <a:spLocks noGrp="1"/>
-          </p:cNvSpPr>
-          <p:nvPr>
-            <p:ph type="pic" sz="quarter" idx="16"/>
+            <a:r>
+              <a:rPr lang="de-DE" dirty="0"/>
+              <a:t>Beispiele: Was der GPT generiert</a:t>
+            </a:r>
+            <a:endParaRPr lang="de-CH" dirty="0"/>
+          </a:p>
+        </p:txBody>
+      </p:sp>
+      <p:sp>
+        <p:nvSpPr>
+          <p:cNvPr id="3" name="Inhaltsplatzhalter 2">
+            <a:extLst>
+              <a:ext uri="{FF2B5EF4-FFF2-40B4-BE49-F238E27FC236}">
+                <a16:creationId xmlns:a16="http://schemas.microsoft.com/office/drawing/2014/main" id="{9EE0A683-618F-4D75-846F-0DB536B4E502}"/>
+              </a:ext>
+            </a:extLst>
+          </p:cNvPr>
+          <p:cNvSpPr>
+            <a:spLocks noGrp="1"/>
+          </p:cNvSpPr>
+          <p:nvPr>
+            <p:ph idx="1"/>
           </p:nvPr>
         </p:nvSpPr>
         <p:spPr/>
@@ -20711,120 +21773,151 @@
           <a:bodyPr/>
           <a:lstStyle/>
           <a:p>
-            <a:endParaRPr lang="de-DE"/>
-          </a:p>
-        </p:txBody>
-      </p:sp>
-      <p:sp>
-        <p:nvSpPr>
-          <p:cNvPr id="5" name="Bildplatzhalter 4">
-            <a:extLst>
-              <a:ext uri="{FF2B5EF4-FFF2-40B4-BE49-F238E27FC236}">
-                <a16:creationId xmlns:a16="http://schemas.microsoft.com/office/drawing/2014/main" id="{91E7E672-2C1F-D058-FB49-1D80E9CADB0F}"/>
-              </a:ext>
-            </a:extLst>
-          </p:cNvPr>
-          <p:cNvSpPr>
-            <a:spLocks noGrp="1"/>
-          </p:cNvSpPr>
-          <p:nvPr>
-            <p:ph type="pic" sz="quarter" idx="13"/>
-          </p:nvPr>
-        </p:nvSpPr>
-        <p:spPr/>
+            <a:pPr marL="0" indent="0">
+              <a:buNone/>
+            </a:pPr>
+            <a:r>
+              <a:rPr lang="de-DE" b="1" dirty="0"/>
+              <a:t>Drei Workshop-Szenarien</a:t>
+            </a:r>
+          </a:p>
+          <a:p>
+            <a:pPr marL="0" indent="0">
+              <a:buNone/>
+            </a:pPr>
+            <a:r>
+              <a:rPr lang="de-DE" dirty="0"/>
+              <a:t>Gestensteuerung — APDS9960 erkennt Links/Rechts/Auf/Ab und steuert NeoPixel-Farben.</a:t>
+            </a:r>
+          </a:p>
+          <a:p>
+            <a:pPr marL="0" indent="0">
+              <a:buNone/>
+            </a:pPr>
+            <a:r>
+              <a:rPr lang="de-DE" dirty="0"/>
+              <a:t>Prompt: “Geste links = rot, rechts = blau, auf = grün, ab = aus”</a:t>
+            </a:r>
+          </a:p>
+          <a:p>
+            <a:pPr marL="0" indent="0">
+              <a:buNone/>
+            </a:pPr>
+            <a:endParaRPr lang="de-DE" dirty="0"/>
+          </a:p>
+          <a:p>
+            <a:pPr marL="0" indent="0">
+              <a:buNone/>
+            </a:pPr>
+            <a:r>
+              <a:rPr lang="de-DE" dirty="0"/>
+              <a:t>Bewegungsreaktion — MPU6050 misst Beschleunigung, Servo folgt der Neigung.</a:t>
+            </a:r>
+          </a:p>
+          <a:p>
+            <a:pPr marL="0" indent="0">
+              <a:buNone/>
+            </a:pPr>
+            <a:r>
+              <a:rPr lang="de-DE" dirty="0"/>
+              <a:t>Prompt: “Neigung nach vorne dreht Servo proportional zum Winkel”</a:t>
+            </a:r>
+          </a:p>
+          <a:p>
+            <a:pPr marL="0" indent="0">
+              <a:buNone/>
+            </a:pPr>
+            <a:endParaRPr lang="de-DE" dirty="0"/>
+          </a:p>
+          <a:p>
+            <a:pPr marL="0" indent="0">
+              <a:buNone/>
+            </a:pPr>
+            <a:r>
+              <a:rPr lang="de-DE" dirty="0"/>
+              <a:t>Interaktive Installation — Taster triggert animierte NeoPixel-Sequenz.</a:t>
+            </a:r>
+          </a:p>
+          <a:p>
+            <a:pPr marL="0" indent="0">
+              <a:buNone/>
+            </a:pPr>
+            <a:r>
+              <a:rPr lang="de-DE" dirty="0"/>
+              <a:t>Prompt: “Bei Tastendruck: Regenbogeneffekt, 3 Sekunden lang”</a:t>
+            </a:r>
+          </a:p>
+        </p:txBody>
+      </p:sp>
+      <p:sp>
+        <p:nvSpPr>
+          <p:cNvPr id="5" name="Fußzeilenplatzhalter 4">
+            <a:extLst>
+              <a:ext uri="{FF2B5EF4-FFF2-40B4-BE49-F238E27FC236}">
+                <a16:creationId xmlns:a16="http://schemas.microsoft.com/office/drawing/2014/main" id="{572B1E5F-FA5D-4B47-A43F-C570AFE8C6D3}"/>
+              </a:ext>
+            </a:extLst>
+          </p:cNvPr>
+          <p:cNvSpPr>
+            <a:spLocks noGrp="1"/>
+          </p:cNvSpPr>
+          <p:nvPr>
+            <p:ph type="ftr" sz="quarter" idx="3"/>
+          </p:nvPr>
+        </p:nvSpPr>
+        <p:spPr>
+          <a:xfrm>
+            <a:off x="2550014" y="6522444"/>
+            <a:ext cx="4038600" cy="215999"/>
+          </a:xfrm>
+        </p:spPr>
         <p:txBody>
           <a:bodyPr/>
           <a:lstStyle/>
           <a:p>
-            <a:endParaRPr lang="de-DE"/>
-          </a:p>
-        </p:txBody>
-      </p:sp>
-      <p:sp>
-        <p:nvSpPr>
-          <p:cNvPr id="3" name="Inhaltsplatzhalter 2">
-            <a:extLst>
-              <a:ext uri="{FF2B5EF4-FFF2-40B4-BE49-F238E27FC236}">
-                <a16:creationId xmlns:a16="http://schemas.microsoft.com/office/drawing/2014/main" id="{5DC67D2E-7487-43A9-B734-0DEEE96D6BCF}"/>
-              </a:ext>
-            </a:extLst>
-          </p:cNvPr>
-          <p:cNvSpPr>
-            <a:spLocks noGrp="1"/>
-          </p:cNvSpPr>
-          <p:nvPr>
-            <p:ph idx="1"/>
-          </p:nvPr>
-        </p:nvSpPr>
-        <p:spPr/>
+            <a:r>
+              <a:rPr lang="de-DE" dirty="0"/>
+              <a:t>Design </a:t>
+            </a:r>
+            <a:r>
+              <a:rPr lang="de-DE" dirty="0" err="1"/>
+              <a:t>by</a:t>
+            </a:r>
+            <a:r>
+              <a:rPr lang="de-DE" dirty="0"/>
+              <a:t> Technology</a:t>
+            </a:r>
+            <a:endParaRPr lang="de-CH" dirty="0"/>
+          </a:p>
+        </p:txBody>
+      </p:sp>
+      <p:sp>
+        <p:nvSpPr>
+          <p:cNvPr id="4" name="Datumsplatzhalter 3">
+            <a:extLst>
+              <a:ext uri="{FF2B5EF4-FFF2-40B4-BE49-F238E27FC236}">
+                <a16:creationId xmlns:a16="http://schemas.microsoft.com/office/drawing/2014/main" id="{44DAA5A3-8CEF-4027-9289-B60138CD16A2}"/>
+              </a:ext>
+            </a:extLst>
+          </p:cNvPr>
+          <p:cNvSpPr>
+            <a:spLocks noGrp="1"/>
+          </p:cNvSpPr>
+          <p:nvPr>
+            <p:ph type="dt" sz="half" idx="2"/>
+          </p:nvPr>
+        </p:nvSpPr>
+        <p:spPr>
+          <a:xfrm>
+            <a:off x="10328132" y="6522442"/>
+            <a:ext cx="789039" cy="216001"/>
+          </a:xfrm>
+        </p:spPr>
         <p:txBody>
           <a:bodyPr/>
           <a:lstStyle/>
           <a:p>
-            <a:pPr marL="0" indent="0">
-              <a:buNone/>
-            </a:pPr>
-            <a:r>
-              <a:rPr lang="de-DE" b="1" dirty="0"/>
-              <a:t>Live-Demo: GPT → Code → Controller</a:t>
-            </a:r>
-          </a:p>
-          <a:p>
-            <a:pPr marL="0" indent="0">
-              <a:buNone/>
-            </a:pPr>
-            <a:r>
-              <a:rPr lang="de-DE" dirty="0"/>
-              <a:t>Prompt eingeben — generierten Code kopieren</a:t>
-            </a:r>
-          </a:p>
-          <a:p>
-            <a:pPr marL="0" indent="0">
-              <a:buNone/>
-            </a:pPr>
-            <a:r>
-              <a:rPr lang="de-DE" dirty="0"/>
-              <a:t>In PlatformIO einfügen — auf Board flashen</a:t>
-            </a:r>
-          </a:p>
-          <a:p>
-            <a:pPr marL="0" indent="0">
-              <a:buNone/>
-            </a:pPr>
-            <a:r>
-              <a:rPr lang="de-DE" dirty="0"/>
-              <a:t>Sensor bewegen — LED oder Servo reagiert</a:t>
-            </a:r>
-          </a:p>
-        </p:txBody>
-      </p:sp>
-      <p:sp>
-        <p:nvSpPr>
-          <p:cNvPr id="4" name="Datumsplatzhalter 3">
-            <a:extLst>
-              <a:ext uri="{FF2B5EF4-FFF2-40B4-BE49-F238E27FC236}">
-                <a16:creationId xmlns:a16="http://schemas.microsoft.com/office/drawing/2014/main" id="{1EDD72CB-F104-4DE7-8E0E-740091A208E7}"/>
-              </a:ext>
-            </a:extLst>
-          </p:cNvPr>
-          <p:cNvSpPr>
-            <a:spLocks noGrp="1"/>
-          </p:cNvSpPr>
-          <p:nvPr>
-            <p:ph type="dt" sz="half" idx="2"/>
-          </p:nvPr>
-        </p:nvSpPr>
-        <p:spPr>
-          <a:xfrm>
-            <a:off x="10328132" y="6522442"/>
-            <a:ext cx="789039" cy="216001"/>
-          </a:xfrm>
-        </p:spPr>
-        <p:txBody>
-          <a:bodyPr/>
-          <a:lstStyle/>
-          <a:p>
-            <a:fld id="{C346C403-2363-42FC-8982-6D08D86AEC82}" type="datetime1">
+            <a:fld id="{8D93BFA6-70D2-4653-B5CB-D3376F3BFAE7}" type="datetime1">
               <a:rPr lang="de-CH" noProof="0" smtClean="0"/>
               <a:t>13.04.26</a:t>
             </a:fld>
@@ -20837,7 +21930,7 @@
           <p:cNvPr id="6" name="Foliennummernplatzhalter 5">
             <a:extLst>
               <a:ext uri="{FF2B5EF4-FFF2-40B4-BE49-F238E27FC236}">
-                <a16:creationId xmlns:a16="http://schemas.microsoft.com/office/drawing/2014/main" id="{5985790D-0071-457D-86B5-CFCB0B92A18F}"/>
+                <a16:creationId xmlns:a16="http://schemas.microsoft.com/office/drawing/2014/main" id="{5C9B1E27-9E06-4598-A6EF-3BCBC8D0152F}"/>
               </a:ext>
             </a:extLst>
           </p:cNvPr>
@@ -20866,52 +21959,186 @@
           </a:p>
         </p:txBody>
       </p:sp>
-      <p:sp>
-        <p:nvSpPr>
-          <p:cNvPr id="7" name="Fußzeilenplatzhalter 4">
-            <a:extLst>
-              <a:ext uri="{FF2B5EF4-FFF2-40B4-BE49-F238E27FC236}">
-                <a16:creationId xmlns:a16="http://schemas.microsoft.com/office/drawing/2014/main" id="{AFE0E341-8911-1EEF-68AE-B6CA70F83C29}"/>
-              </a:ext>
-            </a:extLst>
-          </p:cNvPr>
-          <p:cNvSpPr>
-            <a:spLocks noGrp="1"/>
-          </p:cNvSpPr>
-          <p:nvPr>
-            <p:ph type="ftr" sz="quarter" idx="3"/>
-          </p:nvPr>
-        </p:nvSpPr>
-        <p:spPr>
-          <a:xfrm>
-            <a:off x="2550014" y="6516094"/>
-            <a:ext cx="4038600" cy="215999"/>
-          </a:xfrm>
-        </p:spPr>
-        <p:txBody>
-          <a:bodyPr/>
-          <a:lstStyle/>
-          <a:p>
-            <a:r>
-              <a:rPr lang="de-DE" dirty="0"/>
-              <a:t xml:space="preserve">Design </a:t>
-            </a:r>
-            <a:r>
-              <a:rPr lang="de-DE" dirty="0" err="1"/>
-              <a:t>by</a:t>
-            </a:r>
-            <a:r>
-              <a:rPr lang="de-DE" dirty="0"/>
-              <a:t xml:space="preserve"> Technology - Folientitel</a:t>
-            </a:r>
-            <a:endParaRPr lang="de-CH" dirty="0"/>
-          </a:p>
-        </p:txBody>
-      </p:sp>
     </p:spTree>
     <p:extLst>
       <p:ext uri="{BB962C8B-B14F-4D97-AF65-F5344CB8AC3E}">
-        <p14:creationId xmlns:p14="http://schemas.microsoft.com/office/powerpoint/2010/main" val="1032210412"/>
+        <p14:creationId xmlns:p14="http://schemas.microsoft.com/office/powerpoint/2010/main" val="294303585"/>
+      </p:ext>
+    </p:extLst>
+  </p:cSld>
+  <p:clrMapOvr>
+    <a:masterClrMapping/>
+  </p:clrMapOvr>
+</p:sld>
+</file>
+
+<file path=ppt/slides/slide18.xml><?xml version="1.0" encoding="utf-8"?>
+<p:sld xmlns:a="http://schemas.openxmlformats.org/drawingml/2006/main" xmlns:r="http://schemas.openxmlformats.org/officeDocument/2006/relationships" xmlns:p="http://schemas.openxmlformats.org/presentationml/2006/main">
+  <p:cSld>
+    <p:spTree>
+      <p:nvGrpSpPr>
+        <p:cNvPr id="1" name=""/>
+        <p:cNvGrpSpPr/>
+        <p:nvPr/>
+      </p:nvGrpSpPr>
+      <p:grpSpPr>
+        <a:xfrm>
+          <a:off x="0" y="0"/>
+          <a:ext cx="0" cy="0"/>
+          <a:chOff x="0" y="0"/>
+          <a:chExt cx="0" cy="0"/>
+        </a:xfrm>
+      </p:grpSpPr>
+      <p:sp>
+        <p:nvSpPr>
+          <p:cNvPr id="2" name="Titel 1">
+            <a:extLst>
+              <a:ext uri="{FF2B5EF4-FFF2-40B4-BE49-F238E27FC236}">
+                <a16:creationId xmlns:a16="http://schemas.microsoft.com/office/drawing/2014/main" id="{DA757BF2-5EC6-42D6-9F04-4237E99FD6E5}"/>
+              </a:ext>
+            </a:extLst>
+          </p:cNvPr>
+          <p:cNvSpPr>
+            <a:spLocks noGrp="1"/>
+          </p:cNvSpPr>
+          <p:nvPr>
+            <p:ph type="title"/>
+          </p:nvPr>
+        </p:nvSpPr>
+        <p:spPr/>
+        <p:txBody>
+          <a:bodyPr/>
+          <a:lstStyle/>
+          <a:p>
+            <a:r>
+              <a:rPr lang="de-DE" dirty="0"/>
+              <a:t>04</a:t>
+            </a:r>
+            <a:br>
+              <a:rPr lang="de-DE" dirty="0"/>
+            </a:br>
+            <a:r>
+              <a:rPr lang="de-DE" dirty="0"/>
+              <a:t>Eigenen GPT bauen</a:t>
+            </a:r>
+          </a:p>
+        </p:txBody>
+      </p:sp>
+      <p:sp>
+        <p:nvSpPr>
+          <p:cNvPr id="4" name="Fußzeilenplatzhalter 3">
+            <a:extLst>
+              <a:ext uri="{FF2B5EF4-FFF2-40B4-BE49-F238E27FC236}">
+                <a16:creationId xmlns:a16="http://schemas.microsoft.com/office/drawing/2014/main" id="{9DDD7CFF-BF36-47E4-8302-EBC181BD33D4}"/>
+              </a:ext>
+            </a:extLst>
+          </p:cNvPr>
+          <p:cNvSpPr>
+            <a:spLocks noGrp="1"/>
+          </p:cNvSpPr>
+          <p:nvPr>
+            <p:ph type="ftr" sz="quarter" idx="3"/>
+          </p:nvPr>
+        </p:nvSpPr>
+        <p:spPr>
+          <a:xfrm>
+            <a:off x="2100838" y="6522444"/>
+            <a:ext cx="4038600" cy="215999"/>
+          </a:xfrm>
+        </p:spPr>
+        <p:txBody>
+          <a:bodyPr/>
+          <a:lstStyle/>
+          <a:p>
+            <a:r>
+              <a:rPr lang="de-DE" dirty="0"/>
+              <a:t>Design </a:t>
+            </a:r>
+            <a:r>
+              <a:rPr lang="de-DE" dirty="0" err="1"/>
+              <a:t>by</a:t>
+            </a:r>
+            <a:r>
+              <a:rPr lang="de-DE" dirty="0"/>
+              <a:t> Technology</a:t>
+            </a:r>
+            <a:endParaRPr lang="de-CH" dirty="0"/>
+          </a:p>
+        </p:txBody>
+      </p:sp>
+      <p:sp>
+        <p:nvSpPr>
+          <p:cNvPr id="3" name="Datumsplatzhalter 2">
+            <a:extLst>
+              <a:ext uri="{FF2B5EF4-FFF2-40B4-BE49-F238E27FC236}">
+                <a16:creationId xmlns:a16="http://schemas.microsoft.com/office/drawing/2014/main" id="{4DEEA281-37DD-45CF-AABF-2BFEAD6C860F}"/>
+              </a:ext>
+            </a:extLst>
+          </p:cNvPr>
+          <p:cNvSpPr>
+            <a:spLocks noGrp="1"/>
+          </p:cNvSpPr>
+          <p:nvPr>
+            <p:ph type="dt" sz="half" idx="2"/>
+          </p:nvPr>
+        </p:nvSpPr>
+        <p:spPr>
+          <a:xfrm>
+            <a:off x="10328132" y="6522442"/>
+            <a:ext cx="789039" cy="216001"/>
+          </a:xfrm>
+        </p:spPr>
+        <p:txBody>
+          <a:bodyPr/>
+          <a:lstStyle/>
+          <a:p>
+            <a:fld id="{43402617-726E-42A6-AC19-79D267EAC7EE}" type="datetime1">
+              <a:rPr lang="de-CH" noProof="0" smtClean="0"/>
+              <a:t>13.04.26</a:t>
+            </a:fld>
+            <a:endParaRPr lang="de-CH" noProof="0"/>
+          </a:p>
+        </p:txBody>
+      </p:sp>
+      <p:sp>
+        <p:nvSpPr>
+          <p:cNvPr id="5" name="Foliennummernplatzhalter 4">
+            <a:extLst>
+              <a:ext uri="{FF2B5EF4-FFF2-40B4-BE49-F238E27FC236}">
+                <a16:creationId xmlns:a16="http://schemas.microsoft.com/office/drawing/2014/main" id="{3DB16F61-62BA-4FA3-89CE-2F599E6DE0EF}"/>
+              </a:ext>
+            </a:extLst>
+          </p:cNvPr>
+          <p:cNvSpPr>
+            <a:spLocks noGrp="1"/>
+          </p:cNvSpPr>
+          <p:nvPr>
+            <p:ph type="sldNum" sz="quarter" idx="4"/>
+          </p:nvPr>
+        </p:nvSpPr>
+        <p:spPr>
+          <a:xfrm>
+            <a:off x="11137585" y="6522444"/>
+            <a:ext cx="322577" cy="216000"/>
+          </a:xfrm>
+        </p:spPr>
+        <p:txBody>
+          <a:bodyPr/>
+          <a:lstStyle/>
+          <a:p>
+            <a:fld id="{5ACA52AF-F19D-405C-AD5F-7D94B96A5CC3}" type="slidenum">
+              <a:rPr lang="de-CH" noProof="0" smtClean="0"/>
+              <a:pPr/>
+              <a:t>18</a:t>
+            </a:fld>
+            <a:endParaRPr lang="de-CH" noProof="0"/>
+          </a:p>
+        </p:txBody>
+      </p:sp>
+    </p:spTree>
+    <p:extLst>
+      <p:ext uri="{BB962C8B-B14F-4D97-AF65-F5344CB8AC3E}">
+        <p14:creationId xmlns:p14="http://schemas.microsoft.com/office/powerpoint/2010/main" val="766234280"/>
       </p:ext>
     </p:extLst>
   </p:cSld>
@@ -20940,6 +22167,723 @@
       </p:grpSpPr>
       <p:sp>
         <p:nvSpPr>
+          <p:cNvPr id="2" name="Titel 1">
+            <a:extLst>
+              <a:ext uri="{FF2B5EF4-FFF2-40B4-BE49-F238E27FC236}">
+                <a16:creationId xmlns:a16="http://schemas.microsoft.com/office/drawing/2014/main" id="{9FF31ECF-EF04-4AAA-9A8E-583E3D217F33}"/>
+              </a:ext>
+            </a:extLst>
+          </p:cNvPr>
+          <p:cNvSpPr>
+            <a:spLocks noGrp="1"/>
+          </p:cNvSpPr>
+          <p:nvPr>
+            <p:ph type="title"/>
+          </p:nvPr>
+        </p:nvSpPr>
+        <p:spPr/>
+        <p:txBody>
+          <a:bodyPr/>
+          <a:lstStyle/>
+          <a:p>
+            <a:r>
+              <a:rPr lang="de-DE" dirty="0"/>
+              <a:t>Den System Prompt verstehen und anpassen</a:t>
+            </a:r>
+            <a:endParaRPr lang="de-CH" dirty="0"/>
+          </a:p>
+        </p:txBody>
+      </p:sp>
+      <p:sp>
+        <p:nvSpPr>
+          <p:cNvPr id="3" name="Inhaltsplatzhalter 2">
+            <a:extLst>
+              <a:ext uri="{FF2B5EF4-FFF2-40B4-BE49-F238E27FC236}">
+                <a16:creationId xmlns:a16="http://schemas.microsoft.com/office/drawing/2014/main" id="{9EE0A683-618F-4D75-846F-0DB536B4E502}"/>
+              </a:ext>
+            </a:extLst>
+          </p:cNvPr>
+          <p:cNvSpPr>
+            <a:spLocks noGrp="1"/>
+          </p:cNvSpPr>
+          <p:nvPr>
+            <p:ph idx="1"/>
+          </p:nvPr>
+        </p:nvSpPr>
+        <p:spPr/>
+        <p:txBody>
+          <a:bodyPr/>
+          <a:lstStyle/>
+          <a:p>
+            <a:pPr marL="0" indent="0">
+              <a:buNone/>
+            </a:pPr>
+            <a:r>
+              <a:rPr lang="de-DE" b="1" dirty="0"/>
+              <a:t>Was steckt hinter dem Custom GPT?</a:t>
+            </a:r>
+          </a:p>
+          <a:p>
+            <a:pPr marL="0" indent="0">
+              <a:buNone/>
+            </a:pPr>
+            <a:r>
+              <a:rPr lang="de-DE" dirty="0"/>
+              <a:t>Der System Prompt ist die “DNA” eines Custom GPT. Er legt fest: Welche Hardware wird</a:t>
+            </a:r>
+          </a:p>
+          <a:p>
+            <a:pPr marL="0" indent="0">
+              <a:buNone/>
+            </a:pPr>
+            <a:r>
+              <a:rPr lang="de-DE" dirty="0"/>
+              <a:t>unterstützt? Welche Libraries sind erlaubt? Wie soll der Code strukturiert sein?</a:t>
+            </a:r>
+          </a:p>
+          <a:p>
+            <a:pPr marL="0" indent="0">
+              <a:buNone/>
+            </a:pPr>
+            <a:endParaRPr lang="de-DE" dirty="0"/>
+          </a:p>
+          <a:p>
+            <a:pPr marL="0" indent="0">
+              <a:buNone/>
+            </a:pPr>
+            <a:r>
+              <a:rPr lang="de-DE" dirty="0"/>
+              <a:t>Im GitHub-Repository ist der vollständige System Prompt veröffentlicht und erklärt.</a:t>
+            </a:r>
+          </a:p>
+          <a:p>
+            <a:pPr marL="0" indent="0">
+              <a:buNone/>
+            </a:pPr>
+            <a:r>
+              <a:rPr lang="de-DE" dirty="0"/>
+              <a:t>Du kannst ihn kopieren und für deinen eigenen Workshop oder dein Projekt anpassen.</a:t>
+            </a:r>
+          </a:p>
+          <a:p>
+            <a:pPr marL="0" indent="0">
+              <a:buNone/>
+            </a:pPr>
+            <a:endParaRPr lang="de-DE" dirty="0"/>
+          </a:p>
+          <a:p>
+            <a:pPr marL="0" indent="0">
+              <a:buNone/>
+            </a:pPr>
+            <a:r>
+              <a:rPr lang="de-DE" dirty="0"/>
+              <a:t>Eigene GPTs lassen sich über ChatGPT Plus erstellen: System Prompt einfügen,</a:t>
+            </a:r>
+          </a:p>
+          <a:p>
+            <a:pPr marL="0" indent="0">
+              <a:buNone/>
+            </a:pPr>
+            <a:r>
+              <a:rPr lang="de-DE" dirty="0"/>
+              <a:t>GPT-Dataset als Wissensbasis hochladen — fertig ist der spezialisierte Assistent.</a:t>
+            </a:r>
+          </a:p>
+        </p:txBody>
+      </p:sp>
+      <p:sp>
+        <p:nvSpPr>
+          <p:cNvPr id="5" name="Fußzeilenplatzhalter 4">
+            <a:extLst>
+              <a:ext uri="{FF2B5EF4-FFF2-40B4-BE49-F238E27FC236}">
+                <a16:creationId xmlns:a16="http://schemas.microsoft.com/office/drawing/2014/main" id="{572B1E5F-FA5D-4B47-A43F-C570AFE8C6D3}"/>
+              </a:ext>
+            </a:extLst>
+          </p:cNvPr>
+          <p:cNvSpPr>
+            <a:spLocks noGrp="1"/>
+          </p:cNvSpPr>
+          <p:nvPr>
+            <p:ph type="ftr" sz="quarter" idx="3"/>
+          </p:nvPr>
+        </p:nvSpPr>
+        <p:spPr>
+          <a:xfrm>
+            <a:off x="2550014" y="6522444"/>
+            <a:ext cx="4038600" cy="215999"/>
+          </a:xfrm>
+        </p:spPr>
+        <p:txBody>
+          <a:bodyPr/>
+          <a:lstStyle/>
+          <a:p>
+            <a:r>
+              <a:rPr lang="de-DE" dirty="0"/>
+              <a:t>Design </a:t>
+            </a:r>
+            <a:r>
+              <a:rPr lang="de-DE" dirty="0" err="1"/>
+              <a:t>by</a:t>
+            </a:r>
+            <a:r>
+              <a:rPr lang="de-DE" dirty="0"/>
+              <a:t> Technology</a:t>
+            </a:r>
+            <a:endParaRPr lang="de-CH" dirty="0"/>
+          </a:p>
+        </p:txBody>
+      </p:sp>
+      <p:sp>
+        <p:nvSpPr>
+          <p:cNvPr id="4" name="Datumsplatzhalter 3">
+            <a:extLst>
+              <a:ext uri="{FF2B5EF4-FFF2-40B4-BE49-F238E27FC236}">
+                <a16:creationId xmlns:a16="http://schemas.microsoft.com/office/drawing/2014/main" id="{44DAA5A3-8CEF-4027-9289-B60138CD16A2}"/>
+              </a:ext>
+            </a:extLst>
+          </p:cNvPr>
+          <p:cNvSpPr>
+            <a:spLocks noGrp="1"/>
+          </p:cNvSpPr>
+          <p:nvPr>
+            <p:ph type="dt" sz="half" idx="2"/>
+          </p:nvPr>
+        </p:nvSpPr>
+        <p:spPr>
+          <a:xfrm>
+            <a:off x="10328132" y="6522442"/>
+            <a:ext cx="789039" cy="216001"/>
+          </a:xfrm>
+        </p:spPr>
+        <p:txBody>
+          <a:bodyPr/>
+          <a:lstStyle/>
+          <a:p>
+            <a:fld id="{8D93BFA6-70D2-4653-B5CB-D3376F3BFAE7}" type="datetime1">
+              <a:rPr lang="de-CH" noProof="0" smtClean="0"/>
+              <a:t>13.04.26</a:t>
+            </a:fld>
+            <a:endParaRPr lang="de-CH" noProof="0"/>
+          </a:p>
+        </p:txBody>
+      </p:sp>
+      <p:sp>
+        <p:nvSpPr>
+          <p:cNvPr id="6" name="Foliennummernplatzhalter 5">
+            <a:extLst>
+              <a:ext uri="{FF2B5EF4-FFF2-40B4-BE49-F238E27FC236}">
+                <a16:creationId xmlns:a16="http://schemas.microsoft.com/office/drawing/2014/main" id="{5C9B1E27-9E06-4598-A6EF-3BCBC8D0152F}"/>
+              </a:ext>
+            </a:extLst>
+          </p:cNvPr>
+          <p:cNvSpPr>
+            <a:spLocks noGrp="1"/>
+          </p:cNvSpPr>
+          <p:nvPr>
+            <p:ph type="sldNum" sz="quarter" idx="4"/>
+          </p:nvPr>
+        </p:nvSpPr>
+        <p:spPr>
+          <a:xfrm>
+            <a:off x="11137585" y="6522444"/>
+            <a:ext cx="322577" cy="216000"/>
+          </a:xfrm>
+        </p:spPr>
+        <p:txBody>
+          <a:bodyPr/>
+          <a:lstStyle/>
+          <a:p>
+            <a:fld id="{5ACA52AF-F19D-405C-AD5F-7D94B96A5CC3}" type="slidenum">
+              <a:rPr lang="de-CH" noProof="0" smtClean="0"/>
+              <a:t>19</a:t>
+            </a:fld>
+            <a:endParaRPr lang="de-CH" noProof="0"/>
+          </a:p>
+        </p:txBody>
+      </p:sp>
+    </p:spTree>
+    <p:extLst>
+      <p:ext uri="{BB962C8B-B14F-4D97-AF65-F5344CB8AC3E}">
+        <p14:creationId xmlns:p14="http://schemas.microsoft.com/office/powerpoint/2010/main" val="294303585"/>
+      </p:ext>
+    </p:extLst>
+  </p:cSld>
+  <p:clrMapOvr>
+    <a:masterClrMapping/>
+  </p:clrMapOvr>
+</p:sld>
+</file>
+
+<file path=ppt/slides/slide2.xml><?xml version="1.0" encoding="utf-8"?>
+<p:sld xmlns:a="http://schemas.openxmlformats.org/drawingml/2006/main" xmlns:r="http://schemas.openxmlformats.org/officeDocument/2006/relationships" xmlns:p="http://schemas.openxmlformats.org/presentationml/2006/main">
+  <p:cSld>
+    <p:spTree>
+      <p:nvGrpSpPr>
+        <p:cNvPr id="1" name=""/>
+        <p:cNvGrpSpPr/>
+        <p:nvPr/>
+      </p:nvGrpSpPr>
+      <p:grpSpPr>
+        <a:xfrm>
+          <a:off x="0" y="0"/>
+          <a:ext cx="0" cy="0"/>
+          <a:chOff x="0" y="0"/>
+          <a:chExt cx="0" cy="0"/>
+        </a:xfrm>
+      </p:grpSpPr>
+      <p:sp>
+        <p:nvSpPr>
+          <p:cNvPr id="2" name="Titel 1">
+            <a:extLst>
+              <a:ext uri="{FF2B5EF4-FFF2-40B4-BE49-F238E27FC236}">
+                <a16:creationId xmlns:a16="http://schemas.microsoft.com/office/drawing/2014/main" id="{6B050A74-6ED2-41B3-AD63-74F89C447FBB}"/>
+              </a:ext>
+            </a:extLst>
+          </p:cNvPr>
+          <p:cNvSpPr>
+            <a:spLocks noGrp="1"/>
+          </p:cNvSpPr>
+          <p:nvPr>
+            <p:ph type="title"/>
+          </p:nvPr>
+        </p:nvSpPr>
+        <p:spPr/>
+        <p:txBody>
+          <a:bodyPr/>
+          <a:lstStyle/>
+          <a:p>
+            <a:r>
+              <a:rPr lang="de-DE" dirty="0"/>
+              <a:t>Inhalt</a:t>
+            </a:r>
+            <a:endParaRPr lang="de-CH" dirty="0"/>
+          </a:p>
+        </p:txBody>
+      </p:sp>
+      <p:sp>
+        <p:nvSpPr>
+          <p:cNvPr id="3" name="Inhaltsplatzhalter 2">
+            <a:extLst>
+              <a:ext uri="{FF2B5EF4-FFF2-40B4-BE49-F238E27FC236}">
+                <a16:creationId xmlns:a16="http://schemas.microsoft.com/office/drawing/2014/main" id="{94792F61-F3A1-4E2C-B0EE-9742603FD08B}"/>
+              </a:ext>
+            </a:extLst>
+          </p:cNvPr>
+          <p:cNvSpPr>
+            <a:spLocks noGrp="1"/>
+          </p:cNvSpPr>
+          <p:nvPr>
+            <p:ph idx="1"/>
+          </p:nvPr>
+        </p:nvSpPr>
+        <p:spPr/>
+        <p:txBody>
+          <a:bodyPr/>
+          <a:lstStyle/>
+          <a:p>
+            <a:pPr marL="0" indent="0">
+              <a:buNone/>
+            </a:pPr>
+            <a:r>
+              <a:rPr lang="de-DE" dirty="0"/>
+              <a:t>01 — Der Paradigmenwechsel</a:t>
+            </a:r>
+          </a:p>
+          <a:p>
+            <a:pPr marL="0" indent="0">
+              <a:buNone/>
+            </a:pPr>
+            <a:r>
+              <a:rPr lang="de-DE" dirty="0"/>
+              <a:t>02 — Hardware &amp; Konzept</a:t>
+            </a:r>
+          </a:p>
+          <a:p>
+            <a:pPr marL="0" indent="0">
+              <a:buNone/>
+            </a:pPr>
+            <a:r>
+              <a:rPr lang="de-DE" dirty="0"/>
+              <a:t>03 — Das Custom GPT</a:t>
+            </a:r>
+          </a:p>
+          <a:p>
+            <a:pPr marL="0" indent="0">
+              <a:buNone/>
+            </a:pPr>
+            <a:r>
+              <a:rPr lang="de-DE" dirty="0"/>
+              <a:t>04 — Eigenen GPT bauen</a:t>
+            </a:r>
+            <a:endParaRPr lang="de-CH" dirty="0"/>
+          </a:p>
+        </p:txBody>
+      </p:sp>
+      <p:sp>
+        <p:nvSpPr>
+          <p:cNvPr id="5" name="Fußzeilenplatzhalter 4">
+            <a:extLst>
+              <a:ext uri="{FF2B5EF4-FFF2-40B4-BE49-F238E27FC236}">
+                <a16:creationId xmlns:a16="http://schemas.microsoft.com/office/drawing/2014/main" id="{4A08BFF2-5DEB-4FE4-A3E3-C18FD3A38B4D}"/>
+              </a:ext>
+            </a:extLst>
+          </p:cNvPr>
+          <p:cNvSpPr>
+            <a:spLocks noGrp="1"/>
+          </p:cNvSpPr>
+          <p:nvPr>
+            <p:ph type="ftr" sz="quarter" idx="3"/>
+          </p:nvPr>
+        </p:nvSpPr>
+        <p:spPr>
+          <a:xfrm>
+            <a:off x="2576986" y="6510646"/>
+            <a:ext cx="4592521" cy="216000"/>
+          </a:xfrm>
+        </p:spPr>
+        <p:txBody>
+          <a:bodyPr/>
+          <a:lstStyle/>
+          <a:p>
+            <a:r>
+              <a:rPr lang="de-DE" noProof="0" dirty="0"/>
+              <a:t>Design </a:t>
+            </a:r>
+            <a:r>
+              <a:rPr lang="de-DE" noProof="0" dirty="0" err="1"/>
+              <a:t>by</a:t>
+            </a:r>
+            <a:r>
+              <a:rPr lang="de-DE" noProof="0" dirty="0"/>
+              <a:t> Technology</a:t>
+            </a:r>
+            <a:endParaRPr lang="de-CH" noProof="0" dirty="0"/>
+          </a:p>
+        </p:txBody>
+      </p:sp>
+      <p:sp>
+        <p:nvSpPr>
+          <p:cNvPr id="6" name="Foliennummernplatzhalter 5">
+            <a:extLst>
+              <a:ext uri="{FF2B5EF4-FFF2-40B4-BE49-F238E27FC236}">
+                <a16:creationId xmlns:a16="http://schemas.microsoft.com/office/drawing/2014/main" id="{9D665EC3-3ED3-4D21-AC3C-EAD0881BA091}"/>
+              </a:ext>
+            </a:extLst>
+          </p:cNvPr>
+          <p:cNvSpPr>
+            <a:spLocks noGrp="1"/>
+          </p:cNvSpPr>
+          <p:nvPr>
+            <p:ph type="sldNum" sz="quarter" idx="4"/>
+          </p:nvPr>
+        </p:nvSpPr>
+        <p:spPr>
+          <a:xfrm>
+            <a:off x="11137585" y="6522444"/>
+            <a:ext cx="322577" cy="216000"/>
+          </a:xfrm>
+        </p:spPr>
+        <p:txBody>
+          <a:bodyPr/>
+          <a:lstStyle/>
+          <a:p>
+            <a:fld id="{5ACA52AF-F19D-405C-AD5F-7D94B96A5CC3}" type="slidenum">
+              <a:rPr lang="de-CH" noProof="0" smtClean="0"/>
+              <a:t>2</a:t>
+            </a:fld>
+            <a:endParaRPr lang="de-CH" noProof="0"/>
+          </a:p>
+        </p:txBody>
+      </p:sp>
+    </p:spTree>
+    <p:extLst>
+      <p:ext uri="{BB962C8B-B14F-4D97-AF65-F5344CB8AC3E}">
+        <p14:creationId xmlns:p14="http://schemas.microsoft.com/office/powerpoint/2010/main" val="3164086109"/>
+      </p:ext>
+    </p:extLst>
+  </p:cSld>
+  <p:clrMapOvr>
+    <a:masterClrMapping/>
+  </p:clrMapOvr>
+</p:sld>
+</file>
+
+<file path=ppt/slides/slide20.xml><?xml version="1.0" encoding="utf-8"?>
+<p:sld xmlns:a="http://schemas.openxmlformats.org/drawingml/2006/main" xmlns:r="http://schemas.openxmlformats.org/officeDocument/2006/relationships" xmlns:p="http://schemas.openxmlformats.org/presentationml/2006/main">
+  <p:cSld>
+    <p:spTree>
+      <p:nvGrpSpPr>
+        <p:cNvPr id="1" name=""/>
+        <p:cNvGrpSpPr/>
+        <p:nvPr/>
+      </p:nvGrpSpPr>
+      <p:grpSpPr>
+        <a:xfrm>
+          <a:off x="0" y="0"/>
+          <a:ext cx="0" cy="0"/>
+          <a:chOff x="0" y="0"/>
+          <a:chExt cx="0" cy="0"/>
+        </a:xfrm>
+      </p:grpSpPr>
+      <p:sp>
+        <p:nvSpPr>
+          <p:cNvPr id="2" name="Titel 1">
+            <a:extLst>
+              <a:ext uri="{FF2B5EF4-FFF2-40B4-BE49-F238E27FC236}">
+                <a16:creationId xmlns:a16="http://schemas.microsoft.com/office/drawing/2014/main" id="{41DF9D96-1AFA-40BA-BAE5-8D745FEC2462}"/>
+              </a:ext>
+            </a:extLst>
+          </p:cNvPr>
+          <p:cNvSpPr>
+            <a:spLocks noGrp="1"/>
+          </p:cNvSpPr>
+          <p:nvPr>
+            <p:ph type="title"/>
+          </p:nvPr>
+        </p:nvSpPr>
+        <p:spPr/>
+        <p:txBody>
+          <a:bodyPr/>
+          <a:lstStyle/>
+          <a:p>
+            <a:r>
+              <a:rPr lang="de-DE" dirty="0"/>
+              <a:t>Nächste Schritte</a:t>
+            </a:r>
+            <a:endParaRPr lang="de-CH" dirty="0"/>
+          </a:p>
+        </p:txBody>
+      </p:sp>
+      <p:sp>
+        <p:nvSpPr>
+          <p:cNvPr id="3" name="Inhaltsplatzhalter 2">
+            <a:extLst>
+              <a:ext uri="{FF2B5EF4-FFF2-40B4-BE49-F238E27FC236}">
+                <a16:creationId xmlns:a16="http://schemas.microsoft.com/office/drawing/2014/main" id="{5D30C9CD-6F3E-4243-AF8B-598CBE0FFE30}"/>
+              </a:ext>
+            </a:extLst>
+          </p:cNvPr>
+          <p:cNvSpPr>
+            <a:spLocks noGrp="1"/>
+          </p:cNvSpPr>
+          <p:nvPr>
+            <p:ph idx="1"/>
+          </p:nvPr>
+        </p:nvSpPr>
+        <p:spPr/>
+        <p:txBody>
+          <a:bodyPr/>
+          <a:lstStyle/>
+          <a:p>
+            <a:pPr marL="0" indent="0">
+              <a:buNone/>
+            </a:pPr>
+            <a:r>
+              <a:rPr lang="de-DE" b="1" dirty="0"/>
+              <a:t>Setup &amp; Installation</a:t>
+            </a:r>
+          </a:p>
+          <a:p>
+            <a:pPr marL="0" indent="0">
+              <a:buNone/>
+            </a:pPr>
+            <a:r>
+              <a:rPr lang="de-DE" dirty="0"/>
+              <a:t>VS Code + PlatformIO installieren — Schritt-für-Schritt im GitHub-Repo</a:t>
+            </a:r>
+          </a:p>
+          <a:p>
+            <a:pPr marL="0" indent="0">
+              <a:buNone/>
+            </a:pPr>
+            <a:endParaRPr lang="de-DE" dirty="0"/>
+          </a:p>
+          <a:p>
+            <a:pPr marL="0" indent="0">
+              <a:buNone/>
+            </a:pPr>
+            <a:r>
+              <a:rPr lang="de-DE" b="1" dirty="0"/>
+              <a:t>Erste Verbindung</a:t>
+            </a:r>
+          </a:p>
+          <a:p>
+            <a:pPr marL="0" indent="0">
+              <a:buNone/>
+            </a:pPr>
+            <a:r>
+              <a:rPr lang="de-DE" dirty="0"/>
+              <a:t>“Blink”-Beispiel deployen und Sensor-Kanal testen</a:t>
+            </a:r>
+          </a:p>
+          <a:p>
+            <a:pPr marL="0" indent="0">
+              <a:buNone/>
+            </a:pPr>
+            <a:endParaRPr lang="de-DE" dirty="0"/>
+          </a:p>
+          <a:p>
+            <a:pPr marL="0" indent="0">
+              <a:buNone/>
+            </a:pPr>
+            <a:r>
+              <a:rPr lang="de-DE" b="1" dirty="0"/>
+              <a:t>GitHub Repository</a:t>
+            </a:r>
+          </a:p>
+          <a:p>
+            <a:pPr marL="0" indent="0">
+              <a:buNone/>
+            </a:pPr>
+            <a:r>
+              <a:rPr lang="de-DE" dirty="0"/>
+              <a:t>github.com/archilab/pathfinder-workshop — Dokumentation, Beispiele, GPT-Dataset</a:t>
+            </a:r>
+          </a:p>
+        </p:txBody>
+      </p:sp>
+      <p:sp>
+        <p:nvSpPr>
+          <p:cNvPr id="5" name="Fußzeilenplatzhalter 4">
+            <a:extLst>
+              <a:ext uri="{FF2B5EF4-FFF2-40B4-BE49-F238E27FC236}">
+                <a16:creationId xmlns:a16="http://schemas.microsoft.com/office/drawing/2014/main" id="{08000522-08D1-4C97-AE24-545093D719FE}"/>
+              </a:ext>
+            </a:extLst>
+          </p:cNvPr>
+          <p:cNvSpPr>
+            <a:spLocks noGrp="1"/>
+          </p:cNvSpPr>
+          <p:nvPr>
+            <p:ph type="ftr" sz="quarter" idx="3"/>
+          </p:nvPr>
+        </p:nvSpPr>
+        <p:spPr>
+          <a:xfrm>
+            <a:off x="2533972" y="6522444"/>
+            <a:ext cx="4038600" cy="215999"/>
+          </a:xfrm>
+        </p:spPr>
+        <p:txBody>
+          <a:bodyPr/>
+          <a:lstStyle/>
+          <a:p>
+            <a:r>
+              <a:rPr lang="de-DE" dirty="0"/>
+              <a:t>Design </a:t>
+            </a:r>
+            <a:r>
+              <a:rPr lang="de-DE" dirty="0" err="1"/>
+              <a:t>by</a:t>
+            </a:r>
+            <a:r>
+              <a:rPr lang="de-DE" dirty="0"/>
+              <a:t> Technology</a:t>
+            </a:r>
+            <a:endParaRPr lang="de-CH" dirty="0"/>
+          </a:p>
+        </p:txBody>
+      </p:sp>
+      <p:sp>
+        <p:nvSpPr>
+          <p:cNvPr id="4" name="Datumsplatzhalter 3">
+            <a:extLst>
+              <a:ext uri="{FF2B5EF4-FFF2-40B4-BE49-F238E27FC236}">
+                <a16:creationId xmlns:a16="http://schemas.microsoft.com/office/drawing/2014/main" id="{3E5DECAF-74B9-42C9-91F9-16811C11DDD9}"/>
+              </a:ext>
+            </a:extLst>
+          </p:cNvPr>
+          <p:cNvSpPr>
+            <a:spLocks noGrp="1"/>
+          </p:cNvSpPr>
+          <p:nvPr>
+            <p:ph type="dt" sz="half" idx="2"/>
+          </p:nvPr>
+        </p:nvSpPr>
+        <p:spPr>
+          <a:xfrm>
+            <a:off x="10328132" y="6522442"/>
+            <a:ext cx="789039" cy="216001"/>
+          </a:xfrm>
+        </p:spPr>
+        <p:txBody>
+          <a:bodyPr/>
+          <a:lstStyle/>
+          <a:p>
+            <a:fld id="{255C2D81-634A-41B2-966F-5B8C1282A848}" type="datetime1">
+              <a:rPr lang="de-CH" noProof="0" smtClean="0"/>
+              <a:t>13.04.26</a:t>
+            </a:fld>
+            <a:endParaRPr lang="de-CH" noProof="0"/>
+          </a:p>
+        </p:txBody>
+      </p:sp>
+      <p:sp>
+        <p:nvSpPr>
+          <p:cNvPr id="6" name="Foliennummernplatzhalter 5">
+            <a:extLst>
+              <a:ext uri="{FF2B5EF4-FFF2-40B4-BE49-F238E27FC236}">
+                <a16:creationId xmlns:a16="http://schemas.microsoft.com/office/drawing/2014/main" id="{92390BB4-CA1A-4AB3-997F-BC93DE23C7B5}"/>
+              </a:ext>
+            </a:extLst>
+          </p:cNvPr>
+          <p:cNvSpPr>
+            <a:spLocks noGrp="1"/>
+          </p:cNvSpPr>
+          <p:nvPr>
+            <p:ph type="sldNum" sz="quarter" idx="4"/>
+          </p:nvPr>
+        </p:nvSpPr>
+        <p:spPr>
+          <a:xfrm>
+            <a:off x="11137585" y="6522444"/>
+            <a:ext cx="322577" cy="216000"/>
+          </a:xfrm>
+        </p:spPr>
+        <p:txBody>
+          <a:bodyPr/>
+          <a:lstStyle/>
+          <a:p>
+            <a:fld id="{5ACA52AF-F19D-405C-AD5F-7D94B96A5CC3}" type="slidenum">
+              <a:rPr lang="de-CH" noProof="0" smtClean="0"/>
+              <a:t>20</a:t>
+            </a:fld>
+            <a:endParaRPr lang="de-CH" noProof="0"/>
+          </a:p>
+        </p:txBody>
+      </p:sp>
+    </p:spTree>
+    <p:extLst>
+      <p:ext uri="{BB962C8B-B14F-4D97-AF65-F5344CB8AC3E}">
+        <p14:creationId xmlns:p14="http://schemas.microsoft.com/office/powerpoint/2010/main" val="2463831729"/>
+      </p:ext>
+    </p:extLst>
+  </p:cSld>
+  <p:clrMapOvr>
+    <a:masterClrMapping/>
+  </p:clrMapOvr>
+</p:sld>
+</file>
+
+<file path=ppt/slides/slide21.xml><?xml version="1.0" encoding="utf-8"?>
+<p:sld xmlns:a="http://schemas.openxmlformats.org/drawingml/2006/main" xmlns:r="http://schemas.openxmlformats.org/officeDocument/2006/relationships" xmlns:p="http://schemas.openxmlformats.org/presentationml/2006/main">
+  <p:cSld>
+    <p:spTree>
+      <p:nvGrpSpPr>
+        <p:cNvPr id="1" name=""/>
+        <p:cNvGrpSpPr/>
+        <p:nvPr/>
+      </p:nvGrpSpPr>
+      <p:grpSpPr>
+        <a:xfrm>
+          <a:off x="0" y="0"/>
+          <a:ext cx="0" cy="0"/>
+          <a:chOff x="0" y="0"/>
+          <a:chExt cx="0" cy="0"/>
+        </a:xfrm>
+      </p:grpSpPr>
+      <p:sp>
+        <p:nvSpPr>
           <p:cNvPr id="12" name="Inhaltsplatzhalter 2">
             <a:extLst>
               <a:ext uri="{FF2B5EF4-FFF2-40B4-BE49-F238E27FC236}">
@@ -21002,7 +22946,7 @@
           <a:p>
             <a:r>
               <a:rPr lang="de-DE" dirty="0"/>
-              <a:t xml:space="preserve">Design </a:t>
+              <a:t>Design </a:t>
             </a:r>
             <a:r>
               <a:rPr lang="de-DE" dirty="0" err="1"/>
@@ -21010,7 +22954,7 @@
             </a:r>
             <a:r>
               <a:rPr lang="de-DE" dirty="0"/>
-              <a:t xml:space="preserve"> Technology | </a:t>
+              <a:t> Technology | </a:t>
             </a:r>
             <a:r>
               <a:rPr lang="de-DE" dirty="0" err="1"/>
@@ -21021,7 +22965,7 @@
           <a:p>
             <a:r>
               <a:rPr lang="de-DE" dirty="0"/>
-              <a:t xml:space="preserve">Martin </a:t>
+              <a:t>Martin </a:t>
             </a:r>
             <a:r>
               <a:rPr lang="de-DE" dirty="0" err="1"/>
@@ -21029,7 +22973,7 @@
             </a:r>
             <a:r>
               <a:rPr lang="de-DE" dirty="0"/>
-              <a:t xml:space="preserve"> Straße 21</a:t>
+              <a:t> Straße 21</a:t>
             </a:r>
           </a:p>
           <a:p>
@@ -21101,15 +23045,15 @@
           <p:cNvPr id="2" name="Titel 1">
             <a:extLst>
               <a:ext uri="{FF2B5EF4-FFF2-40B4-BE49-F238E27FC236}">
-                <a16:creationId xmlns:a16="http://schemas.microsoft.com/office/drawing/2014/main" id="{3FDF9179-5F46-4028-8AD3-4988AB9A6C56}"/>
-              </a:ext>
-            </a:extLst>
-          </p:cNvPr>
-          <p:cNvSpPr>
-            <a:spLocks noGrp="1"/>
-          </p:cNvSpPr>
-          <p:nvPr>
-            <p:ph type="ctrTitle"/>
+                <a16:creationId xmlns:a16="http://schemas.microsoft.com/office/drawing/2014/main" id="{89091591-7F03-49A8-92D7-21DE745F13CF}"/>
+              </a:ext>
+            </a:extLst>
+          </p:cNvPr>
+          <p:cNvSpPr>
+            <a:spLocks noGrp="1"/>
+          </p:cNvSpPr>
+          <p:nvPr>
+            <p:ph type="title"/>
           </p:nvPr>
         </p:nvSpPr>
         <p:spPr/>
@@ -21117,35 +23061,65 @@
           <a:bodyPr/>
           <a:lstStyle/>
           <a:p>
-            <a:r>
-              <a:rPr lang="de-DE" dirty="0"/>
-              <a:t>Pathfinder Workshop</a:t>
-            </a:r>
-            <a:br>
-              <a:rPr lang="de-DE" dirty="0"/>
-            </a:br>
-            <a:r>
-              <a:rPr lang="de-DE" dirty="0"/>
-              <a:t>Interaktive Systeme mit KI und ESP32</a:t>
-            </a:r>
-            <a:endParaRPr lang="de-CH" dirty="0"/>
-          </a:p>
-        </p:txBody>
-      </p:sp>
-      <p:sp>
-        <p:nvSpPr>
-          <p:cNvPr id="5" name="Textplatzhalter 4">
-            <a:extLst>
-              <a:ext uri="{FF2B5EF4-FFF2-40B4-BE49-F238E27FC236}">
-                <a16:creationId xmlns:a16="http://schemas.microsoft.com/office/drawing/2014/main" id="{9253DF2A-2730-487C-8E19-2CA6CA915ECA}"/>
-              </a:ext>
-            </a:extLst>
-          </p:cNvPr>
-          <p:cNvSpPr>
-            <a:spLocks noGrp="1"/>
-          </p:cNvSpPr>
-          <p:nvPr>
-            <p:ph type="body" sz="quarter" idx="13"/>
+            <a:endParaRPr lang="de-DE"/>
+          </a:p>
+        </p:txBody>
+      </p:sp>
+      <p:pic>
+        <p:nvPicPr>
+          <p:cNvPr id="9" name="Bildplatzhalter 8" descr="Ein Bild, das Elektronik, Elektrisches Bauelement, Elektronisches Bauteil, passives Bauelement enthält.&#10;&#10;KI-generierte Inhalte können fehlerhaft sein.">
+            <a:extLst>
+              <a:ext uri="{FF2B5EF4-FFF2-40B4-BE49-F238E27FC236}">
+                <a16:creationId xmlns:a16="http://schemas.microsoft.com/office/drawing/2014/main" id="{D9973EE2-7CB1-C84C-1566-C338AD8AD866}"/>
+              </a:ext>
+            </a:extLst>
+          </p:cNvPr>
+          <p:cNvPicPr>
+            <a:picLocks noGrp="1" noChangeAspect="1"/>
+          </p:cNvPicPr>
+          <p:nvPr>
+            <p:ph type="pic" sz="quarter" idx="13"/>
+          </p:nvPr>
+        </p:nvPicPr>
+        <p:blipFill>
+          <a:blip r:embed="rId2">
+            <a:extLst>
+              <a:ext uri="{28A0092B-C50C-407E-A947-70E740481C1C}">
+                <a14:useLocalDpi xmlns:a14="http://schemas.microsoft.com/office/drawing/2010/main" val="0"/>
+              </a:ext>
+            </a:extLst>
+          </a:blip>
+          <a:srcRect t="11841" b="11841"/>
+          <a:stretch>
+            <a:fillRect/>
+          </a:stretch>
+        </p:blipFill>
+        <p:spPr>
+          <a:prstGeom prst="rect">
+            <a:avLst/>
+          </a:prstGeom>
+          <a:solidFill>
+            <a:srgbClr val="9B8357">
+              <a:lumMod val="20000"/>
+              <a:lumOff val="80000"/>
+            </a:srgbClr>
+          </a:solidFill>
+        </p:spPr>
+      </p:pic>
+      <p:sp>
+        <p:nvSpPr>
+          <p:cNvPr id="4" name="Datumsplatzhalter 3">
+            <a:extLst>
+              <a:ext uri="{FF2B5EF4-FFF2-40B4-BE49-F238E27FC236}">
+                <a16:creationId xmlns:a16="http://schemas.microsoft.com/office/drawing/2014/main" id="{CEB531D5-BC39-F7FB-3B3D-C81B5CE6B928}"/>
+              </a:ext>
+            </a:extLst>
+          </p:cNvPr>
+          <p:cNvSpPr>
+            <a:spLocks noGrp="1"/>
+          </p:cNvSpPr>
+          <p:nvPr>
+            <p:ph type="dt" sz="half" idx="2"/>
           </p:nvPr>
         </p:nvSpPr>
         <p:spPr/>
@@ -21153,103 +23127,50 @@
           <a:bodyPr/>
           <a:lstStyle/>
           <a:p>
-            <a:r>
-              <a:rPr lang="de-DE" b="1" dirty="0">
-                <a:solidFill>
-                  <a:schemeClr val="tx1">
-                    <a:lumMod val="50000"/>
-                    <a:lumOff val="50000"/>
-                  </a:schemeClr>
-                </a:solidFill>
-              </a:rPr>
-              <a:t>Prof. Stefan Neudecker</a:t>
-            </a:r>
-          </a:p>
-          <a:p>
-            <a:r>
-              <a:rPr lang="de-DE" dirty="0">
-                <a:solidFill>
-                  <a:schemeClr val="tx1">
-                    <a:lumMod val="50000"/>
-                    <a:lumOff val="50000"/>
-                  </a:schemeClr>
-                </a:solidFill>
-              </a:rPr>
-              <a:t>Design by Technology | Industrialdesign</a:t>
-            </a:r>
-          </a:p>
-          <a:p>
-            <a:r>
-              <a:rPr lang="de-DE" dirty="0">
-                <a:solidFill>
-                  <a:schemeClr val="tx1">
-                    <a:lumMod val="50000"/>
-                    <a:lumOff val="50000"/>
-                  </a:schemeClr>
-                </a:solidFill>
-              </a:rPr>
-              <a:t>Sommersemester 2025, Folkwang Universität der Künste</a:t>
-            </a:r>
-            <a:endParaRPr lang="de-CH" dirty="0">
-              <a:solidFill>
-                <a:schemeClr val="tx1">
-                  <a:lumMod val="50000"/>
-                  <a:lumOff val="50000"/>
-                </a:schemeClr>
-              </a:solidFill>
-            </a:endParaRPr>
-          </a:p>
-        </p:txBody>
-      </p:sp>
-      <p:sp>
-        <p:nvSpPr>
-          <p:cNvPr id="7" name="Textplatzhalter 8">
-            <a:extLst>
-              <a:ext uri="{FF2B5EF4-FFF2-40B4-BE49-F238E27FC236}">
-                <a16:creationId xmlns:a16="http://schemas.microsoft.com/office/drawing/2014/main" id="{C6B18E6F-BDD9-4B0B-9B9E-C25187E0E1F2}"/>
-              </a:ext>
-            </a:extLst>
-          </p:cNvPr>
-          <p:cNvSpPr>
-            <a:spLocks noGrp="1"/>
-          </p:cNvSpPr>
-          <p:nvPr>
-            <p:ph type="body" sz="quarter" idx="4294967295"/>
-          </p:nvPr>
-        </p:nvSpPr>
-        <p:spPr>
-          <a:xfrm>
-            <a:off x="6211614" y="316800"/>
-            <a:ext cx="5248549" cy="360000"/>
-          </a:xfrm>
-        </p:spPr>
+            <a:pPr marL="95250"/>
+            <a:fld id="{4A358CF3-A22A-46C1-A4E5-5810212466EF}" type="datetime1">
+              <a:rPr lang="de-CH" smtClean="0"/>
+              <a:pPr marL="95250"/>
+              <a:t>15.04.26</a:t>
+            </a:fld>
+            <a:endParaRPr lang="de-CH" sz="1000" dirty="0"/>
+          </a:p>
+        </p:txBody>
+      </p:sp>
+      <p:sp>
+        <p:nvSpPr>
+          <p:cNvPr id="5" name="Foliennummernplatzhalter 4">
+            <a:extLst>
+              <a:ext uri="{FF2B5EF4-FFF2-40B4-BE49-F238E27FC236}">
+                <a16:creationId xmlns:a16="http://schemas.microsoft.com/office/drawing/2014/main" id="{05F67C01-52BE-B1D6-863E-E87A32A9296E}"/>
+              </a:ext>
+            </a:extLst>
+          </p:cNvPr>
+          <p:cNvSpPr>
+            <a:spLocks noGrp="1"/>
+          </p:cNvSpPr>
+          <p:nvPr>
+            <p:ph type="sldNum" sz="quarter" idx="4"/>
+          </p:nvPr>
+        </p:nvSpPr>
+        <p:spPr/>
         <p:txBody>
           <a:bodyPr/>
           <a:lstStyle/>
           <a:p>
-            <a:pPr marL="0" indent="0" algn="r">
-              <a:buNone/>
-            </a:pPr>
-            <a:r>
-              <a:rPr lang="de-DE" dirty="0"/>
-              <a:t xml:space="preserve">Design </a:t>
-            </a:r>
-            <a:r>
-              <a:rPr lang="de-DE" dirty="0" err="1"/>
-              <a:t>by</a:t>
-            </a:r>
-            <a:r>
-              <a:rPr lang="de-DE" dirty="0"/>
-              <a:t xml:space="preserve"> Technology</a:t>
-            </a:r>
-            <a:endParaRPr lang="de-CH" dirty="0"/>
+            <a:fld id="{5ACA52AF-F19D-405C-AD5F-7D94B96A5CC3}" type="slidenum">
+              <a:rPr lang="de-CH" smtClean="0"/>
+              <a:pPr/>
+              <a:t>3</a:t>
+            </a:fld>
+            <a:endParaRPr lang="de-CH" sz="1000" dirty="0"/>
           </a:p>
         </p:txBody>
       </p:sp>
     </p:spTree>
     <p:extLst>
       <p:ext uri="{BB962C8B-B14F-4D97-AF65-F5344CB8AC3E}">
-        <p14:creationId xmlns:p14="http://schemas.microsoft.com/office/powerpoint/2010/main" val="3782702085"/>
+        <p14:creationId xmlns:p14="http://schemas.microsoft.com/office/powerpoint/2010/main" val="2465593533"/>
       </p:ext>
     </p:extLst>
   </p:cSld>
@@ -21259,7 +23180,7 @@
 </p:sld>
 </file>
 
-<file path=ppt/slides/slide35.xml><?xml version="1.0" encoding="utf-8"?>
+<file path=ppt/slides/slide4.xml><?xml version="1.0" encoding="utf-8"?>
 <p:sld xmlns:a="http://schemas.openxmlformats.org/drawingml/2006/main" xmlns:r="http://schemas.openxmlformats.org/officeDocument/2006/relationships" xmlns:p="http://schemas.openxmlformats.org/presentationml/2006/main">
   <p:cSld>
     <p:spTree>
@@ -21281,7 +23202,7 @@
           <p:cNvPr id="2" name="Titel 1">
             <a:extLst>
               <a:ext uri="{FF2B5EF4-FFF2-40B4-BE49-F238E27FC236}">
-                <a16:creationId xmlns:a16="http://schemas.microsoft.com/office/drawing/2014/main" id="{9FF31ECF-EF04-4AAA-9A8E-583E3D217F33}"/>
+                <a16:creationId xmlns:a16="http://schemas.microsoft.com/office/drawing/2014/main" id="{DA757BF2-5EC6-42D6-9F04-4237E99FD6E5}"/>
               </a:ext>
             </a:extLst>
           </p:cNvPr>
@@ -21299,175 +23220,87 @@
           <a:p>
             <a:r>
               <a:rPr lang="de-DE" dirty="0"/>
-              <a:t>Warum verändert sich Entwicklung gerade jetzt?</a:t>
-            </a:r>
-            <a:endParaRPr lang="de-CH" dirty="0"/>
-          </a:p>
-        </p:txBody>
-      </p:sp>
-      <p:sp>
-        <p:nvSpPr>
-          <p:cNvPr id="3" name="Inhaltsplatzhalter 2">
-            <a:extLst>
-              <a:ext uri="{FF2B5EF4-FFF2-40B4-BE49-F238E27FC236}">
-                <a16:creationId xmlns:a16="http://schemas.microsoft.com/office/drawing/2014/main" id="{9EE0A683-618F-4D75-846F-0DB536B4E502}"/>
-              </a:ext>
-            </a:extLst>
-          </p:cNvPr>
-          <p:cNvSpPr>
-            <a:spLocks noGrp="1"/>
-          </p:cNvSpPr>
-          <p:nvPr>
-            <p:ph idx="1"/>
-          </p:nvPr>
-        </p:nvSpPr>
-        <p:spPr/>
+              <a:t>01</a:t>
+            </a:r>
+            <a:br>
+              <a:rPr lang="de-DE" dirty="0"/>
+            </a:br>
+            <a:r>
+              <a:rPr lang="de-DE" dirty="0"/>
+              <a:t>Der Paradigmenwechsel</a:t>
+            </a:r>
+          </a:p>
+        </p:txBody>
+      </p:sp>
+      <p:sp>
+        <p:nvSpPr>
+          <p:cNvPr id="4" name="Fußzeilenplatzhalter 3">
+            <a:extLst>
+              <a:ext uri="{FF2B5EF4-FFF2-40B4-BE49-F238E27FC236}">
+                <a16:creationId xmlns:a16="http://schemas.microsoft.com/office/drawing/2014/main" id="{9DDD7CFF-BF36-47E4-8302-EBC181BD33D4}"/>
+              </a:ext>
+            </a:extLst>
+          </p:cNvPr>
+          <p:cNvSpPr>
+            <a:spLocks noGrp="1"/>
+          </p:cNvSpPr>
+          <p:nvPr>
+            <p:ph type="ftr" sz="quarter" idx="3"/>
+          </p:nvPr>
+        </p:nvSpPr>
+        <p:spPr>
+          <a:xfrm>
+            <a:off x="2100838" y="6522444"/>
+            <a:ext cx="4038600" cy="215999"/>
+          </a:xfrm>
+        </p:spPr>
         <p:txBody>
           <a:bodyPr/>
           <a:lstStyle/>
           <a:p>
-            <a:pPr marL="0" indent="0">
-              <a:buNone/>
-            </a:pPr>
-            <a:r>
-              <a:rPr lang="de-DE" b="1" dirty="0"/>
-              <a:t>Von “Code schreiben” zu “Ideen beschreiben”</a:t>
-            </a:r>
-          </a:p>
-          <a:p>
-            <a:pPr marL="0" indent="0">
-              <a:buNone/>
-            </a:pPr>
             <a:r>
               <a:rPr lang="de-DE" dirty="0"/>
-              <a:t>Interaktive Systeme entstanden lange durch Handwerk: Sensor anschließen, Bibliotheken</a:t>
-            </a:r>
-          </a:p>
-          <a:p>
-            <a:pPr marL="0" indent="0">
-              <a:buNone/>
-            </a:pPr>
+              <a:t>Design </a:t>
+            </a:r>
+            <a:r>
+              <a:rPr lang="de-DE" dirty="0" err="1"/>
+              <a:t>by</a:t>
+            </a:r>
             <a:r>
               <a:rPr lang="de-DE" dirty="0"/>
-              <a:t>verstehen, Code schreiben, debuggen — und das für jede Idee von Neuem.</a:t>
-            </a:r>
-          </a:p>
-          <a:p>
-            <a:pPr marL="0" indent="0">
-              <a:buNone/>
-            </a:pPr>
-            <a:r>
-              <a:rPr lang="de-DE" dirty="0"/>
-              <a:t/>
-            </a:r>
-          </a:p>
-          <a:p>
-            <a:pPr marL="0" indent="0">
-              <a:buNone/>
-            </a:pPr>
-            <a:r>
-              <a:rPr lang="de-DE" dirty="0"/>
-              <a:t>Generative KI verändert dieses Modell grundlegend: Sie übernimmt die technische</a:t>
-            </a:r>
-          </a:p>
-          <a:p>
-            <a:pPr marL="0" indent="0">
-              <a:buNone/>
-            </a:pPr>
-            <a:r>
-              <a:rPr lang="de-DE" dirty="0"/>
-              <a:t>Übersetzungsarbeit. Die kreative Frage bleibt beim Menschen.</a:t>
-            </a:r>
-          </a:p>
-          <a:p>
-            <a:pPr marL="0" indent="0">
-              <a:buNone/>
-            </a:pPr>
-            <a:r>
-              <a:rPr lang="de-DE" dirty="0"/>
-              <a:t/>
-            </a:r>
-          </a:p>
-          <a:p>
-            <a:pPr marL="0" indent="0">
-              <a:buNone/>
-            </a:pPr>
-            <a:r>
-              <a:rPr lang="de-DE" dirty="0"/>
-              <a:t>Nicht mehr “Wie schreibe ich das?” — sondern “Was will ich eigentlich erreichen?”</a:t>
-            </a:r>
-          </a:p>
-        </p:txBody>
-      </p:sp>
-      <p:sp>
-        <p:nvSpPr>
-          <p:cNvPr id="5" name="Fußzeilenplatzhalter 4">
-            <a:extLst>
-              <a:ext uri="{FF2B5EF4-FFF2-40B4-BE49-F238E27FC236}">
-                <a16:creationId xmlns:a16="http://schemas.microsoft.com/office/drawing/2014/main" id="{572B1E5F-FA5D-4B47-A43F-C570AFE8C6D3}"/>
-              </a:ext>
-            </a:extLst>
-          </p:cNvPr>
-          <p:cNvSpPr>
-            <a:spLocks noGrp="1"/>
-          </p:cNvSpPr>
-          <p:nvPr>
-            <p:ph type="ftr" sz="quarter" idx="3"/>
-          </p:nvPr>
-        </p:nvSpPr>
-        <p:spPr>
-          <a:xfrm>
-            <a:off x="2550014" y="6522444"/>
-            <a:ext cx="4038600" cy="215999"/>
+              <a:t> Technology</a:t>
+            </a:r>
+            <a:endParaRPr lang="de-CH" dirty="0"/>
+          </a:p>
+        </p:txBody>
+      </p:sp>
+      <p:sp>
+        <p:nvSpPr>
+          <p:cNvPr id="3" name="Datumsplatzhalter 2">
+            <a:extLst>
+              <a:ext uri="{FF2B5EF4-FFF2-40B4-BE49-F238E27FC236}">
+                <a16:creationId xmlns:a16="http://schemas.microsoft.com/office/drawing/2014/main" id="{4DEEA281-37DD-45CF-AABF-2BFEAD6C860F}"/>
+              </a:ext>
+            </a:extLst>
+          </p:cNvPr>
+          <p:cNvSpPr>
+            <a:spLocks noGrp="1"/>
+          </p:cNvSpPr>
+          <p:nvPr>
+            <p:ph type="dt" sz="half" idx="2"/>
+          </p:nvPr>
+        </p:nvSpPr>
+        <p:spPr>
+          <a:xfrm>
+            <a:off x="10328132" y="6522442"/>
+            <a:ext cx="789039" cy="216001"/>
           </a:xfrm>
         </p:spPr>
         <p:txBody>
           <a:bodyPr/>
           <a:lstStyle/>
           <a:p>
-            <a:r>
-              <a:rPr lang="de-DE" dirty="0"/>
-              <a:t xml:space="preserve">Design </a:t>
-            </a:r>
-            <a:r>
-              <a:rPr lang="de-DE" dirty="0" err="1"/>
-              <a:t>by</a:t>
-            </a:r>
-            <a:r>
-              <a:rPr lang="de-DE" dirty="0"/>
-              <a:t xml:space="preserve"> Technology</a:t>
-            </a:r>
-            <a:endParaRPr lang="de-CH" dirty="0"/>
-          </a:p>
-        </p:txBody>
-      </p:sp>
-      <p:sp>
-        <p:nvSpPr>
-          <p:cNvPr id="4" name="Datumsplatzhalter 3">
-            <a:extLst>
-              <a:ext uri="{FF2B5EF4-FFF2-40B4-BE49-F238E27FC236}">
-                <a16:creationId xmlns:a16="http://schemas.microsoft.com/office/drawing/2014/main" id="{44DAA5A3-8CEF-4027-9289-B60138CD16A2}"/>
-              </a:ext>
-            </a:extLst>
-          </p:cNvPr>
-          <p:cNvSpPr>
-            <a:spLocks noGrp="1"/>
-          </p:cNvSpPr>
-          <p:nvPr>
-            <p:ph type="dt" sz="half" idx="2"/>
-          </p:nvPr>
-        </p:nvSpPr>
-        <p:spPr>
-          <a:xfrm>
-            <a:off x="10328132" y="6522442"/>
-            <a:ext cx="789039" cy="216001"/>
-          </a:xfrm>
-        </p:spPr>
-        <p:txBody>
-          <a:bodyPr/>
-          <a:lstStyle/>
-          <a:p>
-            <a:fld id="{8D93BFA6-70D2-4653-B5CB-D3376F3BFAE7}" type="datetime1">
+            <a:fld id="{43402617-726E-42A6-AC19-79D267EAC7EE}" type="datetime1">
               <a:rPr lang="de-CH" noProof="0" smtClean="0"/>
               <a:t>13.04.26</a:t>
             </a:fld>
@@ -21477,10 +23310,10 @@
       </p:sp>
       <p:sp>
         <p:nvSpPr>
-          <p:cNvPr id="6" name="Foliennummernplatzhalter 5">
-            <a:extLst>
-              <a:ext uri="{FF2B5EF4-FFF2-40B4-BE49-F238E27FC236}">
-                <a16:creationId xmlns:a16="http://schemas.microsoft.com/office/drawing/2014/main" id="{5C9B1E27-9E06-4598-A6EF-3BCBC8D0152F}"/>
+          <p:cNvPr id="5" name="Foliennummernplatzhalter 4">
+            <a:extLst>
+              <a:ext uri="{FF2B5EF4-FFF2-40B4-BE49-F238E27FC236}">
+                <a16:creationId xmlns:a16="http://schemas.microsoft.com/office/drawing/2014/main" id="{3DB16F61-62BA-4FA3-89CE-2F599E6DE0EF}"/>
               </a:ext>
             </a:extLst>
           </p:cNvPr>
@@ -21503,7 +23336,8 @@
           <a:p>
             <a:fld id="{5ACA52AF-F19D-405C-AD5F-7D94B96A5CC3}" type="slidenum">
               <a:rPr lang="de-CH" noProof="0" smtClean="0"/>
-              <a:t>8</a:t>
+              <a:pPr/>
+              <a:t>4</a:t>
             </a:fld>
             <a:endParaRPr lang="de-CH" noProof="0"/>
           </a:p>
@@ -21512,7 +23346,7 @@
     </p:spTree>
     <p:extLst>
       <p:ext uri="{BB962C8B-B14F-4D97-AF65-F5344CB8AC3E}">
-        <p14:creationId xmlns:p14="http://schemas.microsoft.com/office/powerpoint/2010/main" val="294303585"/>
+        <p14:creationId xmlns:p14="http://schemas.microsoft.com/office/powerpoint/2010/main" val="766234280"/>
       </p:ext>
     </p:extLst>
   </p:cSld>
@@ -21522,7 +23356,7 @@
 </p:sld>
 </file>
 
-<file path=ppt/slides/slide36.xml><?xml version="1.0" encoding="utf-8"?>
+<file path=ppt/slides/slide5.xml><?xml version="1.0" encoding="utf-8"?>
 <p:sld xmlns:a="http://schemas.openxmlformats.org/drawingml/2006/main" xmlns:r="http://schemas.openxmlformats.org/officeDocument/2006/relationships" xmlns:p="http://schemas.openxmlformats.org/presentationml/2006/main">
   <p:cSld>
     <p:spTree>
@@ -21562,7 +23396,7 @@
           <a:p>
             <a:r>
               <a:rPr lang="de-DE" dirty="0"/>
-              <a:t>Post-Code: KI als Entwicklungspartner</a:t>
+              <a:t>Warum verändert sich Entwicklung gerade jetzt?</a:t>
             </a:r>
             <a:endParaRPr lang="de-CH" dirty="0"/>
           </a:p>
@@ -21594,7 +23428,7 @@
             </a:pPr>
             <a:r>
               <a:rPr lang="de-DE" b="1" dirty="0"/>
-              <a:t>Das Paradigma des beschreibenden Entwickelns</a:t>
+              <a:t>Von “Code schreiben” zu “Ideen beschreiben”</a:t>
             </a:r>
           </a:p>
           <a:p>
@@ -21603,7 +23437,7 @@
             </a:pPr>
             <a:r>
               <a:rPr lang="de-DE" dirty="0"/>
-              <a:t>“Post-Code” beschreibt eine Arbeitsweise, in der Ideen in natürlicher Sprache</a:t>
+              <a:t>Interaktive Systeme entstanden lange durch Handwerk: Sensor anschließen, Bibliotheken</a:t>
             </a:r>
           </a:p>
           <a:p>
@@ -21612,16 +23446,22 @@
             </a:pPr>
             <a:r>
               <a:rPr lang="de-DE" dirty="0"/>
-              <a:t>formuliert werden — und KI-Systeme die Übersetzung in lauffähigen Code übernehmen.</a:t>
+              <a:t>verstehen, Code schreiben, debuggen — und das für jede Idee von Neuem.</a:t>
             </a:r>
           </a:p>
           <a:p>
             <a:pPr marL="0" indent="0">
               <a:buNone/>
             </a:pPr>
+            <a:endParaRPr lang="de-DE" dirty="0"/>
+          </a:p>
+          <a:p>
+            <a:pPr marL="0" indent="0">
+              <a:buNone/>
+            </a:pPr>
             <a:r>
               <a:rPr lang="de-DE" dirty="0"/>
-              <a:t/>
+              <a:t>Generative KI verändert dieses Modell grundlegend: Sie übernimmt die technische</a:t>
             </a:r>
           </a:p>
           <a:p>
@@ -21630,43 +23470,22 @@
             </a:pPr>
             <a:r>
               <a:rPr lang="de-DE" dirty="0"/>
-              <a:t>Das bedeutet nicht, dass Programmierung irrelevant wird. Es bedeutet, dass der Einstieg</a:t>
+              <a:t>Übersetzungsarbeit. Die kreative Frage bleibt beim Menschen.</a:t>
             </a:r>
           </a:p>
           <a:p>
             <a:pPr marL="0" indent="0">
               <a:buNone/>
             </a:pPr>
+            <a:endParaRPr lang="de-DE" dirty="0"/>
+          </a:p>
+          <a:p>
+            <a:pPr marL="0" indent="0">
+              <a:buNone/>
+            </a:pPr>
             <a:r>
               <a:rPr lang="de-DE" dirty="0"/>
-              <a:t>niedriger wird und der kreative Fokus an anderer Stelle liegt.</a:t>
-            </a:r>
-          </a:p>
-          <a:p>
-            <a:pPr marL="0" indent="0">
-              <a:buNone/>
-            </a:pPr>
-            <a:r>
-              <a:rPr lang="de-DE" dirty="0"/>
-              <a:t/>
-            </a:r>
-          </a:p>
-          <a:p>
-            <a:pPr marL="0" indent="0">
-              <a:buNone/>
-            </a:pPr>
-            <a:r>
-              <a:rPr lang="de-DE" dirty="0"/>
-              <a:t>Vergleichbar mit dem Übergang von Handlettering zu Schriftsatz — oder von</a:t>
-            </a:r>
-          </a:p>
-          <a:p>
-            <a:pPr marL="0" indent="0">
-              <a:buNone/>
-            </a:pPr>
-            <a:r>
-              <a:rPr lang="de-DE" dirty="0"/>
-              <a:t>Dunkelkammer zu Lightroom.</a:t>
+              <a:t>Nicht mehr “Wie schreibe ich das?” — sondern “Was will ich eigentlich erreichen?”</a:t>
             </a:r>
           </a:p>
         </p:txBody>
@@ -21699,7 +23518,7 @@
           <a:p>
             <a:r>
               <a:rPr lang="de-DE" dirty="0"/>
-              <a:t xml:space="preserve">Design </a:t>
+              <a:t>Design </a:t>
             </a:r>
             <a:r>
               <a:rPr lang="de-DE" dirty="0" err="1"/>
@@ -21707,7 +23526,7 @@
             </a:r>
             <a:r>
               <a:rPr lang="de-DE" dirty="0"/>
-              <a:t xml:space="preserve"> Technology</a:t>
+              <a:t> Technology</a:t>
             </a:r>
             <a:endParaRPr lang="de-CH" dirty="0"/>
           </a:p>
@@ -21775,7 +23594,7 @@
           <a:p>
             <a:fld id="{5ACA52AF-F19D-405C-AD5F-7D94B96A5CC3}" type="slidenum">
               <a:rPr lang="de-CH" noProof="0" smtClean="0"/>
-              <a:t>8</a:t>
+              <a:t>5</a:t>
             </a:fld>
             <a:endParaRPr lang="de-CH" noProof="0"/>
           </a:p>
@@ -21785,2139 +23604,6 @@
     <p:extLst>
       <p:ext uri="{BB962C8B-B14F-4D97-AF65-F5344CB8AC3E}">
         <p14:creationId xmlns:p14="http://schemas.microsoft.com/office/powerpoint/2010/main" val="294303585"/>
-      </p:ext>
-    </p:extLst>
-  </p:cSld>
-  <p:clrMapOvr>
-    <a:masterClrMapping/>
-  </p:clrMapOvr>
-</p:sld>
-</file>
-
-<file path=ppt/slides/slide37.xml><?xml version="1.0" encoding="utf-8"?>
-<p:sld xmlns:a="http://schemas.openxmlformats.org/drawingml/2006/main" xmlns:r="http://schemas.openxmlformats.org/officeDocument/2006/relationships" xmlns:p="http://schemas.openxmlformats.org/presentationml/2006/main">
-  <p:cSld>
-    <p:spTree>
-      <p:nvGrpSpPr>
-        <p:cNvPr id="1" name=""/>
-        <p:cNvGrpSpPr/>
-        <p:nvPr/>
-      </p:nvGrpSpPr>
-      <p:grpSpPr>
-        <a:xfrm>
-          <a:off x="0" y="0"/>
-          <a:ext cx="0" cy="0"/>
-          <a:chOff x="0" y="0"/>
-          <a:chExt cx="0" cy="0"/>
-        </a:xfrm>
-      </p:grpSpPr>
-      <p:sp>
-        <p:nvSpPr>
-          <p:cNvPr id="2" name="Titel 1">
-            <a:extLst>
-              <a:ext uri="{FF2B5EF4-FFF2-40B4-BE49-F238E27FC236}">
-                <a16:creationId xmlns:a16="http://schemas.microsoft.com/office/drawing/2014/main" id="{9FF31ECF-EF04-4AAA-9A8E-583E3D217F33}"/>
-              </a:ext>
-            </a:extLst>
-          </p:cNvPr>
-          <p:cNvSpPr>
-            <a:spLocks noGrp="1"/>
-          </p:cNvSpPr>
-          <p:nvPr>
-            <p:ph type="title"/>
-          </p:nvPr>
-        </p:nvSpPr>
-        <p:spPr/>
-        <p:txBody>
-          <a:bodyPr/>
-          <a:lstStyle/>
-          <a:p>
-            <a:r>
-              <a:rPr lang="de-DE" dirty="0"/>
-              <a:t>Embodied AI: Wenn KI den Raum betritt</a:t>
-            </a:r>
-            <a:endParaRPr lang="de-CH" dirty="0"/>
-          </a:p>
-        </p:txBody>
-      </p:sp>
-      <p:sp>
-        <p:nvSpPr>
-          <p:cNvPr id="3" name="Inhaltsplatzhalter 2">
-            <a:extLst>
-              <a:ext uri="{FF2B5EF4-FFF2-40B4-BE49-F238E27FC236}">
-                <a16:creationId xmlns:a16="http://schemas.microsoft.com/office/drawing/2014/main" id="{9EE0A683-618F-4D75-846F-0DB536B4E502}"/>
-              </a:ext>
-            </a:extLst>
-          </p:cNvPr>
-          <p:cNvSpPr>
-            <a:spLocks noGrp="1"/>
-          </p:cNvSpPr>
-          <p:nvPr>
-            <p:ph idx="1"/>
-          </p:nvPr>
-        </p:nvSpPr>
-        <p:spPr/>
-        <p:txBody>
-          <a:bodyPr/>
-          <a:lstStyle/>
-          <a:p>
-            <a:pPr marL="0" indent="0">
-              <a:buNone/>
-            </a:pPr>
-            <a:r>
-              <a:rPr lang="de-DE" b="1" dirty="0"/>
-              <a:t>Physical Computing als künstlerisches Medium</a:t>
-            </a:r>
-          </a:p>
-          <a:p>
-            <a:pPr marL="0" indent="0">
-              <a:buNone/>
-            </a:pPr>
-            <a:r>
-              <a:rPr lang="de-DE" dirty="0"/>
-              <a:t>Physical Computing verbindet digitale Logik mit physischer Welt: Sensoren lesen Bewegung,</a:t>
-            </a:r>
-          </a:p>
-          <a:p>
-            <a:pPr marL="0" indent="0">
-              <a:buNone/>
-            </a:pPr>
-            <a:r>
-              <a:rPr lang="de-DE" dirty="0"/>
-              <a:t>Licht, Gesten — Aktoren reagieren mit Sound, Licht, Mechanik.</a:t>
-            </a:r>
-          </a:p>
-          <a:p>
-            <a:pPr marL="0" indent="0">
-              <a:buNone/>
-            </a:pPr>
-            <a:r>
-              <a:rPr lang="de-DE" dirty="0"/>
-              <a:t/>
-            </a:r>
-          </a:p>
-          <a:p>
-            <a:pPr marL="0" indent="0">
-              <a:buNone/>
-            </a:pPr>
-            <a:r>
-              <a:rPr lang="de-DE" dirty="0"/>
-              <a:t>KI macht dieses Medium heute für Künstler:innen ohne Programmierhintergrund zugänglich.</a:t>
-            </a:r>
-          </a:p>
-          <a:p>
-            <a:pPr marL="0" indent="0">
-              <a:buNone/>
-            </a:pPr>
-            <a:r>
-              <a:rPr lang="de-DE" dirty="0"/>
-              <a:t/>
-            </a:r>
-          </a:p>
-          <a:p>
-            <a:pPr marL="0" indent="0">
-              <a:buNone/>
-            </a:pPr>
-            <a:r>
-              <a:rPr lang="de-DE" dirty="0"/>
-              <a:t>Die Fragen bleiben: Was soll das Objekt wahrnehmen? Wie soll es reagieren?</a:t>
-            </a:r>
-          </a:p>
-          <a:p>
-            <a:pPr marL="0" indent="0">
-              <a:buNone/>
-            </a:pPr>
-            <a:r>
-              <a:rPr lang="de-DE" dirty="0"/>
-              <a:t>Welche Interaktion entsteht? KI unterstützt bei der technischen Umsetzung dieser Fragen.</a:t>
-            </a:r>
-          </a:p>
-        </p:txBody>
-      </p:sp>
-      <p:sp>
-        <p:nvSpPr>
-          <p:cNvPr id="5" name="Fußzeilenplatzhalter 4">
-            <a:extLst>
-              <a:ext uri="{FF2B5EF4-FFF2-40B4-BE49-F238E27FC236}">
-                <a16:creationId xmlns:a16="http://schemas.microsoft.com/office/drawing/2014/main" id="{572B1E5F-FA5D-4B47-A43F-C570AFE8C6D3}"/>
-              </a:ext>
-            </a:extLst>
-          </p:cNvPr>
-          <p:cNvSpPr>
-            <a:spLocks noGrp="1"/>
-          </p:cNvSpPr>
-          <p:nvPr>
-            <p:ph type="ftr" sz="quarter" idx="3"/>
-          </p:nvPr>
-        </p:nvSpPr>
-        <p:spPr>
-          <a:xfrm>
-            <a:off x="2550014" y="6522444"/>
-            <a:ext cx="4038600" cy="215999"/>
-          </a:xfrm>
-        </p:spPr>
-        <p:txBody>
-          <a:bodyPr/>
-          <a:lstStyle/>
-          <a:p>
-            <a:r>
-              <a:rPr lang="de-DE" dirty="0"/>
-              <a:t xml:space="preserve">Design </a:t>
-            </a:r>
-            <a:r>
-              <a:rPr lang="de-DE" dirty="0" err="1"/>
-              <a:t>by</a:t>
-            </a:r>
-            <a:r>
-              <a:rPr lang="de-DE" dirty="0"/>
-              <a:t xml:space="preserve"> Technology</a:t>
-            </a:r>
-            <a:endParaRPr lang="de-CH" dirty="0"/>
-          </a:p>
-        </p:txBody>
-      </p:sp>
-      <p:sp>
-        <p:nvSpPr>
-          <p:cNvPr id="4" name="Datumsplatzhalter 3">
-            <a:extLst>
-              <a:ext uri="{FF2B5EF4-FFF2-40B4-BE49-F238E27FC236}">
-                <a16:creationId xmlns:a16="http://schemas.microsoft.com/office/drawing/2014/main" id="{44DAA5A3-8CEF-4027-9289-B60138CD16A2}"/>
-              </a:ext>
-            </a:extLst>
-          </p:cNvPr>
-          <p:cNvSpPr>
-            <a:spLocks noGrp="1"/>
-          </p:cNvSpPr>
-          <p:nvPr>
-            <p:ph type="dt" sz="half" idx="2"/>
-          </p:nvPr>
-        </p:nvSpPr>
-        <p:spPr>
-          <a:xfrm>
-            <a:off x="10328132" y="6522442"/>
-            <a:ext cx="789039" cy="216001"/>
-          </a:xfrm>
-        </p:spPr>
-        <p:txBody>
-          <a:bodyPr/>
-          <a:lstStyle/>
-          <a:p>
-            <a:fld id="{8D93BFA6-70D2-4653-B5CB-D3376F3BFAE7}" type="datetime1">
-              <a:rPr lang="de-CH" noProof="0" smtClean="0"/>
-              <a:t>13.04.26</a:t>
-            </a:fld>
-            <a:endParaRPr lang="de-CH" noProof="0"/>
-          </a:p>
-        </p:txBody>
-      </p:sp>
-      <p:sp>
-        <p:nvSpPr>
-          <p:cNvPr id="6" name="Foliennummernplatzhalter 5">
-            <a:extLst>
-              <a:ext uri="{FF2B5EF4-FFF2-40B4-BE49-F238E27FC236}">
-                <a16:creationId xmlns:a16="http://schemas.microsoft.com/office/drawing/2014/main" id="{5C9B1E27-9E06-4598-A6EF-3BCBC8D0152F}"/>
-              </a:ext>
-            </a:extLst>
-          </p:cNvPr>
-          <p:cNvSpPr>
-            <a:spLocks noGrp="1"/>
-          </p:cNvSpPr>
-          <p:nvPr>
-            <p:ph type="sldNum" sz="quarter" idx="4"/>
-          </p:nvPr>
-        </p:nvSpPr>
-        <p:spPr>
-          <a:xfrm>
-            <a:off x="11137585" y="6522444"/>
-            <a:ext cx="322577" cy="216000"/>
-          </a:xfrm>
-        </p:spPr>
-        <p:txBody>
-          <a:bodyPr/>
-          <a:lstStyle/>
-          <a:p>
-            <a:fld id="{5ACA52AF-F19D-405C-AD5F-7D94B96A5CC3}" type="slidenum">
-              <a:rPr lang="de-CH" noProof="0" smtClean="0"/>
-              <a:t>8</a:t>
-            </a:fld>
-            <a:endParaRPr lang="de-CH" noProof="0"/>
-          </a:p>
-        </p:txBody>
-      </p:sp>
-    </p:spTree>
-    <p:extLst>
-      <p:ext uri="{BB962C8B-B14F-4D97-AF65-F5344CB8AC3E}">
-        <p14:creationId xmlns:p14="http://schemas.microsoft.com/office/powerpoint/2010/main" val="294303585"/>
-      </p:ext>
-    </p:extLst>
-  </p:cSld>
-  <p:clrMapOvr>
-    <a:masterClrMapping/>
-  </p:clrMapOvr>
-</p:sld>
-</file>
-
-<file path=ppt/slides/slide38.xml><?xml version="1.0" encoding="utf-8"?>
-<p:sld xmlns:a="http://schemas.openxmlformats.org/drawingml/2006/main" xmlns:r="http://schemas.openxmlformats.org/officeDocument/2006/relationships" xmlns:p="http://schemas.openxmlformats.org/presentationml/2006/main">
-  <p:cSld>
-    <p:spTree>
-      <p:nvGrpSpPr>
-        <p:cNvPr id="1" name=""/>
-        <p:cNvGrpSpPr/>
-        <p:nvPr/>
-      </p:nvGrpSpPr>
-      <p:grpSpPr>
-        <a:xfrm>
-          <a:off x="0" y="0"/>
-          <a:ext cx="0" cy="0"/>
-          <a:chOff x="0" y="0"/>
-          <a:chExt cx="0" cy="0"/>
-        </a:xfrm>
-      </p:grpSpPr>
-      <p:sp>
-        <p:nvSpPr>
-          <p:cNvPr id="2" name="Titel 1">
-            <a:extLst>
-              <a:ext uri="{FF2B5EF4-FFF2-40B4-BE49-F238E27FC236}">
-                <a16:creationId xmlns:a16="http://schemas.microsoft.com/office/drawing/2014/main" id="{9FF31ECF-EF04-4AAA-9A8E-583E3D217F33}"/>
-              </a:ext>
-            </a:extLst>
-          </p:cNvPr>
-          <p:cNvSpPr>
-            <a:spLocks noGrp="1"/>
-          </p:cNvSpPr>
-          <p:nvPr>
-            <p:ph type="title"/>
-          </p:nvPr>
-        </p:nvSpPr>
-        <p:spPr/>
-        <p:txBody>
-          <a:bodyPr/>
-          <a:lstStyle/>
-          <a:p>
-            <a:r>
-              <a:rPr lang="de-DE" dirty="0"/>
-              <a:t>PairLink: Das Wertmodell</a:t>
-            </a:r>
-            <a:endParaRPr lang="de-CH" dirty="0"/>
-          </a:p>
-        </p:txBody>
-      </p:sp>
-      <p:sp>
-        <p:nvSpPr>
-          <p:cNvPr id="3" name="Inhaltsplatzhalter 2">
-            <a:extLst>
-              <a:ext uri="{FF2B5EF4-FFF2-40B4-BE49-F238E27FC236}">
-                <a16:creationId xmlns:a16="http://schemas.microsoft.com/office/drawing/2014/main" id="{9EE0A683-618F-4D75-846F-0DB536B4E502}"/>
-              </a:ext>
-            </a:extLst>
-          </p:cNvPr>
-          <p:cNvSpPr>
-            <a:spLocks noGrp="1"/>
-          </p:cNvSpPr>
-          <p:nvPr>
-            <p:ph idx="1"/>
-          </p:nvPr>
-        </p:nvSpPr>
-        <p:spPr/>
-        <p:txBody>
-          <a:bodyPr/>
-          <a:lstStyle/>
-          <a:p>
-            <a:pPr marL="0" indent="0">
-              <a:buNone/>
-            </a:pPr>
-            <a:r>
-              <a:rPr lang="de-DE" b="1" dirty="0"/>
-              <a:t>Sensor → 0.0 bis 1.0 → Aktor</a:t>
-            </a:r>
-          </a:p>
-          <a:p>
-            <a:pPr marL="0" indent="0">
-              <a:buNone/>
-            </a:pPr>
-            <a:r>
-              <a:rPr lang="de-DE" dirty="0"/>
-              <a:t>PairLink ist eine WebSocket-Bibliothek für den ESP32. Sie ermöglicht die bidirektionale</a:t>
-            </a:r>
-          </a:p>
-          <a:p>
-            <a:pPr marL="0" indent="0">
-              <a:buNone/>
-            </a:pPr>
-            <a:r>
-              <a:rPr lang="de-DE" dirty="0"/>
-              <a:t>Übertragung von Werten zwischen Controller und Anwendung über ein lokales Netzwerk.</a:t>
-            </a:r>
-          </a:p>
-          <a:p>
-            <a:pPr marL="0" indent="0">
-              <a:buNone/>
-            </a:pPr>
-            <a:r>
-              <a:rPr lang="de-DE" dirty="0"/>
-              <a:t/>
-            </a:r>
-          </a:p>
-          <a:p>
-            <a:pPr marL="0" indent="0">
-              <a:buNone/>
-            </a:pPr>
-            <a:r>
-              <a:rPr lang="de-DE" dirty="0"/>
-              <a:t>Alle Sensorwerte werden auf einen einzigen Kanal normiert: sensor.value (Float 0.0 — 1.0).</a:t>
-            </a:r>
-          </a:p>
-          <a:p>
-            <a:pPr marL="0" indent="0">
-              <a:buNone/>
-            </a:pPr>
-            <a:r>
-              <a:rPr lang="de-DE" dirty="0"/>
-              <a:t>Eine Geste, ein Bewegungswert, ein Tasterklick — alles wird zur gleichen Zahl.</a:t>
-            </a:r>
-          </a:p>
-          <a:p>
-            <a:pPr marL="0" indent="0">
-              <a:buNone/>
-            </a:pPr>
-            <a:r>
-              <a:rPr lang="de-DE" dirty="0"/>
-              <a:t/>
-            </a:r>
-          </a:p>
-          <a:p>
-            <a:pPr marL="0" indent="0">
-              <a:buNone/>
-            </a:pPr>
-            <a:r>
-              <a:rPr lang="de-DE" dirty="0"/>
-              <a:t>Das macht den Code vorhersehbar, testbar und für GPT optimal generierbar.</a:t>
-            </a:r>
-          </a:p>
-        </p:txBody>
-      </p:sp>
-      <p:sp>
-        <p:nvSpPr>
-          <p:cNvPr id="5" name="Fußzeilenplatzhalter 4">
-            <a:extLst>
-              <a:ext uri="{FF2B5EF4-FFF2-40B4-BE49-F238E27FC236}">
-                <a16:creationId xmlns:a16="http://schemas.microsoft.com/office/drawing/2014/main" id="{572B1E5F-FA5D-4B47-A43F-C570AFE8C6D3}"/>
-              </a:ext>
-            </a:extLst>
-          </p:cNvPr>
-          <p:cNvSpPr>
-            <a:spLocks noGrp="1"/>
-          </p:cNvSpPr>
-          <p:nvPr>
-            <p:ph type="ftr" sz="quarter" idx="3"/>
-          </p:nvPr>
-        </p:nvSpPr>
-        <p:spPr>
-          <a:xfrm>
-            <a:off x="2550014" y="6522444"/>
-            <a:ext cx="4038600" cy="215999"/>
-          </a:xfrm>
-        </p:spPr>
-        <p:txBody>
-          <a:bodyPr/>
-          <a:lstStyle/>
-          <a:p>
-            <a:r>
-              <a:rPr lang="de-DE" dirty="0"/>
-              <a:t xml:space="preserve">Design </a:t>
-            </a:r>
-            <a:r>
-              <a:rPr lang="de-DE" dirty="0" err="1"/>
-              <a:t>by</a:t>
-            </a:r>
-            <a:r>
-              <a:rPr lang="de-DE" dirty="0"/>
-              <a:t xml:space="preserve"> Technology</a:t>
-            </a:r>
-            <a:endParaRPr lang="de-CH" dirty="0"/>
-          </a:p>
-        </p:txBody>
-      </p:sp>
-      <p:sp>
-        <p:nvSpPr>
-          <p:cNvPr id="4" name="Datumsplatzhalter 3">
-            <a:extLst>
-              <a:ext uri="{FF2B5EF4-FFF2-40B4-BE49-F238E27FC236}">
-                <a16:creationId xmlns:a16="http://schemas.microsoft.com/office/drawing/2014/main" id="{44DAA5A3-8CEF-4027-9289-B60138CD16A2}"/>
-              </a:ext>
-            </a:extLst>
-          </p:cNvPr>
-          <p:cNvSpPr>
-            <a:spLocks noGrp="1"/>
-          </p:cNvSpPr>
-          <p:nvPr>
-            <p:ph type="dt" sz="half" idx="2"/>
-          </p:nvPr>
-        </p:nvSpPr>
-        <p:spPr>
-          <a:xfrm>
-            <a:off x="10328132" y="6522442"/>
-            <a:ext cx="789039" cy="216001"/>
-          </a:xfrm>
-        </p:spPr>
-        <p:txBody>
-          <a:bodyPr/>
-          <a:lstStyle/>
-          <a:p>
-            <a:fld id="{8D93BFA6-70D2-4653-B5CB-D3376F3BFAE7}" type="datetime1">
-              <a:rPr lang="de-CH" noProof="0" smtClean="0"/>
-              <a:t>13.04.26</a:t>
-            </a:fld>
-            <a:endParaRPr lang="de-CH" noProof="0"/>
-          </a:p>
-        </p:txBody>
-      </p:sp>
-      <p:sp>
-        <p:nvSpPr>
-          <p:cNvPr id="6" name="Foliennummernplatzhalter 5">
-            <a:extLst>
-              <a:ext uri="{FF2B5EF4-FFF2-40B4-BE49-F238E27FC236}">
-                <a16:creationId xmlns:a16="http://schemas.microsoft.com/office/drawing/2014/main" id="{5C9B1E27-9E06-4598-A6EF-3BCBC8D0152F}"/>
-              </a:ext>
-            </a:extLst>
-          </p:cNvPr>
-          <p:cNvSpPr>
-            <a:spLocks noGrp="1"/>
-          </p:cNvSpPr>
-          <p:nvPr>
-            <p:ph type="sldNum" sz="quarter" idx="4"/>
-          </p:nvPr>
-        </p:nvSpPr>
-        <p:spPr>
-          <a:xfrm>
-            <a:off x="11137585" y="6522444"/>
-            <a:ext cx="322577" cy="216000"/>
-          </a:xfrm>
-        </p:spPr>
-        <p:txBody>
-          <a:bodyPr/>
-          <a:lstStyle/>
-          <a:p>
-            <a:fld id="{5ACA52AF-F19D-405C-AD5F-7D94B96A5CC3}" type="slidenum">
-              <a:rPr lang="de-CH" noProof="0" smtClean="0"/>
-              <a:t>8</a:t>
-            </a:fld>
-            <a:endParaRPr lang="de-CH" noProof="0"/>
-          </a:p>
-        </p:txBody>
-      </p:sp>
-    </p:spTree>
-    <p:extLst>
-      <p:ext uri="{BB962C8B-B14F-4D97-AF65-F5344CB8AC3E}">
-        <p14:creationId xmlns:p14="http://schemas.microsoft.com/office/powerpoint/2010/main" val="294303585"/>
-      </p:ext>
-    </p:extLst>
-  </p:cSld>
-  <p:clrMapOvr>
-    <a:masterClrMapping/>
-  </p:clrMapOvr>
-</p:sld>
-</file>
-
-<file path=ppt/slides/slide39.xml><?xml version="1.0" encoding="utf-8"?>
-<p:sld xmlns:a="http://schemas.openxmlformats.org/drawingml/2006/main" xmlns:r="http://schemas.openxmlformats.org/officeDocument/2006/relationships" xmlns:p="http://schemas.openxmlformats.org/presentationml/2006/main">
-  <p:cSld>
-    <p:spTree>
-      <p:nvGrpSpPr>
-        <p:cNvPr id="1" name=""/>
-        <p:cNvGrpSpPr/>
-        <p:nvPr/>
-      </p:nvGrpSpPr>
-      <p:grpSpPr>
-        <a:xfrm>
-          <a:off x="0" y="0"/>
-          <a:ext cx="0" cy="0"/>
-          <a:chOff x="0" y="0"/>
-          <a:chExt cx="0" cy="0"/>
-        </a:xfrm>
-      </p:grpSpPr>
-      <p:sp>
-        <p:nvSpPr>
-          <p:cNvPr id="2" name="Titel 1">
-            <a:extLst>
-              <a:ext uri="{FF2B5EF4-FFF2-40B4-BE49-F238E27FC236}">
-                <a16:creationId xmlns:a16="http://schemas.microsoft.com/office/drawing/2014/main" id="{9FF31ECF-EF04-4AAA-9A8E-583E3D217F33}"/>
-              </a:ext>
-            </a:extLst>
-          </p:cNvPr>
-          <p:cNvSpPr>
-            <a:spLocks noGrp="1"/>
-          </p:cNvSpPr>
-          <p:nvPr>
-            <p:ph type="title"/>
-          </p:nvPr>
-        </p:nvSpPr>
-        <p:spPr/>
-        <p:txBody>
-          <a:bodyPr/>
-          <a:lstStyle/>
-          <a:p>
-            <a:r>
-              <a:rPr lang="de-DE" dirty="0"/>
-              <a:t>Was ist ein Custom GPT?</a:t>
-            </a:r>
-            <a:endParaRPr lang="de-CH" dirty="0"/>
-          </a:p>
-        </p:txBody>
-      </p:sp>
-      <p:sp>
-        <p:nvSpPr>
-          <p:cNvPr id="3" name="Inhaltsplatzhalter 2">
-            <a:extLst>
-              <a:ext uri="{FF2B5EF4-FFF2-40B4-BE49-F238E27FC236}">
-                <a16:creationId xmlns:a16="http://schemas.microsoft.com/office/drawing/2014/main" id="{9EE0A683-618F-4D75-846F-0DB536B4E502}"/>
-              </a:ext>
-            </a:extLst>
-          </p:cNvPr>
-          <p:cNvSpPr>
-            <a:spLocks noGrp="1"/>
-          </p:cNvSpPr>
-          <p:nvPr>
-            <p:ph idx="1"/>
-          </p:nvPr>
-        </p:nvSpPr>
-        <p:spPr/>
-        <p:txBody>
-          <a:bodyPr/>
-          <a:lstStyle/>
-          <a:p>
-            <a:pPr marL="0" indent="0">
-              <a:buNone/>
-            </a:pPr>
-            <a:r>
-              <a:rPr lang="de-DE" b="1" dirty="0"/>
-              <a:t>Ein KI-Assistent mit Persönlichkeit und Regeln</a:t>
-            </a:r>
-          </a:p>
-          <a:p>
-            <a:pPr marL="0" indent="0">
-              <a:buNone/>
-            </a:pPr>
-            <a:r>
-              <a:rPr lang="de-DE" dirty="0"/>
-              <a:t>Custom GPTs sind spezialisierte Versionen von ChatGPT — vorkonfiguriert mit einem</a:t>
-            </a:r>
-          </a:p>
-          <a:p>
-            <a:pPr marL="0" indent="0">
-              <a:buNone/>
-            </a:pPr>
-            <a:r>
-              <a:rPr lang="de-DE" dirty="0"/>
-              <a:t>System Prompt, der das Verhalten, Wissen und die Grenzen des Assistenten definiert.</a:t>
-            </a:r>
-          </a:p>
-          <a:p>
-            <a:pPr marL="0" indent="0">
-              <a:buNone/>
-            </a:pPr>
-            <a:r>
-              <a:rPr lang="de-DE" dirty="0"/>
-              <a:t/>
-            </a:r>
-          </a:p>
-          <a:p>
-            <a:pPr marL="0" indent="0">
-              <a:buNone/>
-            </a:pPr>
-            <a:r>
-              <a:rPr lang="de-DE" dirty="0"/>
-              <a:t>Der FOLWANG-PairLink-Starter ist speziell auf den Pathfinder Workshop zugeschnitten:</a:t>
-            </a:r>
-          </a:p>
-          <a:p>
-            <a:pPr marL="0" indent="0">
-              <a:buNone/>
-            </a:pPr>
-            <a:r>
-              <a:rPr lang="de-DE" dirty="0"/>
-              <a:t>Er kennt die Hardware, die Bibliotheken, die Pinbelegung und den Workflow.</a:t>
-            </a:r>
-          </a:p>
-          <a:p>
-            <a:pPr marL="0" indent="0">
-              <a:buNone/>
-            </a:pPr>
-            <a:r>
-              <a:rPr lang="de-DE" dirty="0"/>
-              <a:t/>
-            </a:r>
-          </a:p>
-          <a:p>
-            <a:pPr marL="0" indent="0">
-              <a:buNone/>
-            </a:pPr>
-            <a:r>
-              <a:rPr lang="de-DE" dirty="0"/>
-              <a:t>Er beantwortet keine Fragen zu anderen Boards oder framefremden Libraries —</a:t>
-            </a:r>
-          </a:p>
-          <a:p>
-            <a:pPr marL="0" indent="0">
-              <a:buNone/>
-            </a:pPr>
-            <a:r>
-              <a:rPr lang="de-DE" dirty="0"/>
-              <a:t>und generiert nur Code, der auf dem ESP32-PICO-KIT direkt funktioniert.</a:t>
-            </a:r>
-          </a:p>
-        </p:txBody>
-      </p:sp>
-      <p:sp>
-        <p:nvSpPr>
-          <p:cNvPr id="5" name="Fußzeilenplatzhalter 4">
-            <a:extLst>
-              <a:ext uri="{FF2B5EF4-FFF2-40B4-BE49-F238E27FC236}">
-                <a16:creationId xmlns:a16="http://schemas.microsoft.com/office/drawing/2014/main" id="{572B1E5F-FA5D-4B47-A43F-C570AFE8C6D3}"/>
-              </a:ext>
-            </a:extLst>
-          </p:cNvPr>
-          <p:cNvSpPr>
-            <a:spLocks noGrp="1"/>
-          </p:cNvSpPr>
-          <p:nvPr>
-            <p:ph type="ftr" sz="quarter" idx="3"/>
-          </p:nvPr>
-        </p:nvSpPr>
-        <p:spPr>
-          <a:xfrm>
-            <a:off x="2550014" y="6522444"/>
-            <a:ext cx="4038600" cy="215999"/>
-          </a:xfrm>
-        </p:spPr>
-        <p:txBody>
-          <a:bodyPr/>
-          <a:lstStyle/>
-          <a:p>
-            <a:r>
-              <a:rPr lang="de-DE" dirty="0"/>
-              <a:t xml:space="preserve">Design </a:t>
-            </a:r>
-            <a:r>
-              <a:rPr lang="de-DE" dirty="0" err="1"/>
-              <a:t>by</a:t>
-            </a:r>
-            <a:r>
-              <a:rPr lang="de-DE" dirty="0"/>
-              <a:t xml:space="preserve"> Technology</a:t>
-            </a:r>
-            <a:endParaRPr lang="de-CH" dirty="0"/>
-          </a:p>
-        </p:txBody>
-      </p:sp>
-      <p:sp>
-        <p:nvSpPr>
-          <p:cNvPr id="4" name="Datumsplatzhalter 3">
-            <a:extLst>
-              <a:ext uri="{FF2B5EF4-FFF2-40B4-BE49-F238E27FC236}">
-                <a16:creationId xmlns:a16="http://schemas.microsoft.com/office/drawing/2014/main" id="{44DAA5A3-8CEF-4027-9289-B60138CD16A2}"/>
-              </a:ext>
-            </a:extLst>
-          </p:cNvPr>
-          <p:cNvSpPr>
-            <a:spLocks noGrp="1"/>
-          </p:cNvSpPr>
-          <p:nvPr>
-            <p:ph type="dt" sz="half" idx="2"/>
-          </p:nvPr>
-        </p:nvSpPr>
-        <p:spPr>
-          <a:xfrm>
-            <a:off x="10328132" y="6522442"/>
-            <a:ext cx="789039" cy="216001"/>
-          </a:xfrm>
-        </p:spPr>
-        <p:txBody>
-          <a:bodyPr/>
-          <a:lstStyle/>
-          <a:p>
-            <a:fld id="{8D93BFA6-70D2-4653-B5CB-D3376F3BFAE7}" type="datetime1">
-              <a:rPr lang="de-CH" noProof="0" smtClean="0"/>
-              <a:t>13.04.26</a:t>
-            </a:fld>
-            <a:endParaRPr lang="de-CH" noProof="0"/>
-          </a:p>
-        </p:txBody>
-      </p:sp>
-      <p:sp>
-        <p:nvSpPr>
-          <p:cNvPr id="6" name="Foliennummernplatzhalter 5">
-            <a:extLst>
-              <a:ext uri="{FF2B5EF4-FFF2-40B4-BE49-F238E27FC236}">
-                <a16:creationId xmlns:a16="http://schemas.microsoft.com/office/drawing/2014/main" id="{5C9B1E27-9E06-4598-A6EF-3BCBC8D0152F}"/>
-              </a:ext>
-            </a:extLst>
-          </p:cNvPr>
-          <p:cNvSpPr>
-            <a:spLocks noGrp="1"/>
-          </p:cNvSpPr>
-          <p:nvPr>
-            <p:ph type="sldNum" sz="quarter" idx="4"/>
-          </p:nvPr>
-        </p:nvSpPr>
-        <p:spPr>
-          <a:xfrm>
-            <a:off x="11137585" y="6522444"/>
-            <a:ext cx="322577" cy="216000"/>
-          </a:xfrm>
-        </p:spPr>
-        <p:txBody>
-          <a:bodyPr/>
-          <a:lstStyle/>
-          <a:p>
-            <a:fld id="{5ACA52AF-F19D-405C-AD5F-7D94B96A5CC3}" type="slidenum">
-              <a:rPr lang="de-CH" noProof="0" smtClean="0"/>
-              <a:t>8</a:t>
-            </a:fld>
-            <a:endParaRPr lang="de-CH" noProof="0"/>
-          </a:p>
-        </p:txBody>
-      </p:sp>
-    </p:spTree>
-    <p:extLst>
-      <p:ext uri="{BB962C8B-B14F-4D97-AF65-F5344CB8AC3E}">
-        <p14:creationId xmlns:p14="http://schemas.microsoft.com/office/powerpoint/2010/main" val="294303585"/>
-      </p:ext>
-    </p:extLst>
-  </p:cSld>
-  <p:clrMapOvr>
-    <a:masterClrMapping/>
-  </p:clrMapOvr>
-</p:sld>
-</file>
-
-<file path=ppt/slides/slide40.xml><?xml version="1.0" encoding="utf-8"?>
-<p:sld xmlns:a="http://schemas.openxmlformats.org/drawingml/2006/main" xmlns:r="http://schemas.openxmlformats.org/officeDocument/2006/relationships" xmlns:p="http://schemas.openxmlformats.org/presentationml/2006/main">
-  <p:cSld>
-    <p:spTree>
-      <p:nvGrpSpPr>
-        <p:cNvPr id="1" name=""/>
-        <p:cNvGrpSpPr/>
-        <p:nvPr/>
-      </p:nvGrpSpPr>
-      <p:grpSpPr>
-        <a:xfrm>
-          <a:off x="0" y="0"/>
-          <a:ext cx="0" cy="0"/>
-          <a:chOff x="0" y="0"/>
-          <a:chExt cx="0" cy="0"/>
-        </a:xfrm>
-      </p:grpSpPr>
-      <p:sp>
-        <p:nvSpPr>
-          <p:cNvPr id="2" name="Titel 1">
-            <a:extLst>
-              <a:ext uri="{FF2B5EF4-FFF2-40B4-BE49-F238E27FC236}">
-                <a16:creationId xmlns:a16="http://schemas.microsoft.com/office/drawing/2014/main" id="{9FF31ECF-EF04-4AAA-9A8E-583E3D217F33}"/>
-              </a:ext>
-            </a:extLst>
-          </p:cNvPr>
-          <p:cNvSpPr>
-            <a:spLocks noGrp="1"/>
-          </p:cNvSpPr>
-          <p:nvPr>
-            <p:ph type="title"/>
-          </p:nvPr>
-        </p:nvSpPr>
-        <p:spPr/>
-        <p:txBody>
-          <a:bodyPr/>
-          <a:lstStyle/>
-          <a:p>
-            <a:r>
-              <a:rPr lang="de-DE" dirty="0"/>
-              <a:t>Beispiele: Was der GPT generiert</a:t>
-            </a:r>
-            <a:endParaRPr lang="de-CH" dirty="0"/>
-          </a:p>
-        </p:txBody>
-      </p:sp>
-      <p:sp>
-        <p:nvSpPr>
-          <p:cNvPr id="3" name="Inhaltsplatzhalter 2">
-            <a:extLst>
-              <a:ext uri="{FF2B5EF4-FFF2-40B4-BE49-F238E27FC236}">
-                <a16:creationId xmlns:a16="http://schemas.microsoft.com/office/drawing/2014/main" id="{9EE0A683-618F-4D75-846F-0DB536B4E502}"/>
-              </a:ext>
-            </a:extLst>
-          </p:cNvPr>
-          <p:cNvSpPr>
-            <a:spLocks noGrp="1"/>
-          </p:cNvSpPr>
-          <p:nvPr>
-            <p:ph idx="1"/>
-          </p:nvPr>
-        </p:nvSpPr>
-        <p:spPr/>
-        <p:txBody>
-          <a:bodyPr/>
-          <a:lstStyle/>
-          <a:p>
-            <a:pPr marL="0" indent="0">
-              <a:buNone/>
-            </a:pPr>
-            <a:r>
-              <a:rPr lang="de-DE" b="1" dirty="0"/>
-              <a:t>Drei Workshop-Szenarien</a:t>
-            </a:r>
-          </a:p>
-          <a:p>
-            <a:pPr marL="0" indent="0">
-              <a:buNone/>
-            </a:pPr>
-            <a:r>
-              <a:rPr lang="de-DE" dirty="0"/>
-              <a:t>Gestensteuerung — APDS9960 erkennt Links/Rechts/Auf/Ab und steuert NeoPixel-Farben.</a:t>
-            </a:r>
-          </a:p>
-          <a:p>
-            <a:pPr marL="0" indent="0">
-              <a:buNone/>
-            </a:pPr>
-            <a:r>
-              <a:rPr lang="de-DE" dirty="0"/>
-              <a:t>Prompt: “Geste links = rot, rechts = blau, auf = grün, ab = aus”</a:t>
-            </a:r>
-          </a:p>
-          <a:p>
-            <a:pPr marL="0" indent="0">
-              <a:buNone/>
-            </a:pPr>
-            <a:r>
-              <a:rPr lang="de-DE" dirty="0"/>
-              <a:t/>
-            </a:r>
-          </a:p>
-          <a:p>
-            <a:pPr marL="0" indent="0">
-              <a:buNone/>
-            </a:pPr>
-            <a:r>
-              <a:rPr lang="de-DE" dirty="0"/>
-              <a:t>Bewegungsreaktion — MPU6050 misst Beschleunigung, Servo folgt der Neigung.</a:t>
-            </a:r>
-          </a:p>
-          <a:p>
-            <a:pPr marL="0" indent="0">
-              <a:buNone/>
-            </a:pPr>
-            <a:r>
-              <a:rPr lang="de-DE" dirty="0"/>
-              <a:t>Prompt: “Neigung nach vorne dreht Servo proportional zum Winkel”</a:t>
-            </a:r>
-          </a:p>
-          <a:p>
-            <a:pPr marL="0" indent="0">
-              <a:buNone/>
-            </a:pPr>
-            <a:r>
-              <a:rPr lang="de-DE" dirty="0"/>
-              <a:t/>
-            </a:r>
-          </a:p>
-          <a:p>
-            <a:pPr marL="0" indent="0">
-              <a:buNone/>
-            </a:pPr>
-            <a:r>
-              <a:rPr lang="de-DE" dirty="0"/>
-              <a:t>Interaktive Installation — Taster triggert animierte NeoPixel-Sequenz.</a:t>
-            </a:r>
-          </a:p>
-          <a:p>
-            <a:pPr marL="0" indent="0">
-              <a:buNone/>
-            </a:pPr>
-            <a:r>
-              <a:rPr lang="de-DE" dirty="0"/>
-              <a:t>Prompt: “Bei Tastendruck: Regenbogeneffekt, 3 Sekunden lang”</a:t>
-            </a:r>
-          </a:p>
-        </p:txBody>
-      </p:sp>
-      <p:sp>
-        <p:nvSpPr>
-          <p:cNvPr id="5" name="Fußzeilenplatzhalter 4">
-            <a:extLst>
-              <a:ext uri="{FF2B5EF4-FFF2-40B4-BE49-F238E27FC236}">
-                <a16:creationId xmlns:a16="http://schemas.microsoft.com/office/drawing/2014/main" id="{572B1E5F-FA5D-4B47-A43F-C570AFE8C6D3}"/>
-              </a:ext>
-            </a:extLst>
-          </p:cNvPr>
-          <p:cNvSpPr>
-            <a:spLocks noGrp="1"/>
-          </p:cNvSpPr>
-          <p:nvPr>
-            <p:ph type="ftr" sz="quarter" idx="3"/>
-          </p:nvPr>
-        </p:nvSpPr>
-        <p:spPr>
-          <a:xfrm>
-            <a:off x="2550014" y="6522444"/>
-            <a:ext cx="4038600" cy="215999"/>
-          </a:xfrm>
-        </p:spPr>
-        <p:txBody>
-          <a:bodyPr/>
-          <a:lstStyle/>
-          <a:p>
-            <a:r>
-              <a:rPr lang="de-DE" dirty="0"/>
-              <a:t xml:space="preserve">Design </a:t>
-            </a:r>
-            <a:r>
-              <a:rPr lang="de-DE" dirty="0" err="1"/>
-              <a:t>by</a:t>
-            </a:r>
-            <a:r>
-              <a:rPr lang="de-DE" dirty="0"/>
-              <a:t xml:space="preserve"> Technology</a:t>
-            </a:r>
-            <a:endParaRPr lang="de-CH" dirty="0"/>
-          </a:p>
-        </p:txBody>
-      </p:sp>
-      <p:sp>
-        <p:nvSpPr>
-          <p:cNvPr id="4" name="Datumsplatzhalter 3">
-            <a:extLst>
-              <a:ext uri="{FF2B5EF4-FFF2-40B4-BE49-F238E27FC236}">
-                <a16:creationId xmlns:a16="http://schemas.microsoft.com/office/drawing/2014/main" id="{44DAA5A3-8CEF-4027-9289-B60138CD16A2}"/>
-              </a:ext>
-            </a:extLst>
-          </p:cNvPr>
-          <p:cNvSpPr>
-            <a:spLocks noGrp="1"/>
-          </p:cNvSpPr>
-          <p:nvPr>
-            <p:ph type="dt" sz="half" idx="2"/>
-          </p:nvPr>
-        </p:nvSpPr>
-        <p:spPr>
-          <a:xfrm>
-            <a:off x="10328132" y="6522442"/>
-            <a:ext cx="789039" cy="216001"/>
-          </a:xfrm>
-        </p:spPr>
-        <p:txBody>
-          <a:bodyPr/>
-          <a:lstStyle/>
-          <a:p>
-            <a:fld id="{8D93BFA6-70D2-4653-B5CB-D3376F3BFAE7}" type="datetime1">
-              <a:rPr lang="de-CH" noProof="0" smtClean="0"/>
-              <a:t>13.04.26</a:t>
-            </a:fld>
-            <a:endParaRPr lang="de-CH" noProof="0"/>
-          </a:p>
-        </p:txBody>
-      </p:sp>
-      <p:sp>
-        <p:nvSpPr>
-          <p:cNvPr id="6" name="Foliennummernplatzhalter 5">
-            <a:extLst>
-              <a:ext uri="{FF2B5EF4-FFF2-40B4-BE49-F238E27FC236}">
-                <a16:creationId xmlns:a16="http://schemas.microsoft.com/office/drawing/2014/main" id="{5C9B1E27-9E06-4598-A6EF-3BCBC8D0152F}"/>
-              </a:ext>
-            </a:extLst>
-          </p:cNvPr>
-          <p:cNvSpPr>
-            <a:spLocks noGrp="1"/>
-          </p:cNvSpPr>
-          <p:nvPr>
-            <p:ph type="sldNum" sz="quarter" idx="4"/>
-          </p:nvPr>
-        </p:nvSpPr>
-        <p:spPr>
-          <a:xfrm>
-            <a:off x="11137585" y="6522444"/>
-            <a:ext cx="322577" cy="216000"/>
-          </a:xfrm>
-        </p:spPr>
-        <p:txBody>
-          <a:bodyPr/>
-          <a:lstStyle/>
-          <a:p>
-            <a:fld id="{5ACA52AF-F19D-405C-AD5F-7D94B96A5CC3}" type="slidenum">
-              <a:rPr lang="de-CH" noProof="0" smtClean="0"/>
-              <a:t>8</a:t>
-            </a:fld>
-            <a:endParaRPr lang="de-CH" noProof="0"/>
-          </a:p>
-        </p:txBody>
-      </p:sp>
-    </p:spTree>
-    <p:extLst>
-      <p:ext uri="{BB962C8B-B14F-4D97-AF65-F5344CB8AC3E}">
-        <p14:creationId xmlns:p14="http://schemas.microsoft.com/office/powerpoint/2010/main" val="294303585"/>
-      </p:ext>
-    </p:extLst>
-  </p:cSld>
-  <p:clrMapOvr>
-    <a:masterClrMapping/>
-  </p:clrMapOvr>
-</p:sld>
-</file>
-
-<file path=ppt/slides/slide41.xml><?xml version="1.0" encoding="utf-8"?>
-<p:sld xmlns:a="http://schemas.openxmlformats.org/drawingml/2006/main" xmlns:r="http://schemas.openxmlformats.org/officeDocument/2006/relationships" xmlns:p="http://schemas.openxmlformats.org/presentationml/2006/main">
-  <p:cSld>
-    <p:spTree>
-      <p:nvGrpSpPr>
-        <p:cNvPr id="1" name=""/>
-        <p:cNvGrpSpPr/>
-        <p:nvPr/>
-      </p:nvGrpSpPr>
-      <p:grpSpPr>
-        <a:xfrm>
-          <a:off x="0" y="0"/>
-          <a:ext cx="0" cy="0"/>
-          <a:chOff x="0" y="0"/>
-          <a:chExt cx="0" cy="0"/>
-        </a:xfrm>
-      </p:grpSpPr>
-      <p:sp>
-        <p:nvSpPr>
-          <p:cNvPr id="2" name="Titel 1">
-            <a:extLst>
-              <a:ext uri="{FF2B5EF4-FFF2-40B4-BE49-F238E27FC236}">
-                <a16:creationId xmlns:a16="http://schemas.microsoft.com/office/drawing/2014/main" id="{9FF31ECF-EF04-4AAA-9A8E-583E3D217F33}"/>
-              </a:ext>
-            </a:extLst>
-          </p:cNvPr>
-          <p:cNvSpPr>
-            <a:spLocks noGrp="1"/>
-          </p:cNvSpPr>
-          <p:nvPr>
-            <p:ph type="title"/>
-          </p:nvPr>
-        </p:nvSpPr>
-        <p:spPr/>
-        <p:txBody>
-          <a:bodyPr/>
-          <a:lstStyle/>
-          <a:p>
-            <a:r>
-              <a:rPr lang="de-DE" dirty="0"/>
-              <a:t>Den System Prompt verstehen und anpassen</a:t>
-            </a:r>
-            <a:endParaRPr lang="de-CH" dirty="0"/>
-          </a:p>
-        </p:txBody>
-      </p:sp>
-      <p:sp>
-        <p:nvSpPr>
-          <p:cNvPr id="3" name="Inhaltsplatzhalter 2">
-            <a:extLst>
-              <a:ext uri="{FF2B5EF4-FFF2-40B4-BE49-F238E27FC236}">
-                <a16:creationId xmlns:a16="http://schemas.microsoft.com/office/drawing/2014/main" id="{9EE0A683-618F-4D75-846F-0DB536B4E502}"/>
-              </a:ext>
-            </a:extLst>
-          </p:cNvPr>
-          <p:cNvSpPr>
-            <a:spLocks noGrp="1"/>
-          </p:cNvSpPr>
-          <p:nvPr>
-            <p:ph idx="1"/>
-          </p:nvPr>
-        </p:nvSpPr>
-        <p:spPr/>
-        <p:txBody>
-          <a:bodyPr/>
-          <a:lstStyle/>
-          <a:p>
-            <a:pPr marL="0" indent="0">
-              <a:buNone/>
-            </a:pPr>
-            <a:r>
-              <a:rPr lang="de-DE" b="1" dirty="0"/>
-              <a:t>Was steckt hinter dem Custom GPT?</a:t>
-            </a:r>
-          </a:p>
-          <a:p>
-            <a:pPr marL="0" indent="0">
-              <a:buNone/>
-            </a:pPr>
-            <a:r>
-              <a:rPr lang="de-DE" dirty="0"/>
-              <a:t>Der System Prompt ist die “DNA” eines Custom GPT. Er legt fest: Welche Hardware wird</a:t>
-            </a:r>
-          </a:p>
-          <a:p>
-            <a:pPr marL="0" indent="0">
-              <a:buNone/>
-            </a:pPr>
-            <a:r>
-              <a:rPr lang="de-DE" dirty="0"/>
-              <a:t>unterstützt? Welche Libraries sind erlaubt? Wie soll der Code strukturiert sein?</a:t>
-            </a:r>
-          </a:p>
-          <a:p>
-            <a:pPr marL="0" indent="0">
-              <a:buNone/>
-            </a:pPr>
-            <a:r>
-              <a:rPr lang="de-DE" dirty="0"/>
-              <a:t/>
-            </a:r>
-          </a:p>
-          <a:p>
-            <a:pPr marL="0" indent="0">
-              <a:buNone/>
-            </a:pPr>
-            <a:r>
-              <a:rPr lang="de-DE" dirty="0"/>
-              <a:t>Im GitHub-Repository ist der vollständige System Prompt veröffentlicht und erklärt.</a:t>
-            </a:r>
-          </a:p>
-          <a:p>
-            <a:pPr marL="0" indent="0">
-              <a:buNone/>
-            </a:pPr>
-            <a:r>
-              <a:rPr lang="de-DE" dirty="0"/>
-              <a:t>Du kannst ihn kopieren und für deinen eigenen Workshop oder dein Projekt anpassen.</a:t>
-            </a:r>
-          </a:p>
-          <a:p>
-            <a:pPr marL="0" indent="0">
-              <a:buNone/>
-            </a:pPr>
-            <a:r>
-              <a:rPr lang="de-DE" dirty="0"/>
-              <a:t/>
-            </a:r>
-          </a:p>
-          <a:p>
-            <a:pPr marL="0" indent="0">
-              <a:buNone/>
-            </a:pPr>
-            <a:r>
-              <a:rPr lang="de-DE" dirty="0"/>
-              <a:t>Eigene GPTs lassen sich über ChatGPT Plus erstellen: System Prompt einfügen,</a:t>
-            </a:r>
-          </a:p>
-          <a:p>
-            <a:pPr marL="0" indent="0">
-              <a:buNone/>
-            </a:pPr>
-            <a:r>
-              <a:rPr lang="de-DE" dirty="0"/>
-              <a:t>GPT-Dataset als Wissensbasis hochladen — fertig ist der spezialisierte Assistent.</a:t>
-            </a:r>
-          </a:p>
-        </p:txBody>
-      </p:sp>
-      <p:sp>
-        <p:nvSpPr>
-          <p:cNvPr id="5" name="Fußzeilenplatzhalter 4">
-            <a:extLst>
-              <a:ext uri="{FF2B5EF4-FFF2-40B4-BE49-F238E27FC236}">
-                <a16:creationId xmlns:a16="http://schemas.microsoft.com/office/drawing/2014/main" id="{572B1E5F-FA5D-4B47-A43F-C570AFE8C6D3}"/>
-              </a:ext>
-            </a:extLst>
-          </p:cNvPr>
-          <p:cNvSpPr>
-            <a:spLocks noGrp="1"/>
-          </p:cNvSpPr>
-          <p:nvPr>
-            <p:ph type="ftr" sz="quarter" idx="3"/>
-          </p:nvPr>
-        </p:nvSpPr>
-        <p:spPr>
-          <a:xfrm>
-            <a:off x="2550014" y="6522444"/>
-            <a:ext cx="4038600" cy="215999"/>
-          </a:xfrm>
-        </p:spPr>
-        <p:txBody>
-          <a:bodyPr/>
-          <a:lstStyle/>
-          <a:p>
-            <a:r>
-              <a:rPr lang="de-DE" dirty="0"/>
-              <a:t xml:space="preserve">Design </a:t>
-            </a:r>
-            <a:r>
-              <a:rPr lang="de-DE" dirty="0" err="1"/>
-              <a:t>by</a:t>
-            </a:r>
-            <a:r>
-              <a:rPr lang="de-DE" dirty="0"/>
-              <a:t xml:space="preserve"> Technology</a:t>
-            </a:r>
-            <a:endParaRPr lang="de-CH" dirty="0"/>
-          </a:p>
-        </p:txBody>
-      </p:sp>
-      <p:sp>
-        <p:nvSpPr>
-          <p:cNvPr id="4" name="Datumsplatzhalter 3">
-            <a:extLst>
-              <a:ext uri="{FF2B5EF4-FFF2-40B4-BE49-F238E27FC236}">
-                <a16:creationId xmlns:a16="http://schemas.microsoft.com/office/drawing/2014/main" id="{44DAA5A3-8CEF-4027-9289-B60138CD16A2}"/>
-              </a:ext>
-            </a:extLst>
-          </p:cNvPr>
-          <p:cNvSpPr>
-            <a:spLocks noGrp="1"/>
-          </p:cNvSpPr>
-          <p:nvPr>
-            <p:ph type="dt" sz="half" idx="2"/>
-          </p:nvPr>
-        </p:nvSpPr>
-        <p:spPr>
-          <a:xfrm>
-            <a:off x="10328132" y="6522442"/>
-            <a:ext cx="789039" cy="216001"/>
-          </a:xfrm>
-        </p:spPr>
-        <p:txBody>
-          <a:bodyPr/>
-          <a:lstStyle/>
-          <a:p>
-            <a:fld id="{8D93BFA6-70D2-4653-B5CB-D3376F3BFAE7}" type="datetime1">
-              <a:rPr lang="de-CH" noProof="0" smtClean="0"/>
-              <a:t>13.04.26</a:t>
-            </a:fld>
-            <a:endParaRPr lang="de-CH" noProof="0"/>
-          </a:p>
-        </p:txBody>
-      </p:sp>
-      <p:sp>
-        <p:nvSpPr>
-          <p:cNvPr id="6" name="Foliennummernplatzhalter 5">
-            <a:extLst>
-              <a:ext uri="{FF2B5EF4-FFF2-40B4-BE49-F238E27FC236}">
-                <a16:creationId xmlns:a16="http://schemas.microsoft.com/office/drawing/2014/main" id="{5C9B1E27-9E06-4598-A6EF-3BCBC8D0152F}"/>
-              </a:ext>
-            </a:extLst>
-          </p:cNvPr>
-          <p:cNvSpPr>
-            <a:spLocks noGrp="1"/>
-          </p:cNvSpPr>
-          <p:nvPr>
-            <p:ph type="sldNum" sz="quarter" idx="4"/>
-          </p:nvPr>
-        </p:nvSpPr>
-        <p:spPr>
-          <a:xfrm>
-            <a:off x="11137585" y="6522444"/>
-            <a:ext cx="322577" cy="216000"/>
-          </a:xfrm>
-        </p:spPr>
-        <p:txBody>
-          <a:bodyPr/>
-          <a:lstStyle/>
-          <a:p>
-            <a:fld id="{5ACA52AF-F19D-405C-AD5F-7D94B96A5CC3}" type="slidenum">
-              <a:rPr lang="de-CH" noProof="0" smtClean="0"/>
-              <a:t>8</a:t>
-            </a:fld>
-            <a:endParaRPr lang="de-CH" noProof="0"/>
-          </a:p>
-        </p:txBody>
-      </p:sp>
-    </p:spTree>
-    <p:extLst>
-      <p:ext uri="{BB962C8B-B14F-4D97-AF65-F5344CB8AC3E}">
-        <p14:creationId xmlns:p14="http://schemas.microsoft.com/office/powerpoint/2010/main" val="294303585"/>
-      </p:ext>
-    </p:extLst>
-  </p:cSld>
-  <p:clrMapOvr>
-    <a:masterClrMapping/>
-  </p:clrMapOvr>
-</p:sld>
-</file>
-
-<file path=ppt/slides/slide42.xml><?xml version="1.0" encoding="utf-8"?>
-<p:sld xmlns:a="http://schemas.openxmlformats.org/drawingml/2006/main" xmlns:r="http://schemas.openxmlformats.org/officeDocument/2006/relationships" xmlns:p="http://schemas.openxmlformats.org/presentationml/2006/main">
-  <p:cSld>
-    <p:spTree>
-      <p:nvGrpSpPr>
-        <p:cNvPr id="1" name=""/>
-        <p:cNvGrpSpPr/>
-        <p:nvPr/>
-      </p:nvGrpSpPr>
-      <p:grpSpPr>
-        <a:xfrm>
-          <a:off x="0" y="0"/>
-          <a:ext cx="0" cy="0"/>
-          <a:chOff x="0" y="0"/>
-          <a:chExt cx="0" cy="0"/>
-        </a:xfrm>
-      </p:grpSpPr>
-      <p:sp>
-        <p:nvSpPr>
-          <p:cNvPr id="2" name="Titel 1">
-            <a:extLst>
-              <a:ext uri="{FF2B5EF4-FFF2-40B4-BE49-F238E27FC236}">
-                <a16:creationId xmlns:a16="http://schemas.microsoft.com/office/drawing/2014/main" id="{DA757BF2-5EC6-42D6-9F04-4237E99FD6E5}"/>
-              </a:ext>
-            </a:extLst>
-          </p:cNvPr>
-          <p:cNvSpPr>
-            <a:spLocks noGrp="1"/>
-          </p:cNvSpPr>
-          <p:nvPr>
-            <p:ph type="title"/>
-          </p:nvPr>
-        </p:nvSpPr>
-        <p:spPr/>
-        <p:txBody>
-          <a:bodyPr/>
-          <a:lstStyle/>
-          <a:p>
-            <a:r>
-              <a:rPr lang="de-DE" dirty="0"/>
-              <a:t>02</a:t>
-            </a:r>
-            <a:br>
-              <a:rPr lang="de-DE" dirty="0"/>
-            </a:br>
-            <a:r>
-              <a:rPr lang="de-DE" dirty="0"/>
-              <a:t>Hardware &amp; Konzept</a:t>
-            </a:r>
-          </a:p>
-        </p:txBody>
-      </p:sp>
-      <p:sp>
-        <p:nvSpPr>
-          <p:cNvPr id="4" name="Fußzeilenplatzhalter 3">
-            <a:extLst>
-              <a:ext uri="{FF2B5EF4-FFF2-40B4-BE49-F238E27FC236}">
-                <a16:creationId xmlns:a16="http://schemas.microsoft.com/office/drawing/2014/main" id="{9DDD7CFF-BF36-47E4-8302-EBC181BD33D4}"/>
-              </a:ext>
-            </a:extLst>
-          </p:cNvPr>
-          <p:cNvSpPr>
-            <a:spLocks noGrp="1"/>
-          </p:cNvSpPr>
-          <p:nvPr>
-            <p:ph type="ftr" sz="quarter" idx="3"/>
-          </p:nvPr>
-        </p:nvSpPr>
-        <p:spPr>
-          <a:xfrm>
-            <a:off x="2100838" y="6522444"/>
-            <a:ext cx="4038600" cy="215999"/>
-          </a:xfrm>
-        </p:spPr>
-        <p:txBody>
-          <a:bodyPr/>
-          <a:lstStyle/>
-          <a:p>
-            <a:r>
-              <a:rPr lang="de-DE" dirty="0"/>
-              <a:t xml:space="preserve">Design </a:t>
-            </a:r>
-            <a:r>
-              <a:rPr lang="de-DE" dirty="0" err="1"/>
-              <a:t>by</a:t>
-            </a:r>
-            <a:r>
-              <a:rPr lang="de-DE" dirty="0"/>
-              <a:t xml:space="preserve"> Technology</a:t>
-            </a:r>
-            <a:endParaRPr lang="de-CH" dirty="0"/>
-          </a:p>
-        </p:txBody>
-      </p:sp>
-      <p:sp>
-        <p:nvSpPr>
-          <p:cNvPr id="3" name="Datumsplatzhalter 2">
-            <a:extLst>
-              <a:ext uri="{FF2B5EF4-FFF2-40B4-BE49-F238E27FC236}">
-                <a16:creationId xmlns:a16="http://schemas.microsoft.com/office/drawing/2014/main" id="{4DEEA281-37DD-45CF-AABF-2BFEAD6C860F}"/>
-              </a:ext>
-            </a:extLst>
-          </p:cNvPr>
-          <p:cNvSpPr>
-            <a:spLocks noGrp="1"/>
-          </p:cNvSpPr>
-          <p:nvPr>
-            <p:ph type="dt" sz="half" idx="2"/>
-          </p:nvPr>
-        </p:nvSpPr>
-        <p:spPr>
-          <a:xfrm>
-            <a:off x="10328132" y="6522442"/>
-            <a:ext cx="789039" cy="216001"/>
-          </a:xfrm>
-        </p:spPr>
-        <p:txBody>
-          <a:bodyPr/>
-          <a:lstStyle/>
-          <a:p>
-            <a:fld id="{43402617-726E-42A6-AC19-79D267EAC7EE}" type="datetime1">
-              <a:rPr lang="de-CH" noProof="0" smtClean="0"/>
-              <a:t>13.04.26</a:t>
-            </a:fld>
-            <a:endParaRPr lang="de-CH" noProof="0"/>
-          </a:p>
-        </p:txBody>
-      </p:sp>
-      <p:sp>
-        <p:nvSpPr>
-          <p:cNvPr id="5" name="Foliennummernplatzhalter 4">
-            <a:extLst>
-              <a:ext uri="{FF2B5EF4-FFF2-40B4-BE49-F238E27FC236}">
-                <a16:creationId xmlns:a16="http://schemas.microsoft.com/office/drawing/2014/main" id="{3DB16F61-62BA-4FA3-89CE-2F599E6DE0EF}"/>
-              </a:ext>
-            </a:extLst>
-          </p:cNvPr>
-          <p:cNvSpPr>
-            <a:spLocks noGrp="1"/>
-          </p:cNvSpPr>
-          <p:nvPr>
-            <p:ph type="sldNum" sz="quarter" idx="4"/>
-          </p:nvPr>
-        </p:nvSpPr>
-        <p:spPr>
-          <a:xfrm>
-            <a:off x="11137585" y="6522444"/>
-            <a:ext cx="322577" cy="216000"/>
-          </a:xfrm>
-        </p:spPr>
-        <p:txBody>
-          <a:bodyPr/>
-          <a:lstStyle/>
-          <a:p>
-            <a:fld id="{5ACA52AF-F19D-405C-AD5F-7D94B96A5CC3}" type="slidenum">
-              <a:rPr lang="de-CH" noProof="0" smtClean="0"/>
-              <a:pPr/>
-              <a:t>12</a:t>
-            </a:fld>
-            <a:endParaRPr lang="de-CH" noProof="0"/>
-          </a:p>
-        </p:txBody>
-      </p:sp>
-    </p:spTree>
-    <p:extLst>
-      <p:ext uri="{BB962C8B-B14F-4D97-AF65-F5344CB8AC3E}">
-        <p14:creationId xmlns:p14="http://schemas.microsoft.com/office/powerpoint/2010/main" val="766234280"/>
-      </p:ext>
-    </p:extLst>
-  </p:cSld>
-  <p:clrMapOvr>
-    <a:masterClrMapping/>
-  </p:clrMapOvr>
-</p:sld>
-</file>
-
-<file path=ppt/slides/slide43.xml><?xml version="1.0" encoding="utf-8"?>
-<p:sld xmlns:a="http://schemas.openxmlformats.org/drawingml/2006/main" xmlns:r="http://schemas.openxmlformats.org/officeDocument/2006/relationships" xmlns:p="http://schemas.openxmlformats.org/presentationml/2006/main">
-  <p:cSld>
-    <p:spTree>
-      <p:nvGrpSpPr>
-        <p:cNvPr id="1" name=""/>
-        <p:cNvGrpSpPr/>
-        <p:nvPr/>
-      </p:nvGrpSpPr>
-      <p:grpSpPr>
-        <a:xfrm>
-          <a:off x="0" y="0"/>
-          <a:ext cx="0" cy="0"/>
-          <a:chOff x="0" y="0"/>
-          <a:chExt cx="0" cy="0"/>
-        </a:xfrm>
-      </p:grpSpPr>
-      <p:sp>
-        <p:nvSpPr>
-          <p:cNvPr id="2" name="Titel 1">
-            <a:extLst>
-              <a:ext uri="{FF2B5EF4-FFF2-40B4-BE49-F238E27FC236}">
-                <a16:creationId xmlns:a16="http://schemas.microsoft.com/office/drawing/2014/main" id="{DA757BF2-5EC6-42D6-9F04-4237E99FD6E5}"/>
-              </a:ext>
-            </a:extLst>
-          </p:cNvPr>
-          <p:cNvSpPr>
-            <a:spLocks noGrp="1"/>
-          </p:cNvSpPr>
-          <p:nvPr>
-            <p:ph type="title"/>
-          </p:nvPr>
-        </p:nvSpPr>
-        <p:spPr/>
-        <p:txBody>
-          <a:bodyPr/>
-          <a:lstStyle/>
-          <a:p>
-            <a:r>
-              <a:rPr lang="de-DE" dirty="0"/>
-              <a:t>03</a:t>
-            </a:r>
-            <a:br>
-              <a:rPr lang="de-DE" dirty="0"/>
-            </a:br>
-            <a:r>
-              <a:rPr lang="de-DE" dirty="0"/>
-              <a:t>Das Custom GPT</a:t>
-            </a:r>
-          </a:p>
-        </p:txBody>
-      </p:sp>
-      <p:sp>
-        <p:nvSpPr>
-          <p:cNvPr id="4" name="Fußzeilenplatzhalter 3">
-            <a:extLst>
-              <a:ext uri="{FF2B5EF4-FFF2-40B4-BE49-F238E27FC236}">
-                <a16:creationId xmlns:a16="http://schemas.microsoft.com/office/drawing/2014/main" id="{9DDD7CFF-BF36-47E4-8302-EBC181BD33D4}"/>
-              </a:ext>
-            </a:extLst>
-          </p:cNvPr>
-          <p:cNvSpPr>
-            <a:spLocks noGrp="1"/>
-          </p:cNvSpPr>
-          <p:nvPr>
-            <p:ph type="ftr" sz="quarter" idx="3"/>
-          </p:nvPr>
-        </p:nvSpPr>
-        <p:spPr>
-          <a:xfrm>
-            <a:off x="2100838" y="6522444"/>
-            <a:ext cx="4038600" cy="215999"/>
-          </a:xfrm>
-        </p:spPr>
-        <p:txBody>
-          <a:bodyPr/>
-          <a:lstStyle/>
-          <a:p>
-            <a:r>
-              <a:rPr lang="de-DE" dirty="0"/>
-              <a:t xml:space="preserve">Design </a:t>
-            </a:r>
-            <a:r>
-              <a:rPr lang="de-DE" dirty="0" err="1"/>
-              <a:t>by</a:t>
-            </a:r>
-            <a:r>
-              <a:rPr lang="de-DE" dirty="0"/>
-              <a:t xml:space="preserve"> Technology</a:t>
-            </a:r>
-            <a:endParaRPr lang="de-CH" dirty="0"/>
-          </a:p>
-        </p:txBody>
-      </p:sp>
-      <p:sp>
-        <p:nvSpPr>
-          <p:cNvPr id="3" name="Datumsplatzhalter 2">
-            <a:extLst>
-              <a:ext uri="{FF2B5EF4-FFF2-40B4-BE49-F238E27FC236}">
-                <a16:creationId xmlns:a16="http://schemas.microsoft.com/office/drawing/2014/main" id="{4DEEA281-37DD-45CF-AABF-2BFEAD6C860F}"/>
-              </a:ext>
-            </a:extLst>
-          </p:cNvPr>
-          <p:cNvSpPr>
-            <a:spLocks noGrp="1"/>
-          </p:cNvSpPr>
-          <p:nvPr>
-            <p:ph type="dt" sz="half" idx="2"/>
-          </p:nvPr>
-        </p:nvSpPr>
-        <p:spPr>
-          <a:xfrm>
-            <a:off x="10328132" y="6522442"/>
-            <a:ext cx="789039" cy="216001"/>
-          </a:xfrm>
-        </p:spPr>
-        <p:txBody>
-          <a:bodyPr/>
-          <a:lstStyle/>
-          <a:p>
-            <a:fld id="{43402617-726E-42A6-AC19-79D267EAC7EE}" type="datetime1">
-              <a:rPr lang="de-CH" noProof="0" smtClean="0"/>
-              <a:t>13.04.26</a:t>
-            </a:fld>
-            <a:endParaRPr lang="de-CH" noProof="0"/>
-          </a:p>
-        </p:txBody>
-      </p:sp>
-      <p:sp>
-        <p:nvSpPr>
-          <p:cNvPr id="5" name="Foliennummernplatzhalter 4">
-            <a:extLst>
-              <a:ext uri="{FF2B5EF4-FFF2-40B4-BE49-F238E27FC236}">
-                <a16:creationId xmlns:a16="http://schemas.microsoft.com/office/drawing/2014/main" id="{3DB16F61-62BA-4FA3-89CE-2F599E6DE0EF}"/>
-              </a:ext>
-            </a:extLst>
-          </p:cNvPr>
-          <p:cNvSpPr>
-            <a:spLocks noGrp="1"/>
-          </p:cNvSpPr>
-          <p:nvPr>
-            <p:ph type="sldNum" sz="quarter" idx="4"/>
-          </p:nvPr>
-        </p:nvSpPr>
-        <p:spPr>
-          <a:xfrm>
-            <a:off x="11137585" y="6522444"/>
-            <a:ext cx="322577" cy="216000"/>
-          </a:xfrm>
-        </p:spPr>
-        <p:txBody>
-          <a:bodyPr/>
-          <a:lstStyle/>
-          <a:p>
-            <a:fld id="{5ACA52AF-F19D-405C-AD5F-7D94B96A5CC3}" type="slidenum">
-              <a:rPr lang="de-CH" noProof="0" smtClean="0"/>
-              <a:pPr/>
-              <a:t>12</a:t>
-            </a:fld>
-            <a:endParaRPr lang="de-CH" noProof="0"/>
-          </a:p>
-        </p:txBody>
-      </p:sp>
-    </p:spTree>
-    <p:extLst>
-      <p:ext uri="{BB962C8B-B14F-4D97-AF65-F5344CB8AC3E}">
-        <p14:creationId xmlns:p14="http://schemas.microsoft.com/office/powerpoint/2010/main" val="766234280"/>
-      </p:ext>
-    </p:extLst>
-  </p:cSld>
-  <p:clrMapOvr>
-    <a:masterClrMapping/>
-  </p:clrMapOvr>
-</p:sld>
-</file>
-
-<file path=ppt/slides/slide44.xml><?xml version="1.0" encoding="utf-8"?>
-<p:sld xmlns:a="http://schemas.openxmlformats.org/drawingml/2006/main" xmlns:r="http://schemas.openxmlformats.org/officeDocument/2006/relationships" xmlns:p="http://schemas.openxmlformats.org/presentationml/2006/main">
-  <p:cSld>
-    <p:spTree>
-      <p:nvGrpSpPr>
-        <p:cNvPr id="1" name=""/>
-        <p:cNvGrpSpPr/>
-        <p:nvPr/>
-      </p:nvGrpSpPr>
-      <p:grpSpPr>
-        <a:xfrm>
-          <a:off x="0" y="0"/>
-          <a:ext cx="0" cy="0"/>
-          <a:chOff x="0" y="0"/>
-          <a:chExt cx="0" cy="0"/>
-        </a:xfrm>
-      </p:grpSpPr>
-      <p:sp>
-        <p:nvSpPr>
-          <p:cNvPr id="2" name="Titel 1">
-            <a:extLst>
-              <a:ext uri="{FF2B5EF4-FFF2-40B4-BE49-F238E27FC236}">
-                <a16:creationId xmlns:a16="http://schemas.microsoft.com/office/drawing/2014/main" id="{DA757BF2-5EC6-42D6-9F04-4237E99FD6E5}"/>
-              </a:ext>
-            </a:extLst>
-          </p:cNvPr>
-          <p:cNvSpPr>
-            <a:spLocks noGrp="1"/>
-          </p:cNvSpPr>
-          <p:nvPr>
-            <p:ph type="title"/>
-          </p:nvPr>
-        </p:nvSpPr>
-        <p:spPr/>
-        <p:txBody>
-          <a:bodyPr/>
-          <a:lstStyle/>
-          <a:p>
-            <a:r>
-              <a:rPr lang="de-DE" dirty="0"/>
-              <a:t>04</a:t>
-            </a:r>
-            <a:br>
-              <a:rPr lang="de-DE" dirty="0"/>
-            </a:br>
-            <a:r>
-              <a:rPr lang="de-DE" dirty="0"/>
-              <a:t>Eigenen GPT bauen</a:t>
-            </a:r>
-          </a:p>
-        </p:txBody>
-      </p:sp>
-      <p:sp>
-        <p:nvSpPr>
-          <p:cNvPr id="4" name="Fußzeilenplatzhalter 3">
-            <a:extLst>
-              <a:ext uri="{FF2B5EF4-FFF2-40B4-BE49-F238E27FC236}">
-                <a16:creationId xmlns:a16="http://schemas.microsoft.com/office/drawing/2014/main" id="{9DDD7CFF-BF36-47E4-8302-EBC181BD33D4}"/>
-              </a:ext>
-            </a:extLst>
-          </p:cNvPr>
-          <p:cNvSpPr>
-            <a:spLocks noGrp="1"/>
-          </p:cNvSpPr>
-          <p:nvPr>
-            <p:ph type="ftr" sz="quarter" idx="3"/>
-          </p:nvPr>
-        </p:nvSpPr>
-        <p:spPr>
-          <a:xfrm>
-            <a:off x="2100838" y="6522444"/>
-            <a:ext cx="4038600" cy="215999"/>
-          </a:xfrm>
-        </p:spPr>
-        <p:txBody>
-          <a:bodyPr/>
-          <a:lstStyle/>
-          <a:p>
-            <a:r>
-              <a:rPr lang="de-DE" dirty="0"/>
-              <a:t xml:space="preserve">Design </a:t>
-            </a:r>
-            <a:r>
-              <a:rPr lang="de-DE" dirty="0" err="1"/>
-              <a:t>by</a:t>
-            </a:r>
-            <a:r>
-              <a:rPr lang="de-DE" dirty="0"/>
-              <a:t xml:space="preserve"> Technology</a:t>
-            </a:r>
-            <a:endParaRPr lang="de-CH" dirty="0"/>
-          </a:p>
-        </p:txBody>
-      </p:sp>
-      <p:sp>
-        <p:nvSpPr>
-          <p:cNvPr id="3" name="Datumsplatzhalter 2">
-            <a:extLst>
-              <a:ext uri="{FF2B5EF4-FFF2-40B4-BE49-F238E27FC236}">
-                <a16:creationId xmlns:a16="http://schemas.microsoft.com/office/drawing/2014/main" id="{4DEEA281-37DD-45CF-AABF-2BFEAD6C860F}"/>
-              </a:ext>
-            </a:extLst>
-          </p:cNvPr>
-          <p:cNvSpPr>
-            <a:spLocks noGrp="1"/>
-          </p:cNvSpPr>
-          <p:nvPr>
-            <p:ph type="dt" sz="half" idx="2"/>
-          </p:nvPr>
-        </p:nvSpPr>
-        <p:spPr>
-          <a:xfrm>
-            <a:off x="10328132" y="6522442"/>
-            <a:ext cx="789039" cy="216001"/>
-          </a:xfrm>
-        </p:spPr>
-        <p:txBody>
-          <a:bodyPr/>
-          <a:lstStyle/>
-          <a:p>
-            <a:fld id="{43402617-726E-42A6-AC19-79D267EAC7EE}" type="datetime1">
-              <a:rPr lang="de-CH" noProof="0" smtClean="0"/>
-              <a:t>13.04.26</a:t>
-            </a:fld>
-            <a:endParaRPr lang="de-CH" noProof="0"/>
-          </a:p>
-        </p:txBody>
-      </p:sp>
-      <p:sp>
-        <p:nvSpPr>
-          <p:cNvPr id="5" name="Foliennummernplatzhalter 4">
-            <a:extLst>
-              <a:ext uri="{FF2B5EF4-FFF2-40B4-BE49-F238E27FC236}">
-                <a16:creationId xmlns:a16="http://schemas.microsoft.com/office/drawing/2014/main" id="{3DB16F61-62BA-4FA3-89CE-2F599E6DE0EF}"/>
-              </a:ext>
-            </a:extLst>
-          </p:cNvPr>
-          <p:cNvSpPr>
-            <a:spLocks noGrp="1"/>
-          </p:cNvSpPr>
-          <p:nvPr>
-            <p:ph type="sldNum" sz="quarter" idx="4"/>
-          </p:nvPr>
-        </p:nvSpPr>
-        <p:spPr>
-          <a:xfrm>
-            <a:off x="11137585" y="6522444"/>
-            <a:ext cx="322577" cy="216000"/>
-          </a:xfrm>
-        </p:spPr>
-        <p:txBody>
-          <a:bodyPr/>
-          <a:lstStyle/>
-          <a:p>
-            <a:fld id="{5ACA52AF-F19D-405C-AD5F-7D94B96A5CC3}" type="slidenum">
-              <a:rPr lang="de-CH" noProof="0" smtClean="0"/>
-              <a:pPr/>
-              <a:t>12</a:t>
-            </a:fld>
-            <a:endParaRPr lang="de-CH" noProof="0"/>
-          </a:p>
-        </p:txBody>
-      </p:sp>
-    </p:spTree>
-    <p:extLst>
-      <p:ext uri="{BB962C8B-B14F-4D97-AF65-F5344CB8AC3E}">
-        <p14:creationId xmlns:p14="http://schemas.microsoft.com/office/powerpoint/2010/main" val="766234280"/>
-      </p:ext>
-    </p:extLst>
-  </p:cSld>
-  <p:clrMapOvr>
-    <a:masterClrMapping/>
-  </p:clrMapOvr>
-</p:sld>
-</file>
-
-<file path=ppt/slides/slide45.xml><?xml version="1.0" encoding="utf-8"?>
-<p:sld xmlns:a="http://schemas.openxmlformats.org/drawingml/2006/main" xmlns:r="http://schemas.openxmlformats.org/officeDocument/2006/relationships" xmlns:p="http://schemas.openxmlformats.org/presentationml/2006/main">
-  <p:cSld>
-    <p:spTree>
-      <p:nvGrpSpPr>
-        <p:cNvPr id="1" name=""/>
-        <p:cNvGrpSpPr/>
-        <p:nvPr/>
-      </p:nvGrpSpPr>
-      <p:grpSpPr>
-        <a:xfrm>
-          <a:off x="0" y="0"/>
-          <a:ext cx="0" cy="0"/>
-          <a:chOff x="0" y="0"/>
-          <a:chExt cx="0" cy="0"/>
-        </a:xfrm>
-      </p:grpSpPr>
-      <p:sp>
-        <p:nvSpPr>
-          <p:cNvPr id="2" name="Titel 1">
-            <a:extLst>
-              <a:ext uri="{FF2B5EF4-FFF2-40B4-BE49-F238E27FC236}">
-                <a16:creationId xmlns:a16="http://schemas.microsoft.com/office/drawing/2014/main" id="{41DF9D96-1AFA-40BA-BAE5-8D745FEC2462}"/>
-              </a:ext>
-            </a:extLst>
-          </p:cNvPr>
-          <p:cNvSpPr>
-            <a:spLocks noGrp="1"/>
-          </p:cNvSpPr>
-          <p:nvPr>
-            <p:ph type="title"/>
-          </p:nvPr>
-        </p:nvSpPr>
-        <p:spPr/>
-        <p:txBody>
-          <a:bodyPr/>
-          <a:lstStyle/>
-          <a:p>
-            <a:r>
-              <a:rPr lang="de-DE" dirty="0"/>
-              <a:t>Der 3-Schritt-Workflow</a:t>
-            </a:r>
-            <a:endParaRPr lang="de-CH" dirty="0"/>
-          </a:p>
-        </p:txBody>
-      </p:sp>
-      <p:sp>
-        <p:nvSpPr>
-          <p:cNvPr id="3" name="Inhaltsplatzhalter 2">
-            <a:extLst>
-              <a:ext uri="{FF2B5EF4-FFF2-40B4-BE49-F238E27FC236}">
-                <a16:creationId xmlns:a16="http://schemas.microsoft.com/office/drawing/2014/main" id="{5D30C9CD-6F3E-4243-AF8B-598CBE0FFE30}"/>
-              </a:ext>
-            </a:extLst>
-          </p:cNvPr>
-          <p:cNvSpPr>
-            <a:spLocks noGrp="1"/>
-          </p:cNvSpPr>
-          <p:nvPr>
-            <p:ph idx="1"/>
-          </p:nvPr>
-        </p:nvSpPr>
-        <p:spPr/>
-        <p:txBody>
-          <a:bodyPr/>
-          <a:lstStyle/>
-          <a:p>
-            <a:pPr marL="0" indent="0">
-              <a:buNone/>
-            </a:pPr>
-            <a:r>
-              <a:rPr lang="de-DE" b="1" dirty="0"/>
-              <a:t>Schritt 1 — GPT-Anfrage</a:t>
-            </a:r>
-          </a:p>
-          <a:p>
-            <a:pPr marL="0" indent="0">
-              <a:buNone/>
-            </a:pPr>
-            <a:r>
-              <a:rPr lang="de-DE" dirty="0"/>
-              <a:t>Idee als Prompt formulieren — der Custom GPT generiert direkt ausführbaren Code.</a:t>
-            </a:r>
-          </a:p>
-          <a:p>
-            <a:pPr marL="0" indent="0">
-              <a:buNone/>
-            </a:pPr>
-            <a:r>
-              <a:rPr lang="de-DE" dirty="0"/>
-              <a:t/>
-            </a:r>
-          </a:p>
-          <a:p>
-            <a:pPr marL="0" indent="0">
-              <a:buNone/>
-            </a:pPr>
-            <a:r>
-              <a:rPr lang="de-DE" b="1" dirty="0"/>
-              <a:t>Schritt 2 — PlatformIO</a:t>
-            </a:r>
-          </a:p>
-          <a:p>
-            <a:pPr marL="0" indent="0">
-              <a:buNone/>
-            </a:pPr>
-            <a:r>
-              <a:rPr lang="de-DE" dirty="0"/>
-              <a:t>Code in src/main.cpp einfügen, Board pico32 auswählen, kompilieren.</a:t>
-            </a:r>
-          </a:p>
-          <a:p>
-            <a:pPr marL="0" indent="0">
-              <a:buNone/>
-            </a:pPr>
-            <a:r>
-              <a:rPr lang="de-DE" dirty="0"/>
-              <a:t/>
-            </a:r>
-          </a:p>
-          <a:p>
-            <a:pPr marL="0" indent="0">
-              <a:buNone/>
-            </a:pPr>
-            <a:r>
-              <a:rPr lang="de-DE" b="1" dirty="0"/>
-              <a:t>Schritt 3 — Deployen</a:t>
-            </a:r>
-          </a:p>
-          <a:p>
-            <a:pPr marL="0" indent="0">
-              <a:buNone/>
-            </a:pPr>
-            <a:r>
-              <a:rPr lang="de-DE" dirty="0"/>
-              <a:t>Code per USB auf den Controller übertragen — die Installation ist sofort live.</a:t>
-            </a:r>
-          </a:p>
-        </p:txBody>
-      </p:sp>
-      <p:sp>
-        <p:nvSpPr>
-          <p:cNvPr id="5" name="Fußzeilenplatzhalter 4">
-            <a:extLst>
-              <a:ext uri="{FF2B5EF4-FFF2-40B4-BE49-F238E27FC236}">
-                <a16:creationId xmlns:a16="http://schemas.microsoft.com/office/drawing/2014/main" id="{08000522-08D1-4C97-AE24-545093D719FE}"/>
-              </a:ext>
-            </a:extLst>
-          </p:cNvPr>
-          <p:cNvSpPr>
-            <a:spLocks noGrp="1"/>
-          </p:cNvSpPr>
-          <p:nvPr>
-            <p:ph type="ftr" sz="quarter" idx="3"/>
-          </p:nvPr>
-        </p:nvSpPr>
-        <p:spPr>
-          <a:xfrm>
-            <a:off x="2533972" y="6522444"/>
-            <a:ext cx="4038600" cy="215999"/>
-          </a:xfrm>
-        </p:spPr>
-        <p:txBody>
-          <a:bodyPr/>
-          <a:lstStyle/>
-          <a:p>
-            <a:r>
-              <a:rPr lang="de-DE" dirty="0"/>
-              <a:t xml:space="preserve">Design </a:t>
-            </a:r>
-            <a:r>
-              <a:rPr lang="de-DE" dirty="0" err="1"/>
-              <a:t>by</a:t>
-            </a:r>
-            <a:r>
-              <a:rPr lang="de-DE" dirty="0"/>
-              <a:t xml:space="preserve"> Technology</a:t>
-            </a:r>
-            <a:endParaRPr lang="de-CH" dirty="0"/>
-          </a:p>
-        </p:txBody>
-      </p:sp>
-      <p:sp>
-        <p:nvSpPr>
-          <p:cNvPr id="4" name="Datumsplatzhalter 3">
-            <a:extLst>
-              <a:ext uri="{FF2B5EF4-FFF2-40B4-BE49-F238E27FC236}">
-                <a16:creationId xmlns:a16="http://schemas.microsoft.com/office/drawing/2014/main" id="{3E5DECAF-74B9-42C9-91F9-16811C11DDD9}"/>
-              </a:ext>
-            </a:extLst>
-          </p:cNvPr>
-          <p:cNvSpPr>
-            <a:spLocks noGrp="1"/>
-          </p:cNvSpPr>
-          <p:nvPr>
-            <p:ph type="dt" sz="half" idx="2"/>
-          </p:nvPr>
-        </p:nvSpPr>
-        <p:spPr>
-          <a:xfrm>
-            <a:off x="10328132" y="6522442"/>
-            <a:ext cx="789039" cy="216001"/>
-          </a:xfrm>
-        </p:spPr>
-        <p:txBody>
-          <a:bodyPr/>
-          <a:lstStyle/>
-          <a:p>
-            <a:fld id="{255C2D81-634A-41B2-966F-5B8C1282A848}" type="datetime1">
-              <a:rPr lang="de-CH" noProof="0" smtClean="0"/>
-              <a:t>13.04.26</a:t>
-            </a:fld>
-            <a:endParaRPr lang="de-CH" noProof="0"/>
-          </a:p>
-        </p:txBody>
-      </p:sp>
-      <p:sp>
-        <p:nvSpPr>
-          <p:cNvPr id="6" name="Foliennummernplatzhalter 5">
-            <a:extLst>
-              <a:ext uri="{FF2B5EF4-FFF2-40B4-BE49-F238E27FC236}">
-                <a16:creationId xmlns:a16="http://schemas.microsoft.com/office/drawing/2014/main" id="{92390BB4-CA1A-4AB3-997F-BC93DE23C7B5}"/>
-              </a:ext>
-            </a:extLst>
-          </p:cNvPr>
-          <p:cNvSpPr>
-            <a:spLocks noGrp="1"/>
-          </p:cNvSpPr>
-          <p:nvPr>
-            <p:ph type="sldNum" sz="quarter" idx="4"/>
-          </p:nvPr>
-        </p:nvSpPr>
-        <p:spPr>
-          <a:xfrm>
-            <a:off x="11137585" y="6522444"/>
-            <a:ext cx="322577" cy="216000"/>
-          </a:xfrm>
-        </p:spPr>
-        <p:txBody>
-          <a:bodyPr/>
-          <a:lstStyle/>
-          <a:p>
-            <a:fld id="{5ACA52AF-F19D-405C-AD5F-7D94B96A5CC3}" type="slidenum">
-              <a:rPr lang="de-CH" noProof="0" smtClean="0"/>
-              <a:t>10</a:t>
-            </a:fld>
-            <a:endParaRPr lang="de-CH" noProof="0"/>
-          </a:p>
-        </p:txBody>
-      </p:sp>
-    </p:spTree>
-    <p:extLst>
-      <p:ext uri="{BB962C8B-B14F-4D97-AF65-F5344CB8AC3E}">
-        <p14:creationId xmlns:p14="http://schemas.microsoft.com/office/powerpoint/2010/main" val="2463831729"/>
       </p:ext>
     </p:extLst>
   </p:cSld>
@@ -23949,7 +23635,7 @@
           <p:cNvPr id="2" name="Titel 1">
             <a:extLst>
               <a:ext uri="{FF2B5EF4-FFF2-40B4-BE49-F238E27FC236}">
-                <a16:creationId xmlns:a16="http://schemas.microsoft.com/office/drawing/2014/main" id="{6B050A74-6ED2-41B3-AD63-74F89C447FBB}"/>
+                <a16:creationId xmlns:a16="http://schemas.microsoft.com/office/drawing/2014/main" id="{9FF31ECF-EF04-4AAA-9A8E-583E3D217F33}"/>
               </a:ext>
             </a:extLst>
           </p:cNvPr>
@@ -23967,7 +23653,7 @@
           <a:p>
             <a:r>
               <a:rPr lang="de-DE" dirty="0"/>
-              <a:t>Inhalt</a:t>
+              <a:t>Post-Code: KI als Entwicklungspartner</a:t>
             </a:r>
             <a:endParaRPr lang="de-CH" dirty="0"/>
           </a:p>
@@ -23978,7 +23664,7 @@
           <p:cNvPr id="3" name="Inhaltsplatzhalter 2">
             <a:extLst>
               <a:ext uri="{FF2B5EF4-FFF2-40B4-BE49-F238E27FC236}">
-                <a16:creationId xmlns:a16="http://schemas.microsoft.com/office/drawing/2014/main" id="{94792F61-F3A1-4E2C-B0EE-9742603FD08B}"/>
+                <a16:creationId xmlns:a16="http://schemas.microsoft.com/office/drawing/2014/main" id="{9EE0A683-618F-4D75-846F-0DB536B4E502}"/>
               </a:ext>
             </a:extLst>
           </p:cNvPr>
@@ -23998,8 +23684,17 @@
               <a:buNone/>
             </a:pPr>
             <a:r>
+              <a:rPr lang="de-DE" b="1" dirty="0"/>
+              <a:t>Das Paradigma des beschreibenden Entwickelns</a:t>
+            </a:r>
+          </a:p>
+          <a:p>
+            <a:pPr marL="0" indent="0">
+              <a:buNone/>
+            </a:pPr>
+            <a:r>
               <a:rPr lang="de-DE" dirty="0"/>
-              <a:t>01 — Der Paradigmenwechsel</a:t>
+              <a:t>“Post-Code” beschreibt eine Arbeitsweise, in der Ideen in natürlicher Sprache</a:t>
             </a:r>
           </a:p>
           <a:p>
@@ -24008,16 +23703,22 @@
             </a:pPr>
             <a:r>
               <a:rPr lang="de-DE" dirty="0"/>
-              <a:t>02 — Hardware &amp; Konzept</a:t>
+              <a:t>formuliert werden — und KI-Systeme die Übersetzung in lauffähigen Code übernehmen.</a:t>
             </a:r>
           </a:p>
           <a:p>
             <a:pPr marL="0" indent="0">
               <a:buNone/>
             </a:pPr>
+            <a:endParaRPr lang="de-DE" dirty="0"/>
+          </a:p>
+          <a:p>
+            <a:pPr marL="0" indent="0">
+              <a:buNone/>
+            </a:pPr>
             <a:r>
               <a:rPr lang="de-DE" dirty="0"/>
-              <a:t>03 — Das Custom GPT</a:t>
+              <a:t>Das bedeutet nicht, dass Programmierung irrelevant wird. Es bedeutet, dass der Einstieg</a:t>
             </a:r>
           </a:p>
           <a:p>
@@ -24026,9 +23727,32 @@
             </a:pPr>
             <a:r>
               <a:rPr lang="de-DE" dirty="0"/>
-              <a:t>04 — Eigenen GPT bauen</a:t>
-            </a:r>
-            <a:endParaRPr lang="de-CH" dirty="0"/>
+              <a:t>niedriger wird und der kreative Fokus an anderer Stelle liegt.</a:t>
+            </a:r>
+          </a:p>
+          <a:p>
+            <a:pPr marL="0" indent="0">
+              <a:buNone/>
+            </a:pPr>
+            <a:endParaRPr lang="de-DE" dirty="0"/>
+          </a:p>
+          <a:p>
+            <a:pPr marL="0" indent="0">
+              <a:buNone/>
+            </a:pPr>
+            <a:r>
+              <a:rPr lang="de-DE" dirty="0"/>
+              <a:t>Vergleichbar mit dem Übergang von Handlettering zu Schriftsatz — oder von</a:t>
+            </a:r>
+          </a:p>
+          <a:p>
+            <a:pPr marL="0" indent="0">
+              <a:buNone/>
+            </a:pPr>
+            <a:r>
+              <a:rPr lang="de-DE" dirty="0"/>
+              <a:t>Dunkelkammer zu Lightroom.</a:t>
+            </a:r>
           </a:p>
         </p:txBody>
       </p:sp>
@@ -24037,7 +23761,7 @@
           <p:cNvPr id="5" name="Fußzeilenplatzhalter 4">
             <a:extLst>
               <a:ext uri="{FF2B5EF4-FFF2-40B4-BE49-F238E27FC236}">
-                <a16:creationId xmlns:a16="http://schemas.microsoft.com/office/drawing/2014/main" id="{4A08BFF2-5DEB-4FE4-A3E3-C18FD3A38B4D}"/>
+                <a16:creationId xmlns:a16="http://schemas.microsoft.com/office/drawing/2014/main" id="{572B1E5F-FA5D-4B47-A43F-C570AFE8C6D3}"/>
               </a:ext>
             </a:extLst>
           </p:cNvPr>
@@ -24050,8 +23774,8 @@
         </p:nvSpPr>
         <p:spPr>
           <a:xfrm>
-            <a:off x="2576986" y="6510646"/>
-            <a:ext cx="4592521" cy="216000"/>
+            <a:off x="2550014" y="6522444"/>
+            <a:ext cx="4038600" cy="215999"/>
           </a:xfrm>
         </p:spPr>
         <p:txBody>
@@ -24059,18 +23783,52 @@
           <a:lstStyle/>
           <a:p>
             <a:r>
-              <a:rPr lang="de-DE" noProof="0" dirty="0"/>
-              <a:t xml:space="preserve">Design </a:t>
-            </a:r>
-            <a:r>
-              <a:rPr lang="de-DE" noProof="0" dirty="0" err="1"/>
+              <a:rPr lang="de-DE" dirty="0"/>
+              <a:t>Design </a:t>
+            </a:r>
+            <a:r>
+              <a:rPr lang="de-DE" dirty="0" err="1"/>
               <a:t>by</a:t>
             </a:r>
             <a:r>
-              <a:rPr lang="de-DE" noProof="0" dirty="0"/>
-              <a:t xml:space="preserve"> Technology</a:t>
-            </a:r>
-            <a:endParaRPr lang="de-CH" noProof="0" dirty="0"/>
+              <a:rPr lang="de-DE" dirty="0"/>
+              <a:t> Technology</a:t>
+            </a:r>
+            <a:endParaRPr lang="de-CH" dirty="0"/>
+          </a:p>
+        </p:txBody>
+      </p:sp>
+      <p:sp>
+        <p:nvSpPr>
+          <p:cNvPr id="4" name="Datumsplatzhalter 3">
+            <a:extLst>
+              <a:ext uri="{FF2B5EF4-FFF2-40B4-BE49-F238E27FC236}">
+                <a16:creationId xmlns:a16="http://schemas.microsoft.com/office/drawing/2014/main" id="{44DAA5A3-8CEF-4027-9289-B60138CD16A2}"/>
+              </a:ext>
+            </a:extLst>
+          </p:cNvPr>
+          <p:cNvSpPr>
+            <a:spLocks noGrp="1"/>
+          </p:cNvSpPr>
+          <p:nvPr>
+            <p:ph type="dt" sz="half" idx="2"/>
+          </p:nvPr>
+        </p:nvSpPr>
+        <p:spPr>
+          <a:xfrm>
+            <a:off x="10328132" y="6522442"/>
+            <a:ext cx="789039" cy="216001"/>
+          </a:xfrm>
+        </p:spPr>
+        <p:txBody>
+          <a:bodyPr/>
+          <a:lstStyle/>
+          <a:p>
+            <a:fld id="{8D93BFA6-70D2-4653-B5CB-D3376F3BFAE7}" type="datetime1">
+              <a:rPr lang="de-CH" noProof="0" smtClean="0"/>
+              <a:t>13.04.26</a:t>
+            </a:fld>
+            <a:endParaRPr lang="de-CH" noProof="0"/>
           </a:p>
         </p:txBody>
       </p:sp>
@@ -24079,7 +23837,7 @@
           <p:cNvPr id="6" name="Foliennummernplatzhalter 5">
             <a:extLst>
               <a:ext uri="{FF2B5EF4-FFF2-40B4-BE49-F238E27FC236}">
-                <a16:creationId xmlns:a16="http://schemas.microsoft.com/office/drawing/2014/main" id="{9D665EC3-3ED3-4D21-AC3C-EAD0881BA091}"/>
+                <a16:creationId xmlns:a16="http://schemas.microsoft.com/office/drawing/2014/main" id="{5C9B1E27-9E06-4598-A6EF-3BCBC8D0152F}"/>
               </a:ext>
             </a:extLst>
           </p:cNvPr>
@@ -24111,7 +23869,773 @@
     </p:spTree>
     <p:extLst>
       <p:ext uri="{BB962C8B-B14F-4D97-AF65-F5344CB8AC3E}">
-        <p14:creationId xmlns:p14="http://schemas.microsoft.com/office/powerpoint/2010/main" val="3164086109"/>
+        <p14:creationId xmlns:p14="http://schemas.microsoft.com/office/powerpoint/2010/main" val="294303585"/>
+      </p:ext>
+    </p:extLst>
+  </p:cSld>
+  <p:clrMapOvr>
+    <a:masterClrMapping/>
+  </p:clrMapOvr>
+</p:sld>
+</file>
+
+<file path=ppt/slides/slide7.xml><?xml version="1.0" encoding="utf-8"?>
+<p:sld xmlns:a="http://schemas.openxmlformats.org/drawingml/2006/main" xmlns:r="http://schemas.openxmlformats.org/officeDocument/2006/relationships" xmlns:p="http://schemas.openxmlformats.org/presentationml/2006/main">
+  <p:cSld>
+    <p:spTree>
+      <p:nvGrpSpPr>
+        <p:cNvPr id="1" name=""/>
+        <p:cNvGrpSpPr/>
+        <p:nvPr/>
+      </p:nvGrpSpPr>
+      <p:grpSpPr>
+        <a:xfrm>
+          <a:off x="0" y="0"/>
+          <a:ext cx="0" cy="0"/>
+          <a:chOff x="0" y="0"/>
+          <a:chExt cx="0" cy="0"/>
+        </a:xfrm>
+      </p:grpSpPr>
+      <p:sp>
+        <p:nvSpPr>
+          <p:cNvPr id="2" name="Titel 1">
+            <a:extLst>
+              <a:ext uri="{FF2B5EF4-FFF2-40B4-BE49-F238E27FC236}">
+                <a16:creationId xmlns:a16="http://schemas.microsoft.com/office/drawing/2014/main" id="{9FF31ECF-EF04-4AAA-9A8E-583E3D217F33}"/>
+              </a:ext>
+            </a:extLst>
+          </p:cNvPr>
+          <p:cNvSpPr>
+            <a:spLocks noGrp="1"/>
+          </p:cNvSpPr>
+          <p:nvPr>
+            <p:ph type="title"/>
+          </p:nvPr>
+        </p:nvSpPr>
+        <p:spPr/>
+        <p:txBody>
+          <a:bodyPr/>
+          <a:lstStyle/>
+          <a:p>
+            <a:r>
+              <a:rPr lang="de-DE" dirty="0"/>
+              <a:t>Embodied AI: Wenn KI den Raum betritt</a:t>
+            </a:r>
+            <a:endParaRPr lang="de-CH" dirty="0"/>
+          </a:p>
+        </p:txBody>
+      </p:sp>
+      <p:sp>
+        <p:nvSpPr>
+          <p:cNvPr id="3" name="Inhaltsplatzhalter 2">
+            <a:extLst>
+              <a:ext uri="{FF2B5EF4-FFF2-40B4-BE49-F238E27FC236}">
+                <a16:creationId xmlns:a16="http://schemas.microsoft.com/office/drawing/2014/main" id="{9EE0A683-618F-4D75-846F-0DB536B4E502}"/>
+              </a:ext>
+            </a:extLst>
+          </p:cNvPr>
+          <p:cNvSpPr>
+            <a:spLocks noGrp="1"/>
+          </p:cNvSpPr>
+          <p:nvPr>
+            <p:ph idx="1"/>
+          </p:nvPr>
+        </p:nvSpPr>
+        <p:spPr/>
+        <p:txBody>
+          <a:bodyPr/>
+          <a:lstStyle/>
+          <a:p>
+            <a:pPr marL="0" indent="0">
+              <a:buNone/>
+            </a:pPr>
+            <a:r>
+              <a:rPr lang="de-DE" b="1" dirty="0"/>
+              <a:t>Physical Computing als künstlerisches Medium</a:t>
+            </a:r>
+          </a:p>
+          <a:p>
+            <a:pPr marL="0" indent="0">
+              <a:buNone/>
+            </a:pPr>
+            <a:r>
+              <a:rPr lang="de-DE" dirty="0"/>
+              <a:t>Physical Computing verbindet digitale Logik mit physischer Welt: Sensoren lesen Bewegung,</a:t>
+            </a:r>
+          </a:p>
+          <a:p>
+            <a:pPr marL="0" indent="0">
+              <a:buNone/>
+            </a:pPr>
+            <a:r>
+              <a:rPr lang="de-DE" dirty="0"/>
+              <a:t>Licht, Gesten — Aktoren reagieren mit Sound, Licht, Mechanik.</a:t>
+            </a:r>
+          </a:p>
+          <a:p>
+            <a:pPr marL="0" indent="0">
+              <a:buNone/>
+            </a:pPr>
+            <a:endParaRPr lang="de-DE" dirty="0"/>
+          </a:p>
+          <a:p>
+            <a:pPr marL="0" indent="0">
+              <a:buNone/>
+            </a:pPr>
+            <a:r>
+              <a:rPr lang="de-DE" dirty="0"/>
+              <a:t>KI macht dieses Medium heute für Künstler:innen ohne Programmierhintergrund zugänglich.</a:t>
+            </a:r>
+          </a:p>
+          <a:p>
+            <a:pPr marL="0" indent="0">
+              <a:buNone/>
+            </a:pPr>
+            <a:endParaRPr lang="de-DE" dirty="0"/>
+          </a:p>
+          <a:p>
+            <a:pPr marL="0" indent="0">
+              <a:buNone/>
+            </a:pPr>
+            <a:r>
+              <a:rPr lang="de-DE" dirty="0"/>
+              <a:t>Die Fragen bleiben: Was soll das Objekt wahrnehmen? Wie soll es reagieren?</a:t>
+            </a:r>
+          </a:p>
+          <a:p>
+            <a:pPr marL="0" indent="0">
+              <a:buNone/>
+            </a:pPr>
+            <a:r>
+              <a:rPr lang="de-DE" dirty="0"/>
+              <a:t>Welche Interaktion entsteht? KI unterstützt bei der technischen Umsetzung dieser Fragen.</a:t>
+            </a:r>
+          </a:p>
+        </p:txBody>
+      </p:sp>
+      <p:sp>
+        <p:nvSpPr>
+          <p:cNvPr id="5" name="Fußzeilenplatzhalter 4">
+            <a:extLst>
+              <a:ext uri="{FF2B5EF4-FFF2-40B4-BE49-F238E27FC236}">
+                <a16:creationId xmlns:a16="http://schemas.microsoft.com/office/drawing/2014/main" id="{572B1E5F-FA5D-4B47-A43F-C570AFE8C6D3}"/>
+              </a:ext>
+            </a:extLst>
+          </p:cNvPr>
+          <p:cNvSpPr>
+            <a:spLocks noGrp="1"/>
+          </p:cNvSpPr>
+          <p:nvPr>
+            <p:ph type="ftr" sz="quarter" idx="3"/>
+          </p:nvPr>
+        </p:nvSpPr>
+        <p:spPr>
+          <a:xfrm>
+            <a:off x="2550014" y="6522444"/>
+            <a:ext cx="4038600" cy="215999"/>
+          </a:xfrm>
+        </p:spPr>
+        <p:txBody>
+          <a:bodyPr/>
+          <a:lstStyle/>
+          <a:p>
+            <a:r>
+              <a:rPr lang="de-DE" dirty="0"/>
+              <a:t>Design </a:t>
+            </a:r>
+            <a:r>
+              <a:rPr lang="de-DE" dirty="0" err="1"/>
+              <a:t>by</a:t>
+            </a:r>
+            <a:r>
+              <a:rPr lang="de-DE" dirty="0"/>
+              <a:t> Technology</a:t>
+            </a:r>
+            <a:endParaRPr lang="de-CH" dirty="0"/>
+          </a:p>
+        </p:txBody>
+      </p:sp>
+      <p:sp>
+        <p:nvSpPr>
+          <p:cNvPr id="4" name="Datumsplatzhalter 3">
+            <a:extLst>
+              <a:ext uri="{FF2B5EF4-FFF2-40B4-BE49-F238E27FC236}">
+                <a16:creationId xmlns:a16="http://schemas.microsoft.com/office/drawing/2014/main" id="{44DAA5A3-8CEF-4027-9289-B60138CD16A2}"/>
+              </a:ext>
+            </a:extLst>
+          </p:cNvPr>
+          <p:cNvSpPr>
+            <a:spLocks noGrp="1"/>
+          </p:cNvSpPr>
+          <p:nvPr>
+            <p:ph type="dt" sz="half" idx="2"/>
+          </p:nvPr>
+        </p:nvSpPr>
+        <p:spPr>
+          <a:xfrm>
+            <a:off x="10328132" y="6522442"/>
+            <a:ext cx="789039" cy="216001"/>
+          </a:xfrm>
+        </p:spPr>
+        <p:txBody>
+          <a:bodyPr/>
+          <a:lstStyle/>
+          <a:p>
+            <a:fld id="{8D93BFA6-70D2-4653-B5CB-D3376F3BFAE7}" type="datetime1">
+              <a:rPr lang="de-CH" noProof="0" smtClean="0"/>
+              <a:t>13.04.26</a:t>
+            </a:fld>
+            <a:endParaRPr lang="de-CH" noProof="0"/>
+          </a:p>
+        </p:txBody>
+      </p:sp>
+      <p:sp>
+        <p:nvSpPr>
+          <p:cNvPr id="6" name="Foliennummernplatzhalter 5">
+            <a:extLst>
+              <a:ext uri="{FF2B5EF4-FFF2-40B4-BE49-F238E27FC236}">
+                <a16:creationId xmlns:a16="http://schemas.microsoft.com/office/drawing/2014/main" id="{5C9B1E27-9E06-4598-A6EF-3BCBC8D0152F}"/>
+              </a:ext>
+            </a:extLst>
+          </p:cNvPr>
+          <p:cNvSpPr>
+            <a:spLocks noGrp="1"/>
+          </p:cNvSpPr>
+          <p:nvPr>
+            <p:ph type="sldNum" sz="quarter" idx="4"/>
+          </p:nvPr>
+        </p:nvSpPr>
+        <p:spPr>
+          <a:xfrm>
+            <a:off x="11137585" y="6522444"/>
+            <a:ext cx="322577" cy="216000"/>
+          </a:xfrm>
+        </p:spPr>
+        <p:txBody>
+          <a:bodyPr/>
+          <a:lstStyle/>
+          <a:p>
+            <a:fld id="{5ACA52AF-F19D-405C-AD5F-7D94B96A5CC3}" type="slidenum">
+              <a:rPr lang="de-CH" noProof="0" smtClean="0"/>
+              <a:t>7</a:t>
+            </a:fld>
+            <a:endParaRPr lang="de-CH" noProof="0"/>
+          </a:p>
+        </p:txBody>
+      </p:sp>
+    </p:spTree>
+    <p:extLst>
+      <p:ext uri="{BB962C8B-B14F-4D97-AF65-F5344CB8AC3E}">
+        <p14:creationId xmlns:p14="http://schemas.microsoft.com/office/powerpoint/2010/main" val="294303585"/>
+      </p:ext>
+    </p:extLst>
+  </p:cSld>
+  <p:clrMapOvr>
+    <a:masterClrMapping/>
+  </p:clrMapOvr>
+</p:sld>
+</file>
+
+<file path=ppt/slides/slide8.xml><?xml version="1.0" encoding="utf-8"?>
+<p:sld xmlns:a="http://schemas.openxmlformats.org/drawingml/2006/main" xmlns:r="http://schemas.openxmlformats.org/officeDocument/2006/relationships" xmlns:p="http://schemas.openxmlformats.org/presentationml/2006/main">
+  <p:cSld>
+    <p:spTree>
+      <p:nvGrpSpPr>
+        <p:cNvPr id="1" name=""/>
+        <p:cNvGrpSpPr/>
+        <p:nvPr/>
+      </p:nvGrpSpPr>
+      <p:grpSpPr>
+        <a:xfrm>
+          <a:off x="0" y="0"/>
+          <a:ext cx="0" cy="0"/>
+          <a:chOff x="0" y="0"/>
+          <a:chExt cx="0" cy="0"/>
+        </a:xfrm>
+      </p:grpSpPr>
+      <p:sp>
+        <p:nvSpPr>
+          <p:cNvPr id="2" name="Titel 1">
+            <a:extLst>
+              <a:ext uri="{FF2B5EF4-FFF2-40B4-BE49-F238E27FC236}">
+                <a16:creationId xmlns:a16="http://schemas.microsoft.com/office/drawing/2014/main" id="{DA757BF2-5EC6-42D6-9F04-4237E99FD6E5}"/>
+              </a:ext>
+            </a:extLst>
+          </p:cNvPr>
+          <p:cNvSpPr>
+            <a:spLocks noGrp="1"/>
+          </p:cNvSpPr>
+          <p:nvPr>
+            <p:ph type="title"/>
+          </p:nvPr>
+        </p:nvSpPr>
+        <p:spPr/>
+        <p:txBody>
+          <a:bodyPr/>
+          <a:lstStyle/>
+          <a:p>
+            <a:r>
+              <a:rPr lang="de-DE" dirty="0"/>
+              <a:t>02</a:t>
+            </a:r>
+            <a:br>
+              <a:rPr lang="de-DE" dirty="0"/>
+            </a:br>
+            <a:r>
+              <a:rPr lang="de-DE" dirty="0"/>
+              <a:t>Hardware &amp; Konzept</a:t>
+            </a:r>
+          </a:p>
+        </p:txBody>
+      </p:sp>
+      <p:sp>
+        <p:nvSpPr>
+          <p:cNvPr id="4" name="Fußzeilenplatzhalter 3">
+            <a:extLst>
+              <a:ext uri="{FF2B5EF4-FFF2-40B4-BE49-F238E27FC236}">
+                <a16:creationId xmlns:a16="http://schemas.microsoft.com/office/drawing/2014/main" id="{9DDD7CFF-BF36-47E4-8302-EBC181BD33D4}"/>
+              </a:ext>
+            </a:extLst>
+          </p:cNvPr>
+          <p:cNvSpPr>
+            <a:spLocks noGrp="1"/>
+          </p:cNvSpPr>
+          <p:nvPr>
+            <p:ph type="ftr" sz="quarter" idx="3"/>
+          </p:nvPr>
+        </p:nvSpPr>
+        <p:spPr>
+          <a:xfrm>
+            <a:off x="2100838" y="6522444"/>
+            <a:ext cx="4038600" cy="215999"/>
+          </a:xfrm>
+        </p:spPr>
+        <p:txBody>
+          <a:bodyPr/>
+          <a:lstStyle/>
+          <a:p>
+            <a:r>
+              <a:rPr lang="de-DE" dirty="0"/>
+              <a:t>Design </a:t>
+            </a:r>
+            <a:r>
+              <a:rPr lang="de-DE" dirty="0" err="1"/>
+              <a:t>by</a:t>
+            </a:r>
+            <a:r>
+              <a:rPr lang="de-DE" dirty="0"/>
+              <a:t> Technology</a:t>
+            </a:r>
+            <a:endParaRPr lang="de-CH" dirty="0"/>
+          </a:p>
+        </p:txBody>
+      </p:sp>
+      <p:sp>
+        <p:nvSpPr>
+          <p:cNvPr id="3" name="Datumsplatzhalter 2">
+            <a:extLst>
+              <a:ext uri="{FF2B5EF4-FFF2-40B4-BE49-F238E27FC236}">
+                <a16:creationId xmlns:a16="http://schemas.microsoft.com/office/drawing/2014/main" id="{4DEEA281-37DD-45CF-AABF-2BFEAD6C860F}"/>
+              </a:ext>
+            </a:extLst>
+          </p:cNvPr>
+          <p:cNvSpPr>
+            <a:spLocks noGrp="1"/>
+          </p:cNvSpPr>
+          <p:nvPr>
+            <p:ph type="dt" sz="half" idx="2"/>
+          </p:nvPr>
+        </p:nvSpPr>
+        <p:spPr>
+          <a:xfrm>
+            <a:off x="10328132" y="6522442"/>
+            <a:ext cx="789039" cy="216001"/>
+          </a:xfrm>
+        </p:spPr>
+        <p:txBody>
+          <a:bodyPr/>
+          <a:lstStyle/>
+          <a:p>
+            <a:fld id="{43402617-726E-42A6-AC19-79D267EAC7EE}" type="datetime1">
+              <a:rPr lang="de-CH" noProof="0" smtClean="0"/>
+              <a:t>13.04.26</a:t>
+            </a:fld>
+            <a:endParaRPr lang="de-CH" noProof="0"/>
+          </a:p>
+        </p:txBody>
+      </p:sp>
+      <p:sp>
+        <p:nvSpPr>
+          <p:cNvPr id="5" name="Foliennummernplatzhalter 4">
+            <a:extLst>
+              <a:ext uri="{FF2B5EF4-FFF2-40B4-BE49-F238E27FC236}">
+                <a16:creationId xmlns:a16="http://schemas.microsoft.com/office/drawing/2014/main" id="{3DB16F61-62BA-4FA3-89CE-2F599E6DE0EF}"/>
+              </a:ext>
+            </a:extLst>
+          </p:cNvPr>
+          <p:cNvSpPr>
+            <a:spLocks noGrp="1"/>
+          </p:cNvSpPr>
+          <p:nvPr>
+            <p:ph type="sldNum" sz="quarter" idx="4"/>
+          </p:nvPr>
+        </p:nvSpPr>
+        <p:spPr>
+          <a:xfrm>
+            <a:off x="11137585" y="6522444"/>
+            <a:ext cx="322577" cy="216000"/>
+          </a:xfrm>
+        </p:spPr>
+        <p:txBody>
+          <a:bodyPr/>
+          <a:lstStyle/>
+          <a:p>
+            <a:fld id="{5ACA52AF-F19D-405C-AD5F-7D94B96A5CC3}" type="slidenum">
+              <a:rPr lang="de-CH" noProof="0" smtClean="0"/>
+              <a:pPr/>
+              <a:t>8</a:t>
+            </a:fld>
+            <a:endParaRPr lang="de-CH" noProof="0"/>
+          </a:p>
+        </p:txBody>
+      </p:sp>
+    </p:spTree>
+    <p:extLst>
+      <p:ext uri="{BB962C8B-B14F-4D97-AF65-F5344CB8AC3E}">
+        <p14:creationId xmlns:p14="http://schemas.microsoft.com/office/powerpoint/2010/main" val="766234280"/>
+      </p:ext>
+    </p:extLst>
+  </p:cSld>
+  <p:clrMapOvr>
+    <a:masterClrMapping/>
+  </p:clrMapOvr>
+</p:sld>
+</file>
+
+<file path=ppt/slides/slide9.xml><?xml version="1.0" encoding="utf-8"?>
+<p:sld xmlns:a="http://schemas.openxmlformats.org/drawingml/2006/main" xmlns:r="http://schemas.openxmlformats.org/officeDocument/2006/relationships" xmlns:p="http://schemas.openxmlformats.org/presentationml/2006/main">
+  <p:cSld>
+    <p:spTree>
+      <p:nvGrpSpPr>
+        <p:cNvPr id="1" name=""/>
+        <p:cNvGrpSpPr/>
+        <p:nvPr/>
+      </p:nvGrpSpPr>
+      <p:grpSpPr>
+        <a:xfrm>
+          <a:off x="0" y="0"/>
+          <a:ext cx="0" cy="0"/>
+          <a:chOff x="0" y="0"/>
+          <a:chExt cx="0" cy="0"/>
+        </a:xfrm>
+      </p:grpSpPr>
+      <p:pic>
+        <p:nvPicPr>
+          <p:cNvPr id="9" name="Bildplatzhalter 8" descr="Ein Bild, das Elektronik, Elektrische Leitungen, Elektrisches Bauelement, Elektronisches Bauteil enthält.&#10;&#10;KI-generierte Inhalte können fehlerhaft sein.">
+            <a:extLst>
+              <a:ext uri="{FF2B5EF4-FFF2-40B4-BE49-F238E27FC236}">
+                <a16:creationId xmlns:a16="http://schemas.microsoft.com/office/drawing/2014/main" id="{C5695578-589C-7BD3-1269-92ACB45C8E90}"/>
+              </a:ext>
+            </a:extLst>
+          </p:cNvPr>
+          <p:cNvPicPr>
+            <a:picLocks noGrp="1" noChangeAspect="1"/>
+          </p:cNvPicPr>
+          <p:nvPr>
+            <p:ph type="pic" sz="quarter" idx="13"/>
+          </p:nvPr>
+        </p:nvPicPr>
+        <p:blipFill>
+          <a:blip r:embed="rId2">
+            <a:extLst>
+              <a:ext uri="{28A0092B-C50C-407E-A947-70E740481C1C}">
+                <a14:useLocalDpi xmlns:a14="http://schemas.microsoft.com/office/drawing/2010/main" val="0"/>
+              </a:ext>
+            </a:extLst>
+          </a:blip>
+          <a:srcRect l="13134" r="13134"/>
+          <a:stretch>
+            <a:fillRect/>
+          </a:stretch>
+        </p:blipFill>
+        <p:spPr>
+          <a:xfrm>
+            <a:off x="1" y="0"/>
+            <a:ext cx="6095999" cy="6200774"/>
+          </a:xfrm>
+          <a:prstGeom prst="rect">
+            <a:avLst/>
+          </a:prstGeom>
+          <a:solidFill>
+            <a:srgbClr val="9B8357">
+              <a:lumMod val="20000"/>
+              <a:lumOff val="80000"/>
+            </a:srgbClr>
+          </a:solidFill>
+        </p:spPr>
+      </p:pic>
+      <p:sp>
+        <p:nvSpPr>
+          <p:cNvPr id="2" name="Titel 1">
+            <a:extLst>
+              <a:ext uri="{FF2B5EF4-FFF2-40B4-BE49-F238E27FC236}">
+                <a16:creationId xmlns:a16="http://schemas.microsoft.com/office/drawing/2014/main" id="{CCD79B13-3C6D-410C-8179-6B3490718B07}"/>
+              </a:ext>
+            </a:extLst>
+          </p:cNvPr>
+          <p:cNvSpPr>
+            <a:spLocks noGrp="1"/>
+          </p:cNvSpPr>
+          <p:nvPr>
+            <p:ph type="title"/>
+          </p:nvPr>
+        </p:nvSpPr>
+        <p:spPr/>
+        <p:txBody>
+          <a:bodyPr/>
+          <a:lstStyle/>
+          <a:p>
+            <a:r>
+              <a:rPr lang="de-DE" dirty="0"/>
+              <a:t>Das Toolkit</a:t>
+            </a:r>
+            <a:endParaRPr lang="de-CH" dirty="0"/>
+          </a:p>
+        </p:txBody>
+      </p:sp>
+      <p:sp>
+        <p:nvSpPr>
+          <p:cNvPr id="3" name="Inhaltsplatzhalter 2">
+            <a:extLst>
+              <a:ext uri="{FF2B5EF4-FFF2-40B4-BE49-F238E27FC236}">
+                <a16:creationId xmlns:a16="http://schemas.microsoft.com/office/drawing/2014/main" id="{DD1C6779-ACCD-4204-B972-A9B2595451EA}"/>
+              </a:ext>
+            </a:extLst>
+          </p:cNvPr>
+          <p:cNvSpPr>
+            <a:spLocks noGrp="1"/>
+          </p:cNvSpPr>
+          <p:nvPr>
+            <p:ph idx="1"/>
+          </p:nvPr>
+        </p:nvSpPr>
+        <p:spPr/>
+        <p:txBody>
+          <a:bodyPr/>
+          <a:lstStyle/>
+          <a:p>
+            <a:pPr marL="0" indent="0">
+              <a:buNone/>
+            </a:pPr>
+            <a:r>
+              <a:rPr lang="de-DE" b="1" dirty="0"/>
+              <a:t>Microcontroller</a:t>
+            </a:r>
+          </a:p>
+          <a:p>
+            <a:pPr marL="0" indent="0">
+              <a:buNone/>
+            </a:pPr>
+            <a:r>
+              <a:rPr lang="de-DE" dirty="0"/>
+              <a:t>ESP32-PICO-KIT — WLAN + Bluetooth, 240 MHz, 4 MB Flash</a:t>
+            </a:r>
+          </a:p>
+          <a:p>
+            <a:pPr marL="0" indent="0">
+              <a:buNone/>
+            </a:pPr>
+            <a:endParaRPr lang="de-DE" dirty="0"/>
+          </a:p>
+          <a:p>
+            <a:pPr marL="0" indent="0">
+              <a:buNone/>
+            </a:pPr>
+            <a:r>
+              <a:rPr lang="de-DE" b="1" dirty="0"/>
+              <a:t>Sensoren</a:t>
+            </a:r>
+          </a:p>
+          <a:p>
+            <a:pPr marL="0" indent="0">
+              <a:buNone/>
+            </a:pPr>
+            <a:r>
+              <a:rPr lang="de-DE" dirty="0"/>
+              <a:t>APDS9960 — Gestenerkennung, Farbe, Nähe</a:t>
+            </a:r>
+          </a:p>
+          <a:p>
+            <a:pPr marL="0" indent="0">
+              <a:buNone/>
+            </a:pPr>
+            <a:r>
+              <a:rPr lang="de-DE" dirty="0"/>
+              <a:t>MPU6050 — 6-Achsen Beschleunigung &amp; Gyro</a:t>
+            </a:r>
+          </a:p>
+          <a:p>
+            <a:pPr marL="0" indent="0">
+              <a:buNone/>
+            </a:pPr>
+            <a:r>
+              <a:rPr lang="de-DE" dirty="0"/>
+              <a:t>Taster (GPIO 0)</a:t>
+            </a:r>
+          </a:p>
+          <a:p>
+            <a:pPr marL="0" indent="0">
+              <a:buNone/>
+            </a:pPr>
+            <a:endParaRPr lang="de-DE" dirty="0"/>
+          </a:p>
+          <a:p>
+            <a:pPr marL="0" indent="0">
+              <a:buNone/>
+            </a:pPr>
+            <a:r>
+              <a:rPr lang="de-DE" b="1" dirty="0"/>
+              <a:t>Aktoren</a:t>
+            </a:r>
+          </a:p>
+          <a:p>
+            <a:pPr marL="0" indent="0">
+              <a:buNone/>
+            </a:pPr>
+            <a:r>
+              <a:rPr lang="de-DE" dirty="0"/>
+              <a:t>NeoPixel-Strip — RGB-LEDs (GPIO 14)</a:t>
+            </a:r>
+          </a:p>
+          <a:p>
+            <a:pPr marL="0" indent="0">
+              <a:buNone/>
+            </a:pPr>
+            <a:r>
+              <a:rPr lang="de-DE" dirty="0"/>
+              <a:t>Servo-Motor (GPIO 12)</a:t>
+            </a:r>
+          </a:p>
+        </p:txBody>
+      </p:sp>
+      <p:sp>
+        <p:nvSpPr>
+          <p:cNvPr id="5" name="Fußzeilenplatzhalter 4">
+            <a:extLst>
+              <a:ext uri="{FF2B5EF4-FFF2-40B4-BE49-F238E27FC236}">
+                <a16:creationId xmlns:a16="http://schemas.microsoft.com/office/drawing/2014/main" id="{58F6FD95-BB89-40C0-BC74-30458C4F33AB}"/>
+              </a:ext>
+            </a:extLst>
+          </p:cNvPr>
+          <p:cNvSpPr>
+            <a:spLocks noGrp="1"/>
+          </p:cNvSpPr>
+          <p:nvPr>
+            <p:ph type="ftr" sz="quarter" idx="3"/>
+          </p:nvPr>
+        </p:nvSpPr>
+        <p:spPr>
+          <a:xfrm>
+            <a:off x="2533972" y="6522444"/>
+            <a:ext cx="4038600" cy="215999"/>
+          </a:xfrm>
+        </p:spPr>
+        <p:txBody>
+          <a:bodyPr/>
+          <a:lstStyle/>
+          <a:p>
+            <a:r>
+              <a:rPr lang="de-DE" dirty="0"/>
+              <a:t>Design </a:t>
+            </a:r>
+            <a:r>
+              <a:rPr lang="de-DE" dirty="0" err="1"/>
+              <a:t>by</a:t>
+            </a:r>
+            <a:r>
+              <a:rPr lang="de-DE" dirty="0"/>
+              <a:t> Technology.        </a:t>
+            </a:r>
+            <a:r>
+              <a:rPr lang="de-DE" dirty="0" err="1"/>
+              <a:t>PathFinder</a:t>
+            </a:r>
+            <a:endParaRPr lang="de-CH" dirty="0"/>
+          </a:p>
+        </p:txBody>
+      </p:sp>
+      <p:sp>
+        <p:nvSpPr>
+          <p:cNvPr id="4" name="Datumsplatzhalter 3">
+            <a:extLst>
+              <a:ext uri="{FF2B5EF4-FFF2-40B4-BE49-F238E27FC236}">
+                <a16:creationId xmlns:a16="http://schemas.microsoft.com/office/drawing/2014/main" id="{E561EB33-26DA-4BFB-9717-A85E7FB5C915}"/>
+              </a:ext>
+            </a:extLst>
+          </p:cNvPr>
+          <p:cNvSpPr>
+            <a:spLocks noGrp="1"/>
+          </p:cNvSpPr>
+          <p:nvPr>
+            <p:ph type="dt" sz="half" idx="2"/>
+          </p:nvPr>
+        </p:nvSpPr>
+        <p:spPr>
+          <a:xfrm>
+            <a:off x="10328132" y="6522442"/>
+            <a:ext cx="789039" cy="216001"/>
+          </a:xfrm>
+        </p:spPr>
+        <p:txBody>
+          <a:bodyPr/>
+          <a:lstStyle/>
+          <a:p>
+            <a:fld id="{3883C902-160B-4538-99A8-1486892643D4}" type="datetime1">
+              <a:rPr lang="de-CH" noProof="0" smtClean="0"/>
+              <a:t>13.04.26</a:t>
+            </a:fld>
+            <a:endParaRPr lang="de-CH" noProof="0"/>
+          </a:p>
+        </p:txBody>
+      </p:sp>
+      <p:sp>
+        <p:nvSpPr>
+          <p:cNvPr id="6" name="Foliennummernplatzhalter 5">
+            <a:extLst>
+              <a:ext uri="{FF2B5EF4-FFF2-40B4-BE49-F238E27FC236}">
+                <a16:creationId xmlns:a16="http://schemas.microsoft.com/office/drawing/2014/main" id="{3F2CD38D-E3F5-46D6-96B1-4BEB06DA84C2}"/>
+              </a:ext>
+            </a:extLst>
+          </p:cNvPr>
+          <p:cNvSpPr>
+            <a:spLocks noGrp="1"/>
+          </p:cNvSpPr>
+          <p:nvPr>
+            <p:ph type="sldNum" sz="quarter" idx="4"/>
+          </p:nvPr>
+        </p:nvSpPr>
+        <p:spPr>
+          <a:xfrm>
+            <a:off x="11137585" y="6522444"/>
+            <a:ext cx="322577" cy="216000"/>
+          </a:xfrm>
+        </p:spPr>
+        <p:txBody>
+          <a:bodyPr/>
+          <a:lstStyle/>
+          <a:p>
+            <a:fld id="{5ACA52AF-F19D-405C-AD5F-7D94B96A5CC3}" type="slidenum">
+              <a:rPr lang="de-CH" noProof="0" smtClean="0"/>
+              <a:t>9</a:t>
+            </a:fld>
+            <a:endParaRPr lang="de-CH" noProof="0"/>
+          </a:p>
+        </p:txBody>
+      </p:sp>
+    </p:spTree>
+    <p:extLst>
+      <p:ext uri="{BB962C8B-B14F-4D97-AF65-F5344CB8AC3E}">
+        <p14:creationId xmlns:p14="http://schemas.microsoft.com/office/powerpoint/2010/main" val="3328173493"/>
       </p:ext>
     </p:extLst>
   </p:cSld>
